--- a/Predicting Asthma Exacerbations with ML.pptx
+++ b/Predicting Asthma Exacerbations with ML.pptx
@@ -5,7 +5,7 @@
     <p:sldMasterId id="2147483648" r:id="rId1"/>
   </p:sldMasterIdLst>
   <p:notesMasterIdLst>
-    <p:notesMasterId r:id="rId15"/>
+    <p:notesMasterId r:id="rId14"/>
   </p:notesMasterIdLst>
   <p:sldIdLst>
     <p:sldId id="256" r:id="rId2"/>
@@ -13,14 +13,13 @@
     <p:sldId id="258" r:id="rId4"/>
     <p:sldId id="259" r:id="rId5"/>
     <p:sldId id="269" r:id="rId6"/>
-    <p:sldId id="260" r:id="rId7"/>
-    <p:sldId id="261" r:id="rId8"/>
-    <p:sldId id="262" r:id="rId9"/>
-    <p:sldId id="263" r:id="rId10"/>
-    <p:sldId id="264" r:id="rId11"/>
-    <p:sldId id="265" r:id="rId12"/>
-    <p:sldId id="266" r:id="rId13"/>
-    <p:sldId id="268" r:id="rId14"/>
+    <p:sldId id="261" r:id="rId7"/>
+    <p:sldId id="262" r:id="rId8"/>
+    <p:sldId id="263" r:id="rId9"/>
+    <p:sldId id="264" r:id="rId10"/>
+    <p:sldId id="265" r:id="rId11"/>
+    <p:sldId id="266" r:id="rId12"/>
+    <p:sldId id="268" r:id="rId13"/>
   </p:sldIdLst>
   <p:sldSz cx="12192000" cy="6858000"/>
   <p:notesSz cx="6858000" cy="9144000"/>
@@ -322,6 +321,11 @@
       </a:defRPr>
     </a:lvl9pPr>
   </p:defaultTextStyle>
+  <p:extLst>
+    <p:ext uri="{EFAFB233-063F-42B5-8137-9DF3F51BA10A}">
+      <p15:sldGuideLst xmlns:p15="http://schemas.microsoft.com/office/powerpoint/2012/main"/>
+    </p:ext>
+  </p:extLst>
 </p:presentation>
 </file>
 
@@ -2938,7 +2942,7 @@
           </a:ln>
           <a:extLst>
             <a:ext uri="{C572A759-6A51-4108-AA02-DFA0A04FC94B}">
-              <ma14:wrappingTextBoxFlag xmlns:ma14="http://schemas.microsoft.com/office/mac/drawingml/2011/main" xmlns:a14="http://schemas.microsoft.com/office/drawing/2010/main" xmlns:m="http://schemas.openxmlformats.org/officeDocument/2006/math" xmlns="" val="1"/>
+              <ma14:wrappingTextBoxFlag xmlns="" xmlns:m="http://schemas.openxmlformats.org/officeDocument/2006/math" xmlns:a14="http://schemas.microsoft.com/office/drawing/2010/main" xmlns:ma14="http://schemas.microsoft.com/office/mac/drawingml/2011/main" val="1"/>
             </a:ext>
           </a:extLst>
         </p:spPr>
@@ -2977,7 +2981,7 @@
           </a:ln>
           <a:extLst>
             <a:ext uri="{C572A759-6A51-4108-AA02-DFA0A04FC94B}">
-              <ma14:wrappingTextBoxFlag xmlns:ma14="http://schemas.microsoft.com/office/mac/drawingml/2011/main" xmlns:a14="http://schemas.microsoft.com/office/drawing/2010/main" xmlns:m="http://schemas.openxmlformats.org/officeDocument/2006/math" xmlns="" val="1"/>
+              <ma14:wrappingTextBoxFlag xmlns="" xmlns:m="http://schemas.openxmlformats.org/officeDocument/2006/math" xmlns:a14="http://schemas.microsoft.com/office/drawing/2010/main" xmlns:ma14="http://schemas.microsoft.com/office/mac/drawingml/2011/main" val="1"/>
             </a:ext>
           </a:extLst>
         </p:spPr>
@@ -3903,7 +3907,7 @@
           </a:ln>
           <a:extLst>
             <a:ext uri="{C572A759-6A51-4108-AA02-DFA0A04FC94B}">
-              <ma14:wrappingTextBoxFlag xmlns:ma14="http://schemas.microsoft.com/office/mac/drawingml/2011/main" xmlns:a14="http://schemas.microsoft.com/office/drawing/2010/main" xmlns:m="http://schemas.openxmlformats.org/officeDocument/2006/math" xmlns="" val="1"/>
+              <ma14:wrappingTextBoxFlag xmlns="" xmlns:m="http://schemas.openxmlformats.org/officeDocument/2006/math" xmlns:a14="http://schemas.microsoft.com/office/drawing/2010/main" xmlns:ma14="http://schemas.microsoft.com/office/mac/drawingml/2011/main" val="1"/>
             </a:ext>
           </a:extLst>
         </p:spPr>
@@ -3940,7 +3944,7 @@
         <p:spPr>
           <a:xfrm>
             <a:off x="1809750" y="3842444"/>
-            <a:ext cx="8572500" cy="279401"/>
+            <a:ext cx="8572500" cy="392030"/>
           </a:xfrm>
           <a:prstGeom prst="rect">
             <a:avLst/>
@@ -3950,7 +3954,7 @@
           </a:ln>
           <a:extLst>
             <a:ext uri="{C572A759-6A51-4108-AA02-DFA0A04FC94B}">
-              <ma14:wrappingTextBoxFlag xmlns:ma14="http://schemas.microsoft.com/office/mac/drawingml/2011/main" xmlns:a14="http://schemas.microsoft.com/office/drawing/2010/main" xmlns:m="http://schemas.openxmlformats.org/officeDocument/2006/math" xmlns="" val="1"/>
+              <ma14:wrappingTextBoxFlag xmlns="" xmlns:m="http://schemas.openxmlformats.org/officeDocument/2006/math" xmlns:a14="http://schemas.microsoft.com/office/drawing/2010/main" xmlns:ma14="http://schemas.microsoft.com/office/mac/drawingml/2011/main" val="1"/>
             </a:ext>
           </a:extLst>
         </p:spPr>
@@ -3976,7 +3980,16 @@
           </a:lstStyle>
           <a:p>
             <a:r>
-              <a:t>A Genome-Wide Association Study using Random Forests Classifiers</a:t>
+              <a:rPr dirty="0"/>
+              <a:t>A Genome-Wide Association Study using </a:t>
+            </a:r>
+            <a:r>
+              <a:rPr b="1" dirty="0"/>
+              <a:t>Random Forests</a:t>
+            </a:r>
+            <a:r>
+              <a:rPr dirty="0"/>
+              <a:t> Classifiers</a:t>
             </a:r>
           </a:p>
         </p:txBody>
@@ -4027,7 +4040,7 @@
           </a:ln>
           <a:extLst>
             <a:ext uri="{C572A759-6A51-4108-AA02-DFA0A04FC94B}">
-              <ma14:wrappingTextBoxFlag xmlns:ma14="http://schemas.microsoft.com/office/mac/drawingml/2011/main" xmlns:a14="http://schemas.microsoft.com/office/drawing/2010/main" xmlns:m="http://schemas.openxmlformats.org/officeDocument/2006/math" xmlns="" val="1"/>
+              <ma14:wrappingTextBoxFlag xmlns="" xmlns:m="http://schemas.openxmlformats.org/officeDocument/2006/math" xmlns:a14="http://schemas.microsoft.com/office/drawing/2010/main" xmlns:ma14="http://schemas.microsoft.com/office/mac/drawingml/2011/main" val="1"/>
             </a:ext>
           </a:extLst>
         </p:spPr>
@@ -4077,7 +4090,7 @@
           </a:ln>
           <a:extLst>
             <a:ext uri="{C572A759-6A51-4108-AA02-DFA0A04FC94B}">
-              <ma14:wrappingTextBoxFlag xmlns:ma14="http://schemas.microsoft.com/office/mac/drawingml/2011/main" xmlns:a14="http://schemas.microsoft.com/office/drawing/2010/main" xmlns:m="http://schemas.openxmlformats.org/officeDocument/2006/math" xmlns="" val="1"/>
+              <ma14:wrappingTextBoxFlag xmlns="" xmlns:m="http://schemas.openxmlformats.org/officeDocument/2006/math" xmlns:a14="http://schemas.microsoft.com/office/drawing/2010/main" xmlns:ma14="http://schemas.microsoft.com/office/mac/drawingml/2011/main" val="1"/>
             </a:ext>
           </a:extLst>
         </p:spPr>
@@ -4136,7 +4149,7 @@
       </p:grpSpPr>
       <p:pic>
         <p:nvPicPr>
-          <p:cNvPr id="222" name="Google Shape;219;p21" descr="Google Shape;219;p21"/>
+          <p:cNvPr id="242" name="Google Shape;242;p22" descr="Google Shape;242;p22"/>
           <p:cNvPicPr>
             <a:picLocks noChangeAspect="1"/>
           </p:cNvPicPr>
@@ -4161,9 +4174,93 @@
           </a:ln>
         </p:spPr>
       </p:pic>
+      <p:sp>
+        <p:nvSpPr>
+          <p:cNvPr id="243" name="Google Shape;243;p22"/>
+          <p:cNvSpPr txBox="1"/>
+          <p:nvPr/>
+        </p:nvSpPr>
+        <p:spPr>
+          <a:xfrm>
+            <a:off x="571500" y="762000"/>
+            <a:ext cx="5200650" cy="939800"/>
+          </a:xfrm>
+          <a:prstGeom prst="rect">
+            <a:avLst/>
+          </a:prstGeom>
+          <a:ln w="12700">
+            <a:miter lim="400000"/>
+          </a:ln>
+          <a:extLst>
+            <a:ext uri="{C572A759-6A51-4108-AA02-DFA0A04FC94B}">
+              <ma14:wrappingTextBoxFlag xmlns="" xmlns:m="http://schemas.openxmlformats.org/officeDocument/2006/math" xmlns:a14="http://schemas.microsoft.com/office/drawing/2010/main" xmlns:ma14="http://schemas.microsoft.com/office/mac/drawingml/2011/main" val="1"/>
+            </a:ext>
+          </a:extLst>
+        </p:spPr>
+        <p:txBody>
+          <a:bodyPr lIns="0" tIns="0" rIns="0" bIns="0">
+            <a:spAutoFit/>
+          </a:bodyPr>
+          <a:lstStyle>
+            <a:lvl1pPr>
+              <a:defRPr sz="3100" b="1">
+                <a:solidFill>
+                  <a:srgbClr val="1E3A8A"/>
+                </a:solidFill>
+                <a:latin typeface="Roboto Slab"/>
+                <a:ea typeface="Roboto Slab"/>
+                <a:cs typeface="Roboto Slab"/>
+                <a:sym typeface="Roboto Slab"/>
+              </a:defRPr>
+            </a:lvl1pPr>
+          </a:lstStyle>
+          <a:p>
+            <a:r>
+              <a:t>Vision: Data Science in BFE</a:t>
+            </a:r>
+          </a:p>
+        </p:txBody>
+      </p:sp>
+      <p:sp>
+        <p:nvSpPr>
+          <p:cNvPr id="244" name="Google Shape;244;p22"/>
+          <p:cNvSpPr/>
+          <p:nvPr/>
+        </p:nvSpPr>
+        <p:spPr>
+          <a:xfrm>
+            <a:off x="571500" y="1952625"/>
+            <a:ext cx="4953000" cy="28575"/>
+          </a:xfrm>
+          <a:prstGeom prst="rect">
+            <a:avLst/>
+          </a:prstGeom>
+          <a:solidFill>
+            <a:srgbClr val="3B82F6"/>
+          </a:solidFill>
+          <a:ln w="12700">
+            <a:miter lim="400000"/>
+          </a:ln>
+        </p:spPr>
+        <p:txBody>
+          <a:bodyPr lIns="0" tIns="0" rIns="0" bIns="0" anchor="ctr"/>
+          <a:lstStyle/>
+          <a:p>
+            <a:pPr algn="ctr">
+              <a:defRPr sz="1800">
+                <a:latin typeface="Calibri"/>
+                <a:ea typeface="Calibri"/>
+                <a:cs typeface="Calibri"/>
+                <a:sym typeface="Calibri"/>
+              </a:defRPr>
+            </a:pPr>
+            <a:endParaRPr/>
+          </a:p>
+        </p:txBody>
+      </p:sp>
       <p:pic>
         <p:nvPicPr>
-          <p:cNvPr id="223" name="Google Shape;220;p21" descr="Google Shape;220;p21"/>
+          <p:cNvPr id="245" name="Google Shape;245;p22" descr="Google Shape;245;p22"/>
           <p:cNvPicPr>
             <a:picLocks noChangeAspect="1"/>
           </p:cNvPicPr>
@@ -4177,8 +4274,8 @@
         </p:blipFill>
         <p:spPr>
           <a:xfrm>
-            <a:off x="571500" y="2014536"/>
-            <a:ext cx="5238750" cy="3905251"/>
+            <a:off x="6096000" y="0"/>
+            <a:ext cx="6096000" cy="6858000"/>
           </a:xfrm>
           <a:prstGeom prst="rect">
             <a:avLst/>
@@ -4188,43 +4285,16 @@
           </a:ln>
         </p:spPr>
       </p:pic>
-      <p:pic>
-        <p:nvPicPr>
-          <p:cNvPr id="224" name="Google Shape;221;p21" descr="Google Shape;221;p21"/>
-          <p:cNvPicPr>
-            <a:picLocks noChangeAspect="1"/>
-          </p:cNvPicPr>
-          <p:nvPr/>
-        </p:nvPicPr>
-        <p:blipFill>
-          <a:blip r:embed="rId4"/>
-          <a:stretch>
-            <a:fillRect/>
-          </a:stretch>
-        </p:blipFill>
-        <p:spPr>
-          <a:xfrm>
-            <a:off x="6381750" y="1862136"/>
-            <a:ext cx="5238750" cy="4210051"/>
-          </a:xfrm>
-          <a:prstGeom prst="rect">
-            <a:avLst/>
-          </a:prstGeom>
-          <a:ln w="12700">
-            <a:miter lim="400000"/>
-          </a:ln>
-        </p:spPr>
-      </p:pic>
-      <p:sp>
-        <p:nvSpPr>
-          <p:cNvPr id="225" name="Google Shape;222;p21"/>
+      <p:sp>
+        <p:nvSpPr>
+          <p:cNvPr id="246" name="Google Shape;246;p22"/>
           <p:cNvSpPr txBox="1"/>
           <p:nvPr/>
         </p:nvSpPr>
         <p:spPr>
           <a:xfrm>
-            <a:off x="904874" y="2890836"/>
-            <a:ext cx="4850608" cy="317501"/>
+            <a:off x="571500" y="2362200"/>
+            <a:ext cx="4630578" cy="317500"/>
           </a:xfrm>
           <a:prstGeom prst="rect">
             <a:avLst/>
@@ -4234,7 +4304,7 @@
           </a:ln>
           <a:extLst>
             <a:ext uri="{C572A759-6A51-4108-AA02-DFA0A04FC94B}">
-              <ma14:wrappingTextBoxFlag xmlns:ma14="http://schemas.microsoft.com/office/mac/drawingml/2011/main" xmlns:a14="http://schemas.microsoft.com/office/drawing/2010/main" xmlns:m="http://schemas.openxmlformats.org/officeDocument/2006/math" xmlns="" val="1"/>
+              <ma14:wrappingTextBoxFlag xmlns="" xmlns:m="http://schemas.openxmlformats.org/officeDocument/2006/math" xmlns:a14="http://schemas.microsoft.com/office/drawing/2010/main" xmlns:ma14="http://schemas.microsoft.com/office/mac/drawingml/2011/main" val="1"/>
             </a:ext>
           </a:extLst>
         </p:spPr>
@@ -4257,21 +4327,21 @@
           </a:lstStyle>
           <a:p>
             <a:r>
-              <a:t>Rigorous Validation</a:t>
-            </a:r>
-          </a:p>
-        </p:txBody>
-      </p:sp>
-      <p:sp>
-        <p:nvSpPr>
-          <p:cNvPr id="226" name="Google Shape;223;p21"/>
+              <a:t>Integrating Computation &amp; Biology</a:t>
+            </a:r>
+          </a:p>
+        </p:txBody>
+      </p:sp>
+      <p:sp>
+        <p:nvSpPr>
+          <p:cNvPr id="247" name="Google Shape;247;p22"/>
           <p:cNvSpPr txBox="1"/>
           <p:nvPr/>
         </p:nvSpPr>
         <p:spPr>
           <a:xfrm>
-            <a:off x="904875" y="3386137"/>
-            <a:ext cx="4619625" cy="228601"/>
+            <a:off x="571500" y="2857500"/>
+            <a:ext cx="4953000" cy="960121"/>
           </a:xfrm>
           <a:prstGeom prst="rect">
             <a:avLst/>
@@ -4281,7 +4351,7 @@
           </a:ln>
           <a:extLst>
             <a:ext uri="{C572A759-6A51-4108-AA02-DFA0A04FC94B}">
-              <ma14:wrappingTextBoxFlag xmlns:ma14="http://schemas.microsoft.com/office/mac/drawingml/2011/main" xmlns:a14="http://schemas.microsoft.com/office/drawing/2010/main" xmlns:m="http://schemas.openxmlformats.org/officeDocument/2006/math" xmlns="" val="1"/>
+              <ma14:wrappingTextBoxFlag xmlns="" xmlns:m="http://schemas.openxmlformats.org/officeDocument/2006/math" xmlns:a14="http://schemas.microsoft.com/office/drawing/2010/main" xmlns:ma14="http://schemas.microsoft.com/office/mac/drawingml/2011/main" val="1"/>
             </a:ext>
           </a:extLst>
         </p:spPr>
@@ -4307,21 +4377,21 @@
           </a:lstStyle>
           <a:p>
             <a:r>
-              <a:t>We did not just test on the training data.</a:t>
-            </a:r>
-          </a:p>
-        </p:txBody>
-      </p:sp>
-      <p:sp>
-        <p:nvSpPr>
-          <p:cNvPr id="227" name="Google Shape;224;p21"/>
+              <a:t>My goal is to establish a functional lab at GTIIT that bridges the gap between biological engineering and data science.</a:t>
+            </a:r>
+          </a:p>
+        </p:txBody>
+      </p:sp>
+      <p:sp>
+        <p:nvSpPr>
+          <p:cNvPr id="248" name="Google Shape;248;p22"/>
           <p:cNvSpPr txBox="1"/>
           <p:nvPr/>
         </p:nvSpPr>
         <p:spPr>
           <a:xfrm>
-            <a:off x="6715125" y="2738436"/>
-            <a:ext cx="4850607" cy="317501"/>
+            <a:off x="685800" y="4057650"/>
+            <a:ext cx="76200" cy="228600"/>
           </a:xfrm>
           <a:prstGeom prst="rect">
             <a:avLst/>
@@ -4331,131 +4401,7 @@
           </a:ln>
           <a:extLst>
             <a:ext uri="{C572A759-6A51-4108-AA02-DFA0A04FC94B}">
-              <ma14:wrappingTextBoxFlag xmlns:ma14="http://schemas.microsoft.com/office/mac/drawingml/2011/main" xmlns:a14="http://schemas.microsoft.com/office/drawing/2010/main" xmlns:m="http://schemas.openxmlformats.org/officeDocument/2006/math" xmlns="" val="1"/>
-            </a:ext>
-          </a:extLst>
-        </p:spPr>
-        <p:txBody>
-          <a:bodyPr lIns="0" tIns="0" rIns="0" bIns="0">
-            <a:spAutoFit/>
-          </a:bodyPr>
-          <a:lstStyle>
-            <a:lvl1pPr>
-              <a:defRPr sz="2100" b="1">
-                <a:solidFill>
-                  <a:srgbClr val="0F766E"/>
-                </a:solidFill>
-                <a:latin typeface="Roboto Slab"/>
-                <a:ea typeface="Roboto Slab"/>
-                <a:cs typeface="Roboto Slab"/>
-                <a:sym typeface="Roboto Slab"/>
-              </a:defRPr>
-            </a:lvl1pPr>
-          </a:lstStyle>
-          <a:p>
-            <a:r>
-              <a:t>Recognition</a:t>
-            </a:r>
-          </a:p>
-        </p:txBody>
-      </p:sp>
-      <p:sp>
-        <p:nvSpPr>
-          <p:cNvPr id="228" name="Google Shape;225;p21"/>
-          <p:cNvSpPr txBox="1"/>
-          <p:nvPr/>
-        </p:nvSpPr>
-        <p:spPr>
-          <a:xfrm>
-            <a:off x="6715125" y="3233736"/>
-            <a:ext cx="4619625" cy="228601"/>
-          </a:xfrm>
-          <a:prstGeom prst="rect">
-            <a:avLst/>
-          </a:prstGeom>
-          <a:ln w="12700">
-            <a:miter lim="400000"/>
-          </a:ln>
-          <a:extLst>
-            <a:ext uri="{C572A759-6A51-4108-AA02-DFA0A04FC94B}">
-              <ma14:wrappingTextBoxFlag xmlns:ma14="http://schemas.microsoft.com/office/mac/drawingml/2011/main" xmlns:a14="http://schemas.microsoft.com/office/drawing/2010/main" xmlns:m="http://schemas.openxmlformats.org/officeDocument/2006/math" xmlns="" val="1"/>
-            </a:ext>
-          </a:extLst>
-        </p:spPr>
-        <p:txBody>
-          <a:bodyPr lIns="0" tIns="0" rIns="0" bIns="0">
-            <a:spAutoFit/>
-          </a:bodyPr>
-          <a:lstStyle>
-            <a:lvl1pPr>
-              <a:lnSpc>
-                <a:spcPct val="160000"/>
-              </a:lnSpc>
-              <a:defRPr sz="1500">
-                <a:solidFill>
-                  <a:srgbClr val="334155"/>
-                </a:solidFill>
-                <a:latin typeface="Open Sans"/>
-                <a:ea typeface="Open Sans"/>
-                <a:cs typeface="Open Sans"/>
-                <a:sym typeface="Open Sans"/>
-              </a:defRPr>
-            </a:lvl1pPr>
-          </a:lstStyle>
-          <a:p>
-            <a:r>
-              <a:t>This work was highlighted for its innovative approach:</a:t>
-            </a:r>
-          </a:p>
-        </p:txBody>
-      </p:sp>
-      <p:pic>
-        <p:nvPicPr>
-          <p:cNvPr id="229" name="Google Shape;226;p21" descr="Google Shape;226;p21"/>
-          <p:cNvPicPr>
-            <a:picLocks noChangeAspect="1"/>
-          </p:cNvPicPr>
-          <p:nvPr/>
-        </p:nvPicPr>
-        <p:blipFill>
-          <a:blip r:embed="rId5"/>
-          <a:stretch>
-            <a:fillRect/>
-          </a:stretch>
-        </p:blipFill>
-        <p:spPr>
-          <a:xfrm>
-            <a:off x="904875" y="2319336"/>
-            <a:ext cx="333375" cy="381001"/>
-          </a:xfrm>
-          <a:prstGeom prst="rect">
-            <a:avLst/>
-          </a:prstGeom>
-          <a:ln w="12700">
-            <a:miter lim="400000"/>
-          </a:ln>
-        </p:spPr>
-      </p:pic>
-      <p:sp>
-        <p:nvSpPr>
-          <p:cNvPr id="230" name="Google Shape;227;p21"/>
-          <p:cNvSpPr txBox="1"/>
-          <p:nvPr/>
-        </p:nvSpPr>
-        <p:spPr>
-          <a:xfrm>
-            <a:off x="1019175" y="3843337"/>
-            <a:ext cx="76200" cy="228601"/>
-          </a:xfrm>
-          <a:prstGeom prst="rect">
-            <a:avLst/>
-          </a:prstGeom>
-          <a:ln w="12700">
-            <a:miter lim="400000"/>
-          </a:ln>
-          <a:extLst>
-            <a:ext uri="{C572A759-6A51-4108-AA02-DFA0A04FC94B}">
-              <ma14:wrappingTextBoxFlag xmlns:ma14="http://schemas.microsoft.com/office/mac/drawingml/2011/main" xmlns:a14="http://schemas.microsoft.com/office/drawing/2010/main" xmlns:m="http://schemas.openxmlformats.org/officeDocument/2006/math" xmlns="" val="1"/>
+              <ma14:wrappingTextBoxFlag xmlns="" xmlns:m="http://schemas.openxmlformats.org/officeDocument/2006/math" xmlns:a14="http://schemas.microsoft.com/office/drawing/2010/main" xmlns:ma14="http://schemas.microsoft.com/office/mac/drawingml/2011/main" val="1"/>
             </a:ext>
           </a:extLst>
         </p:spPr>
@@ -4485,14 +4431,14 @@
       </p:sp>
       <p:sp>
         <p:nvSpPr>
-          <p:cNvPr id="231" name="Google Shape;228;p21"/>
+          <p:cNvPr id="249" name="Google Shape;249;p22"/>
           <p:cNvSpPr txBox="1"/>
           <p:nvPr/>
         </p:nvSpPr>
         <p:spPr>
           <a:xfrm>
-            <a:off x="1171575" y="3843337"/>
-            <a:ext cx="4352925" cy="594361"/>
+            <a:off x="838200" y="4057650"/>
+            <a:ext cx="4686300" cy="594361"/>
           </a:xfrm>
           <a:prstGeom prst="rect">
             <a:avLst/>
@@ -4502,7 +4448,7 @@
           </a:ln>
           <a:extLst>
             <a:ext uri="{C572A759-6A51-4108-AA02-DFA0A04FC94B}">
-              <ma14:wrappingTextBoxFlag xmlns:ma14="http://schemas.microsoft.com/office/mac/drawingml/2011/main" xmlns:a14="http://schemas.microsoft.com/office/drawing/2010/main" xmlns:m="http://schemas.openxmlformats.org/officeDocument/2006/math" xmlns="" val="1"/>
+              <ma14:wrappingTextBoxFlag xmlns="" xmlns:m="http://schemas.openxmlformats.org/officeDocument/2006/math" xmlns:a14="http://schemas.microsoft.com/office/drawing/2010/main" xmlns:ma14="http://schemas.microsoft.com/office/mac/drawingml/2011/main" val="1"/>
             </a:ext>
           </a:extLst>
         </p:spPr>
@@ -4527,25 +4473,25 @@
               </a:defRPr>
             </a:pPr>
             <a:r>
-              <a:t>Permutation Testing:</a:t>
+              <a:t>Curriculum:</a:t>
             </a:r>
             <a:r>
               <a:rPr b="0"/>
-              <a:t> Confirmed results were not due to chance.</a:t>
-            </a:r>
-          </a:p>
-        </p:txBody>
-      </p:sp>
-      <p:sp>
-        <p:nvSpPr>
-          <p:cNvPr id="232" name="Google Shape;229;p21"/>
+              <a:t> Introducing practical ML and Bioinformatics training for students.</a:t>
+            </a:r>
+          </a:p>
+        </p:txBody>
+      </p:sp>
+      <p:sp>
+        <p:nvSpPr>
+          <p:cNvPr id="250" name="Google Shape;250;p22"/>
           <p:cNvSpPr txBox="1"/>
           <p:nvPr/>
         </p:nvSpPr>
         <p:spPr>
           <a:xfrm>
-            <a:off x="1019175" y="4567237"/>
-            <a:ext cx="76200" cy="228601"/>
+            <a:off x="685800" y="4781550"/>
+            <a:ext cx="76200" cy="228600"/>
           </a:xfrm>
           <a:prstGeom prst="rect">
             <a:avLst/>
@@ -4555,7 +4501,7 @@
           </a:ln>
           <a:extLst>
             <a:ext uri="{C572A759-6A51-4108-AA02-DFA0A04FC94B}">
-              <ma14:wrappingTextBoxFlag xmlns:ma14="http://schemas.microsoft.com/office/mac/drawingml/2011/main" xmlns:a14="http://schemas.microsoft.com/office/drawing/2010/main" xmlns:m="http://schemas.openxmlformats.org/officeDocument/2006/math" xmlns="" val="1"/>
+              <ma14:wrappingTextBoxFlag xmlns="" xmlns:m="http://schemas.openxmlformats.org/officeDocument/2006/math" xmlns:a14="http://schemas.microsoft.com/office/drawing/2010/main" xmlns:ma14="http://schemas.microsoft.com/office/mac/drawingml/2011/main" val="1"/>
             </a:ext>
           </a:extLst>
         </p:spPr>
@@ -4585,14 +4531,14 @@
       </p:sp>
       <p:sp>
         <p:nvSpPr>
-          <p:cNvPr id="233" name="Google Shape;230;p21"/>
+          <p:cNvPr id="251" name="Google Shape;251;p22"/>
           <p:cNvSpPr txBox="1"/>
           <p:nvPr/>
         </p:nvSpPr>
         <p:spPr>
           <a:xfrm>
-            <a:off x="1171575" y="4567237"/>
-            <a:ext cx="4352925" cy="960121"/>
+            <a:off x="838200" y="4781550"/>
+            <a:ext cx="4686300" cy="594361"/>
           </a:xfrm>
           <a:prstGeom prst="rect">
             <a:avLst/>
@@ -4602,7 +4548,7 @@
           </a:ln>
           <a:extLst>
             <a:ext uri="{C572A759-6A51-4108-AA02-DFA0A04FC94B}">
-              <ma14:wrappingTextBoxFlag xmlns:ma14="http://schemas.microsoft.com/office/mac/drawingml/2011/main" xmlns:a14="http://schemas.microsoft.com/office/drawing/2010/main" xmlns:m="http://schemas.openxmlformats.org/officeDocument/2006/math" xmlns="" val="1"/>
+              <ma14:wrappingTextBoxFlag xmlns="" xmlns:m="http://schemas.openxmlformats.org/officeDocument/2006/math" xmlns:a14="http://schemas.microsoft.com/office/drawing/2010/main" xmlns:ma14="http://schemas.microsoft.com/office/mac/drawingml/2011/main" val="1"/>
             </a:ext>
           </a:extLst>
         </p:spPr>
@@ -4627,52 +4573,25 @@
               </a:defRPr>
             </a:pPr>
             <a:r>
-              <a:t>Independent Replication:</a:t>
+              <a:t>Research:</a:t>
             </a:r>
             <a:r>
               <a:rPr b="0"/>
-              <a:t> The model was tested on a separate cohort of 164 subjects, maintaining an AUC of 0.66.</a:t>
-            </a:r>
-          </a:p>
-        </p:txBody>
-      </p:sp>
-      <p:pic>
-        <p:nvPicPr>
-          <p:cNvPr id="234" name="Google Shape;231;p21" descr="Google Shape;231;p21"/>
-          <p:cNvPicPr>
-            <a:picLocks noChangeAspect="1"/>
-          </p:cNvPicPr>
-          <p:nvPr/>
-        </p:nvPicPr>
-        <p:blipFill>
-          <a:blip r:embed="rId6"/>
-          <a:stretch>
-            <a:fillRect/>
-          </a:stretch>
-        </p:blipFill>
-        <p:spPr>
-          <a:xfrm>
-            <a:off x="6715125" y="2166936"/>
-            <a:ext cx="428625" cy="381001"/>
-          </a:xfrm>
-          <a:prstGeom prst="rect">
-            <a:avLst/>
-          </a:prstGeom>
-          <a:ln w="12700">
-            <a:miter lim="400000"/>
-          </a:ln>
-        </p:spPr>
-      </p:pic>
-      <p:sp>
-        <p:nvSpPr>
-          <p:cNvPr id="235" name="Google Shape;232;p21"/>
+              <a:t> Developing explainable AI pipelines for complex food and biological data.</a:t>
+            </a:r>
+          </a:p>
+        </p:txBody>
+      </p:sp>
+      <p:sp>
+        <p:nvSpPr>
+          <p:cNvPr id="252" name="Google Shape;252;p22"/>
           <p:cNvSpPr txBox="1"/>
           <p:nvPr/>
         </p:nvSpPr>
         <p:spPr>
           <a:xfrm>
-            <a:off x="6829425" y="3995737"/>
-            <a:ext cx="76200" cy="228601"/>
+            <a:off x="685800" y="5505450"/>
+            <a:ext cx="76200" cy="228600"/>
           </a:xfrm>
           <a:prstGeom prst="rect">
             <a:avLst/>
@@ -4682,7 +4601,7 @@
           </a:ln>
           <a:extLst>
             <a:ext uri="{C572A759-6A51-4108-AA02-DFA0A04FC94B}">
-              <ma14:wrappingTextBoxFlag xmlns:ma14="http://schemas.microsoft.com/office/mac/drawingml/2011/main" xmlns:a14="http://schemas.microsoft.com/office/drawing/2010/main" xmlns:m="http://schemas.openxmlformats.org/officeDocument/2006/math" xmlns="" val="1"/>
+              <ma14:wrappingTextBoxFlag xmlns="" xmlns:m="http://schemas.openxmlformats.org/officeDocument/2006/math" xmlns:a14="http://schemas.microsoft.com/office/drawing/2010/main" xmlns:ma14="http://schemas.microsoft.com/office/mac/drawingml/2011/main" val="1"/>
             </a:ext>
           </a:extLst>
         </p:spPr>
@@ -4712,14 +4631,14 @@
       </p:sp>
       <p:sp>
         <p:nvSpPr>
-          <p:cNvPr id="236" name="Google Shape;233;p21"/>
+          <p:cNvPr id="253" name="Google Shape;253;p22"/>
           <p:cNvSpPr txBox="1"/>
           <p:nvPr/>
         </p:nvSpPr>
         <p:spPr>
           <a:xfrm>
-            <a:off x="6981825" y="3995737"/>
-            <a:ext cx="4352925" cy="594361"/>
+            <a:off x="838200" y="5505450"/>
+            <a:ext cx="4686300" cy="594361"/>
           </a:xfrm>
           <a:prstGeom prst="rect">
             <a:avLst/>
@@ -4729,7 +4648,7 @@
           </a:ln>
           <a:extLst>
             <a:ext uri="{C572A759-6A51-4108-AA02-DFA0A04FC94B}">
-              <ma14:wrappingTextBoxFlag xmlns:ma14="http://schemas.microsoft.com/office/mac/drawingml/2011/main" xmlns:a14="http://schemas.microsoft.com/office/drawing/2010/main" xmlns:m="http://schemas.openxmlformats.org/officeDocument/2006/math" xmlns="" val="1"/>
+              <ma14:wrappingTextBoxFlag xmlns="" xmlns:m="http://schemas.openxmlformats.org/officeDocument/2006/math" xmlns:a14="http://schemas.microsoft.com/office/drawing/2010/main" xmlns:ma14="http://schemas.microsoft.com/office/mac/drawingml/2011/main" val="1"/>
             </a:ext>
           </a:extLst>
         </p:spPr>
@@ -4754,196 +4673,12 @@
               </a:defRPr>
             </a:pPr>
             <a:r>
-              <a:t>ATS 2009:</a:t>
+              <a:t>Innovation:</a:t>
             </a:r>
             <a:r>
               <a:rPr b="0"/>
-              <a:t> Featured at the "Scientific Breakthroughs of the Year" symposium.</a:t>
-            </a:r>
-          </a:p>
-        </p:txBody>
-      </p:sp>
-      <p:sp>
-        <p:nvSpPr>
-          <p:cNvPr id="237" name="Google Shape;234;p21"/>
-          <p:cNvSpPr txBox="1"/>
-          <p:nvPr/>
-        </p:nvSpPr>
-        <p:spPr>
-          <a:xfrm>
-            <a:off x="6829425" y="4719637"/>
-            <a:ext cx="76200" cy="228601"/>
-          </a:xfrm>
-          <a:prstGeom prst="rect">
-            <a:avLst/>
-          </a:prstGeom>
-          <a:ln w="12700">
-            <a:miter lim="400000"/>
-          </a:ln>
-          <a:extLst>
-            <a:ext uri="{C572A759-6A51-4108-AA02-DFA0A04FC94B}">
-              <ma14:wrappingTextBoxFlag xmlns:ma14="http://schemas.microsoft.com/office/mac/drawingml/2011/main" xmlns:a14="http://schemas.microsoft.com/office/drawing/2010/main" xmlns:m="http://schemas.openxmlformats.org/officeDocument/2006/math" xmlns="" val="1"/>
-            </a:ext>
-          </a:extLst>
-        </p:spPr>
-        <p:txBody>
-          <a:bodyPr lIns="0" tIns="0" rIns="0" bIns="0">
-            <a:spAutoFit/>
-          </a:bodyPr>
-          <a:lstStyle>
-            <a:lvl1pPr>
-              <a:defRPr sz="1500">
-                <a:solidFill>
-                  <a:srgbClr val="334155"/>
-                </a:solidFill>
-                <a:latin typeface="Open Sans"/>
-                <a:ea typeface="Open Sans"/>
-                <a:cs typeface="Open Sans"/>
-                <a:sym typeface="Open Sans"/>
-              </a:defRPr>
-            </a:lvl1pPr>
-          </a:lstStyle>
-          <a:p>
-            <a:r>
-              <a:t>•</a:t>
-            </a:r>
-          </a:p>
-        </p:txBody>
-      </p:sp>
-      <p:sp>
-        <p:nvSpPr>
-          <p:cNvPr id="238" name="Google Shape;235;p21"/>
-          <p:cNvSpPr txBox="1"/>
-          <p:nvPr/>
-        </p:nvSpPr>
-        <p:spPr>
-          <a:xfrm>
-            <a:off x="6981825" y="4719637"/>
-            <a:ext cx="4352925" cy="960121"/>
-          </a:xfrm>
-          <a:prstGeom prst="rect">
-            <a:avLst/>
-          </a:prstGeom>
-          <a:ln w="12700">
-            <a:miter lim="400000"/>
-          </a:ln>
-          <a:extLst>
-            <a:ext uri="{C572A759-6A51-4108-AA02-DFA0A04FC94B}">
-              <ma14:wrappingTextBoxFlag xmlns:ma14="http://schemas.microsoft.com/office/mac/drawingml/2011/main" xmlns:a14="http://schemas.microsoft.com/office/drawing/2010/main" xmlns:m="http://schemas.openxmlformats.org/officeDocument/2006/math" xmlns="" val="1"/>
-            </a:ext>
-          </a:extLst>
-        </p:spPr>
-        <p:txBody>
-          <a:bodyPr lIns="0" tIns="0" rIns="0" bIns="0">
-            <a:spAutoFit/>
-          </a:bodyPr>
-          <a:lstStyle/>
-          <a:p>
-            <a:pPr>
-              <a:lnSpc>
-                <a:spcPct val="160000"/>
-              </a:lnSpc>
-              <a:defRPr sz="1500" b="1">
-                <a:solidFill>
-                  <a:srgbClr val="334155"/>
-                </a:solidFill>
-                <a:latin typeface="Open Sans"/>
-                <a:ea typeface="Open Sans"/>
-                <a:cs typeface="Open Sans"/>
-                <a:sym typeface="Open Sans"/>
-              </a:defRPr>
-            </a:pPr>
-            <a:r>
-              <a:t>Impact:</a:t>
-            </a:r>
-            <a:r>
-              <a:rPr b="0"/>
-              <a:t> Categorized as "Highly Accessed" by BMC Medical Genetics, influencing future ML-GWAS integration studies.</a:t>
-            </a:r>
-          </a:p>
-        </p:txBody>
-      </p:sp>
-      <p:sp>
-        <p:nvSpPr>
-          <p:cNvPr id="239" name="Google Shape;236;p21"/>
-          <p:cNvSpPr txBox="1"/>
-          <p:nvPr/>
-        </p:nvSpPr>
-        <p:spPr>
-          <a:xfrm>
-            <a:off x="571500" y="571500"/>
-            <a:ext cx="11601450" cy="469900"/>
-          </a:xfrm>
-          <a:prstGeom prst="rect">
-            <a:avLst/>
-          </a:prstGeom>
-          <a:ln w="12700">
-            <a:miter lim="400000"/>
-          </a:ln>
-          <a:extLst>
-            <a:ext uri="{C572A759-6A51-4108-AA02-DFA0A04FC94B}">
-              <ma14:wrappingTextBoxFlag xmlns:ma14="http://schemas.microsoft.com/office/mac/drawingml/2011/main" xmlns:a14="http://schemas.microsoft.com/office/drawing/2010/main" xmlns:m="http://schemas.openxmlformats.org/officeDocument/2006/math" xmlns="" val="1"/>
-            </a:ext>
-          </a:extLst>
-        </p:spPr>
-        <p:txBody>
-          <a:bodyPr lIns="0" tIns="0" rIns="0" bIns="0">
-            <a:spAutoFit/>
-          </a:bodyPr>
-          <a:lstStyle>
-            <a:lvl1pPr>
-              <a:defRPr sz="3100" b="1">
-                <a:solidFill>
-                  <a:srgbClr val="1E3A8A"/>
-                </a:solidFill>
-                <a:latin typeface="Roboto Slab"/>
-                <a:ea typeface="Roboto Slab"/>
-                <a:cs typeface="Roboto Slab"/>
-                <a:sym typeface="Roboto Slab"/>
-              </a:defRPr>
-            </a:lvl1pPr>
-          </a:lstStyle>
-          <a:p>
-            <a:r>
-              <a:t>Validation &amp; Impact</a:t>
-            </a:r>
-          </a:p>
-        </p:txBody>
-      </p:sp>
-      <p:sp>
-        <p:nvSpPr>
-          <p:cNvPr id="240" name="Google Shape;237;p21"/>
-          <p:cNvSpPr/>
-          <p:nvPr/>
-        </p:nvSpPr>
-        <p:spPr>
-          <a:xfrm>
-            <a:off x="571500" y="1238250"/>
-            <a:ext cx="11049000" cy="28575"/>
-          </a:xfrm>
-          <a:prstGeom prst="rect">
-            <a:avLst/>
-          </a:prstGeom>
-          <a:solidFill>
-            <a:srgbClr val="3B82F6"/>
-          </a:solidFill>
-          <a:ln w="12700">
-            <a:miter lim="400000"/>
-          </a:ln>
-        </p:spPr>
-        <p:txBody>
-          <a:bodyPr lIns="0" tIns="0" rIns="0" bIns="0" anchor="ctr"/>
-          <a:lstStyle/>
-          <a:p>
-            <a:pPr algn="ctr">
-              <a:defRPr sz="1800">
-                <a:latin typeface="Calibri"/>
-                <a:ea typeface="Calibri"/>
-                <a:cs typeface="Calibri"/>
-                <a:sym typeface="Calibri"/>
-              </a:defRPr>
-            </a:pPr>
-            <a:endParaRPr/>
+              <a:t> Translating large-scale "Big Data" into actionable engineering insights.</a:t>
+            </a:r>
           </a:p>
         </p:txBody>
       </p:sp>
@@ -4975,7 +4710,7 @@
       </p:grpSpPr>
       <p:pic>
         <p:nvPicPr>
-          <p:cNvPr id="242" name="Google Shape;242;p22" descr="Google Shape;242;p22"/>
+          <p:cNvPr id="255" name="Google Shape;258;p23" descr="Google Shape;258;p23"/>
           <p:cNvPicPr>
             <a:picLocks noChangeAspect="1"/>
           </p:cNvPicPr>
@@ -5002,14 +4737,14 @@
       </p:pic>
       <p:sp>
         <p:nvSpPr>
-          <p:cNvPr id="243" name="Google Shape;243;p22"/>
+          <p:cNvPr id="256" name="Google Shape;259;p23"/>
           <p:cNvSpPr txBox="1"/>
           <p:nvPr/>
         </p:nvSpPr>
         <p:spPr>
           <a:xfrm>
-            <a:off x="571500" y="762000"/>
-            <a:ext cx="5200650" cy="939800"/>
+            <a:off x="4081462" y="1888776"/>
+            <a:ext cx="4230528" cy="914401"/>
           </a:xfrm>
           <a:prstGeom prst="rect">
             <a:avLst/>
@@ -5019,7 +4754,7 @@
           </a:ln>
           <a:extLst>
             <a:ext uri="{C572A759-6A51-4108-AA02-DFA0A04FC94B}">
-              <ma14:wrappingTextBoxFlag xmlns:ma14="http://schemas.microsoft.com/office/mac/drawingml/2011/main" xmlns:a14="http://schemas.microsoft.com/office/drawing/2010/main" xmlns:m="http://schemas.openxmlformats.org/officeDocument/2006/math" xmlns="" val="1"/>
+              <ma14:wrappingTextBoxFlag xmlns="" xmlns:m="http://schemas.openxmlformats.org/officeDocument/2006/math" xmlns:a14="http://schemas.microsoft.com/office/drawing/2010/main" xmlns:ma14="http://schemas.microsoft.com/office/mac/drawingml/2011/main" val="1"/>
             </a:ext>
           </a:extLst>
         </p:spPr>
@@ -5029,7 +4764,7 @@
           </a:bodyPr>
           <a:lstStyle>
             <a:lvl1pPr>
-              <a:defRPr sz="3100" b="1">
+              <a:defRPr sz="6000" b="1">
                 <a:solidFill>
                   <a:srgbClr val="1E3A8A"/>
                 </a:solidFill>
@@ -5042,85 +4777,21 @@
           </a:lstStyle>
           <a:p>
             <a:r>
-              <a:t>Vision: Data Science in BFE</a:t>
-            </a:r>
-          </a:p>
-        </p:txBody>
-      </p:sp>
-      <p:sp>
-        <p:nvSpPr>
-          <p:cNvPr id="244" name="Google Shape;244;p22"/>
-          <p:cNvSpPr/>
-          <p:nvPr/>
-        </p:nvSpPr>
-        <p:spPr>
-          <a:xfrm>
-            <a:off x="571500" y="1952625"/>
-            <a:ext cx="4953000" cy="28575"/>
-          </a:xfrm>
-          <a:prstGeom prst="rect">
-            <a:avLst/>
-          </a:prstGeom>
-          <a:solidFill>
-            <a:srgbClr val="3B82F6"/>
-          </a:solidFill>
-          <a:ln w="12700">
-            <a:miter lim="400000"/>
-          </a:ln>
-        </p:spPr>
-        <p:txBody>
-          <a:bodyPr lIns="0" tIns="0" rIns="0" bIns="0" anchor="ctr"/>
-          <a:lstStyle/>
-          <a:p>
-            <a:pPr algn="ctr">
-              <a:defRPr sz="1800">
-                <a:latin typeface="Calibri"/>
-                <a:ea typeface="Calibri"/>
-                <a:cs typeface="Calibri"/>
-                <a:sym typeface="Calibri"/>
-              </a:defRPr>
-            </a:pPr>
-            <a:endParaRPr/>
-          </a:p>
-        </p:txBody>
-      </p:sp>
-      <p:pic>
-        <p:nvPicPr>
-          <p:cNvPr id="245" name="Google Shape;245;p22" descr="Google Shape;245;p22"/>
-          <p:cNvPicPr>
-            <a:picLocks noChangeAspect="1"/>
-          </p:cNvPicPr>
-          <p:nvPr/>
-        </p:nvPicPr>
-        <p:blipFill>
-          <a:blip r:embed="rId3"/>
-          <a:stretch>
-            <a:fillRect/>
-          </a:stretch>
-        </p:blipFill>
-        <p:spPr>
-          <a:xfrm>
-            <a:off x="6096000" y="0"/>
-            <a:ext cx="6096000" cy="6858000"/>
-          </a:xfrm>
-          <a:prstGeom prst="rect">
-            <a:avLst/>
-          </a:prstGeom>
-          <a:ln w="12700">
-            <a:miter lim="400000"/>
-          </a:ln>
-        </p:spPr>
-      </p:pic>
-      <p:sp>
-        <p:nvSpPr>
-          <p:cNvPr id="246" name="Google Shape;246;p22"/>
+              <a:t>Thank You</a:t>
+            </a:r>
+          </a:p>
+        </p:txBody>
+      </p:sp>
+      <p:sp>
+        <p:nvSpPr>
+          <p:cNvPr id="257" name="Google Shape;260;p23"/>
           <p:cNvSpPr txBox="1"/>
           <p:nvPr/>
         </p:nvSpPr>
         <p:spPr>
           <a:xfrm>
-            <a:off x="571500" y="2362200"/>
-            <a:ext cx="4630578" cy="317500"/>
+            <a:off x="4857750" y="3184176"/>
+            <a:ext cx="2476500" cy="279401"/>
           </a:xfrm>
           <a:prstGeom prst="rect">
             <a:avLst/>
@@ -5130,7 +4801,7 @@
           </a:ln>
           <a:extLst>
             <a:ext uri="{C572A759-6A51-4108-AA02-DFA0A04FC94B}">
-              <ma14:wrappingTextBoxFlag xmlns:ma14="http://schemas.microsoft.com/office/mac/drawingml/2011/main" xmlns:a14="http://schemas.microsoft.com/office/drawing/2010/main" xmlns:m="http://schemas.openxmlformats.org/officeDocument/2006/math" xmlns="" val="1"/>
+              <ma14:wrappingTextBoxFlag xmlns="" xmlns:m="http://schemas.openxmlformats.org/officeDocument/2006/math" xmlns:a14="http://schemas.microsoft.com/office/drawing/2010/main" xmlns:ma14="http://schemas.microsoft.com/office/mac/drawingml/2011/main" val="1"/>
             </a:ext>
           </a:extLst>
         </p:spPr>
@@ -5140,34 +4811,37 @@
           </a:bodyPr>
           <a:lstStyle>
             <a:lvl1pPr>
-              <a:defRPr sz="2100" b="1">
+              <a:lnSpc>
+                <a:spcPct val="159944"/>
+              </a:lnSpc>
+              <a:defRPr sz="1800">
                 <a:solidFill>
-                  <a:srgbClr val="0F766E"/>
+                  <a:srgbClr val="64748B"/>
                 </a:solidFill>
-                <a:latin typeface="Roboto Slab"/>
-                <a:ea typeface="Roboto Slab"/>
-                <a:cs typeface="Roboto Slab"/>
-                <a:sym typeface="Roboto Slab"/>
+                <a:latin typeface="Open Sans"/>
+                <a:ea typeface="Open Sans"/>
+                <a:cs typeface="Open Sans"/>
+                <a:sym typeface="Open Sans"/>
               </a:defRPr>
             </a:lvl1pPr>
           </a:lstStyle>
           <a:p>
             <a:r>
-              <a:t>Integrating Computation &amp; Biology</a:t>
-            </a:r>
-          </a:p>
-        </p:txBody>
-      </p:sp>
-      <p:sp>
-        <p:nvSpPr>
-          <p:cNvPr id="247" name="Google Shape;247;p22"/>
+              <a:t>Questions &amp; Discussion</a:t>
+            </a:r>
+          </a:p>
+        </p:txBody>
+      </p:sp>
+      <p:sp>
+        <p:nvSpPr>
+          <p:cNvPr id="258" name="Google Shape;261;p23"/>
           <p:cNvSpPr txBox="1"/>
           <p:nvPr/>
         </p:nvSpPr>
         <p:spPr>
           <a:xfrm>
-            <a:off x="571500" y="2857500"/>
-            <a:ext cx="4953000" cy="960121"/>
+            <a:off x="4972050" y="4073723"/>
+            <a:ext cx="2247900" cy="228601"/>
           </a:xfrm>
           <a:prstGeom prst="rect">
             <a:avLst/>
@@ -5177,7 +4851,7 @@
           </a:ln>
           <a:extLst>
             <a:ext uri="{C572A759-6A51-4108-AA02-DFA0A04FC94B}">
-              <ma14:wrappingTextBoxFlag xmlns:ma14="http://schemas.microsoft.com/office/mac/drawingml/2011/main" xmlns:a14="http://schemas.microsoft.com/office/drawing/2010/main" xmlns:m="http://schemas.openxmlformats.org/officeDocument/2006/math" xmlns="" val="1"/>
+              <ma14:wrappingTextBoxFlag xmlns="" xmlns:m="http://schemas.openxmlformats.org/officeDocument/2006/math" xmlns:a14="http://schemas.microsoft.com/office/drawing/2010/main" xmlns:ma14="http://schemas.microsoft.com/office/mac/drawingml/2011/main" val="1"/>
             </a:ext>
           </a:extLst>
         </p:spPr>
@@ -5186,7 +4860,57 @@
             <a:spAutoFit/>
           </a:bodyPr>
           <a:lstStyle>
-            <a:lvl1pPr>
+            <a:lvl1pPr algn="ctr">
+              <a:lnSpc>
+                <a:spcPct val="160000"/>
+              </a:lnSpc>
+              <a:defRPr sz="1500" b="1">
+                <a:solidFill>
+                  <a:srgbClr val="334155"/>
+                </a:solidFill>
+                <a:latin typeface="Open Sans"/>
+                <a:ea typeface="Open Sans"/>
+                <a:cs typeface="Open Sans"/>
+                <a:sym typeface="Open Sans"/>
+              </a:defRPr>
+            </a:lvl1pPr>
+          </a:lstStyle>
+          <a:p>
+            <a:r>
+              <a:t>Mousheng Xu, PhD</a:t>
+            </a:r>
+          </a:p>
+        </p:txBody>
+      </p:sp>
+      <p:sp>
+        <p:nvSpPr>
+          <p:cNvPr id="259" name="Google Shape;262;p23"/>
+          <p:cNvSpPr txBox="1"/>
+          <p:nvPr/>
+        </p:nvSpPr>
+        <p:spPr>
+          <a:xfrm>
+            <a:off x="4972050" y="4521398"/>
+            <a:ext cx="2247900" cy="228601"/>
+          </a:xfrm>
+          <a:prstGeom prst="rect">
+            <a:avLst/>
+          </a:prstGeom>
+          <a:ln w="12700">
+            <a:miter lim="400000"/>
+          </a:ln>
+          <a:extLst>
+            <a:ext uri="{C572A759-6A51-4108-AA02-DFA0A04FC94B}">
+              <ma14:wrappingTextBoxFlag xmlns="" xmlns:m="http://schemas.openxmlformats.org/officeDocument/2006/math" xmlns:a14="http://schemas.microsoft.com/office/drawing/2010/main" xmlns:ma14="http://schemas.microsoft.com/office/mac/drawingml/2011/main" val="1"/>
+            </a:ext>
+          </a:extLst>
+        </p:spPr>
+        <p:txBody>
+          <a:bodyPr lIns="0" tIns="0" rIns="0" bIns="0">
+            <a:spAutoFit/>
+          </a:bodyPr>
+          <a:lstStyle>
+            <a:lvl1pPr algn="ctr">
               <a:lnSpc>
                 <a:spcPct val="160000"/>
               </a:lnSpc>
@@ -5203,307 +4927,7 @@
           </a:lstStyle>
           <a:p>
             <a:r>
-              <a:t>My goal is to establish a functional lab at GTIIT that bridges the gap between biological engineering and data science.</a:t>
-            </a:r>
-          </a:p>
-        </p:txBody>
-      </p:sp>
-      <p:sp>
-        <p:nvSpPr>
-          <p:cNvPr id="248" name="Google Shape;248;p22"/>
-          <p:cNvSpPr txBox="1"/>
-          <p:nvPr/>
-        </p:nvSpPr>
-        <p:spPr>
-          <a:xfrm>
-            <a:off x="685800" y="4057650"/>
-            <a:ext cx="76200" cy="228600"/>
-          </a:xfrm>
-          <a:prstGeom prst="rect">
-            <a:avLst/>
-          </a:prstGeom>
-          <a:ln w="12700">
-            <a:miter lim="400000"/>
-          </a:ln>
-          <a:extLst>
-            <a:ext uri="{C572A759-6A51-4108-AA02-DFA0A04FC94B}">
-              <ma14:wrappingTextBoxFlag xmlns:ma14="http://schemas.microsoft.com/office/mac/drawingml/2011/main" xmlns:a14="http://schemas.microsoft.com/office/drawing/2010/main" xmlns:m="http://schemas.openxmlformats.org/officeDocument/2006/math" xmlns="" val="1"/>
-            </a:ext>
-          </a:extLst>
-        </p:spPr>
-        <p:txBody>
-          <a:bodyPr lIns="0" tIns="0" rIns="0" bIns="0">
-            <a:spAutoFit/>
-          </a:bodyPr>
-          <a:lstStyle>
-            <a:lvl1pPr>
-              <a:defRPr sz="1500">
-                <a:solidFill>
-                  <a:srgbClr val="334155"/>
-                </a:solidFill>
-                <a:latin typeface="Open Sans"/>
-                <a:ea typeface="Open Sans"/>
-                <a:cs typeface="Open Sans"/>
-                <a:sym typeface="Open Sans"/>
-              </a:defRPr>
-            </a:lvl1pPr>
-          </a:lstStyle>
-          <a:p>
-            <a:r>
-              <a:t>•</a:t>
-            </a:r>
-          </a:p>
-        </p:txBody>
-      </p:sp>
-      <p:sp>
-        <p:nvSpPr>
-          <p:cNvPr id="249" name="Google Shape;249;p22"/>
-          <p:cNvSpPr txBox="1"/>
-          <p:nvPr/>
-        </p:nvSpPr>
-        <p:spPr>
-          <a:xfrm>
-            <a:off x="838200" y="4057650"/>
-            <a:ext cx="4686300" cy="594361"/>
-          </a:xfrm>
-          <a:prstGeom prst="rect">
-            <a:avLst/>
-          </a:prstGeom>
-          <a:ln w="12700">
-            <a:miter lim="400000"/>
-          </a:ln>
-          <a:extLst>
-            <a:ext uri="{C572A759-6A51-4108-AA02-DFA0A04FC94B}">
-              <ma14:wrappingTextBoxFlag xmlns:ma14="http://schemas.microsoft.com/office/mac/drawingml/2011/main" xmlns:a14="http://schemas.microsoft.com/office/drawing/2010/main" xmlns:m="http://schemas.openxmlformats.org/officeDocument/2006/math" xmlns="" val="1"/>
-            </a:ext>
-          </a:extLst>
-        </p:spPr>
-        <p:txBody>
-          <a:bodyPr lIns="0" tIns="0" rIns="0" bIns="0">
-            <a:spAutoFit/>
-          </a:bodyPr>
-          <a:lstStyle/>
-          <a:p>
-            <a:pPr>
-              <a:lnSpc>
-                <a:spcPct val="160000"/>
-              </a:lnSpc>
-              <a:defRPr sz="1500" b="1">
-                <a:solidFill>
-                  <a:srgbClr val="334155"/>
-                </a:solidFill>
-                <a:latin typeface="Open Sans"/>
-                <a:ea typeface="Open Sans"/>
-                <a:cs typeface="Open Sans"/>
-                <a:sym typeface="Open Sans"/>
-              </a:defRPr>
-            </a:pPr>
-            <a:r>
-              <a:t>Curriculum:</a:t>
-            </a:r>
-            <a:r>
-              <a:rPr b="0"/>
-              <a:t> Introducing practical ML and Bioinformatics training for students.</a:t>
-            </a:r>
-          </a:p>
-        </p:txBody>
-      </p:sp>
-      <p:sp>
-        <p:nvSpPr>
-          <p:cNvPr id="250" name="Google Shape;250;p22"/>
-          <p:cNvSpPr txBox="1"/>
-          <p:nvPr/>
-        </p:nvSpPr>
-        <p:spPr>
-          <a:xfrm>
-            <a:off x="685800" y="4781550"/>
-            <a:ext cx="76200" cy="228600"/>
-          </a:xfrm>
-          <a:prstGeom prst="rect">
-            <a:avLst/>
-          </a:prstGeom>
-          <a:ln w="12700">
-            <a:miter lim="400000"/>
-          </a:ln>
-          <a:extLst>
-            <a:ext uri="{C572A759-6A51-4108-AA02-DFA0A04FC94B}">
-              <ma14:wrappingTextBoxFlag xmlns:ma14="http://schemas.microsoft.com/office/mac/drawingml/2011/main" xmlns:a14="http://schemas.microsoft.com/office/drawing/2010/main" xmlns:m="http://schemas.openxmlformats.org/officeDocument/2006/math" xmlns="" val="1"/>
-            </a:ext>
-          </a:extLst>
-        </p:spPr>
-        <p:txBody>
-          <a:bodyPr lIns="0" tIns="0" rIns="0" bIns="0">
-            <a:spAutoFit/>
-          </a:bodyPr>
-          <a:lstStyle>
-            <a:lvl1pPr>
-              <a:defRPr sz="1500">
-                <a:solidFill>
-                  <a:srgbClr val="334155"/>
-                </a:solidFill>
-                <a:latin typeface="Open Sans"/>
-                <a:ea typeface="Open Sans"/>
-                <a:cs typeface="Open Sans"/>
-                <a:sym typeface="Open Sans"/>
-              </a:defRPr>
-            </a:lvl1pPr>
-          </a:lstStyle>
-          <a:p>
-            <a:r>
-              <a:t>•</a:t>
-            </a:r>
-          </a:p>
-        </p:txBody>
-      </p:sp>
-      <p:sp>
-        <p:nvSpPr>
-          <p:cNvPr id="251" name="Google Shape;251;p22"/>
-          <p:cNvSpPr txBox="1"/>
-          <p:nvPr/>
-        </p:nvSpPr>
-        <p:spPr>
-          <a:xfrm>
-            <a:off x="838200" y="4781550"/>
-            <a:ext cx="4686300" cy="594361"/>
-          </a:xfrm>
-          <a:prstGeom prst="rect">
-            <a:avLst/>
-          </a:prstGeom>
-          <a:ln w="12700">
-            <a:miter lim="400000"/>
-          </a:ln>
-          <a:extLst>
-            <a:ext uri="{C572A759-6A51-4108-AA02-DFA0A04FC94B}">
-              <ma14:wrappingTextBoxFlag xmlns:ma14="http://schemas.microsoft.com/office/mac/drawingml/2011/main" xmlns:a14="http://schemas.microsoft.com/office/drawing/2010/main" xmlns:m="http://schemas.openxmlformats.org/officeDocument/2006/math" xmlns="" val="1"/>
-            </a:ext>
-          </a:extLst>
-        </p:spPr>
-        <p:txBody>
-          <a:bodyPr lIns="0" tIns="0" rIns="0" bIns="0">
-            <a:spAutoFit/>
-          </a:bodyPr>
-          <a:lstStyle/>
-          <a:p>
-            <a:pPr>
-              <a:lnSpc>
-                <a:spcPct val="160000"/>
-              </a:lnSpc>
-              <a:defRPr sz="1500" b="1">
-                <a:solidFill>
-                  <a:srgbClr val="334155"/>
-                </a:solidFill>
-                <a:latin typeface="Open Sans"/>
-                <a:ea typeface="Open Sans"/>
-                <a:cs typeface="Open Sans"/>
-                <a:sym typeface="Open Sans"/>
-              </a:defRPr>
-            </a:pPr>
-            <a:r>
-              <a:t>Research:</a:t>
-            </a:r>
-            <a:r>
-              <a:rPr b="0"/>
-              <a:t> Developing explainable AI pipelines for complex food and biological data.</a:t>
-            </a:r>
-          </a:p>
-        </p:txBody>
-      </p:sp>
-      <p:sp>
-        <p:nvSpPr>
-          <p:cNvPr id="252" name="Google Shape;252;p22"/>
-          <p:cNvSpPr txBox="1"/>
-          <p:nvPr/>
-        </p:nvSpPr>
-        <p:spPr>
-          <a:xfrm>
-            <a:off x="685800" y="5505450"/>
-            <a:ext cx="76200" cy="228600"/>
-          </a:xfrm>
-          <a:prstGeom prst="rect">
-            <a:avLst/>
-          </a:prstGeom>
-          <a:ln w="12700">
-            <a:miter lim="400000"/>
-          </a:ln>
-          <a:extLst>
-            <a:ext uri="{C572A759-6A51-4108-AA02-DFA0A04FC94B}">
-              <ma14:wrappingTextBoxFlag xmlns:ma14="http://schemas.microsoft.com/office/mac/drawingml/2011/main" xmlns:a14="http://schemas.microsoft.com/office/drawing/2010/main" xmlns:m="http://schemas.openxmlformats.org/officeDocument/2006/math" xmlns="" val="1"/>
-            </a:ext>
-          </a:extLst>
-        </p:spPr>
-        <p:txBody>
-          <a:bodyPr lIns="0" tIns="0" rIns="0" bIns="0">
-            <a:spAutoFit/>
-          </a:bodyPr>
-          <a:lstStyle>
-            <a:lvl1pPr>
-              <a:defRPr sz="1500">
-                <a:solidFill>
-                  <a:srgbClr val="334155"/>
-                </a:solidFill>
-                <a:latin typeface="Open Sans"/>
-                <a:ea typeface="Open Sans"/>
-                <a:cs typeface="Open Sans"/>
-                <a:sym typeface="Open Sans"/>
-              </a:defRPr>
-            </a:lvl1pPr>
-          </a:lstStyle>
-          <a:p>
-            <a:r>
-              <a:t>•</a:t>
-            </a:r>
-          </a:p>
-        </p:txBody>
-      </p:sp>
-      <p:sp>
-        <p:nvSpPr>
-          <p:cNvPr id="253" name="Google Shape;253;p22"/>
-          <p:cNvSpPr txBox="1"/>
-          <p:nvPr/>
-        </p:nvSpPr>
-        <p:spPr>
-          <a:xfrm>
-            <a:off x="838200" y="5505450"/>
-            <a:ext cx="4686300" cy="594361"/>
-          </a:xfrm>
-          <a:prstGeom prst="rect">
-            <a:avLst/>
-          </a:prstGeom>
-          <a:ln w="12700">
-            <a:miter lim="400000"/>
-          </a:ln>
-          <a:extLst>
-            <a:ext uri="{C572A759-6A51-4108-AA02-DFA0A04FC94B}">
-              <ma14:wrappingTextBoxFlag xmlns:ma14="http://schemas.microsoft.com/office/mac/drawingml/2011/main" xmlns:a14="http://schemas.microsoft.com/office/drawing/2010/main" xmlns:m="http://schemas.openxmlformats.org/officeDocument/2006/math" xmlns="" val="1"/>
-            </a:ext>
-          </a:extLst>
-        </p:spPr>
-        <p:txBody>
-          <a:bodyPr lIns="0" tIns="0" rIns="0" bIns="0">
-            <a:spAutoFit/>
-          </a:bodyPr>
-          <a:lstStyle/>
-          <a:p>
-            <a:pPr>
-              <a:lnSpc>
-                <a:spcPct val="160000"/>
-              </a:lnSpc>
-              <a:defRPr sz="1500" b="1">
-                <a:solidFill>
-                  <a:srgbClr val="334155"/>
-                </a:solidFill>
-                <a:latin typeface="Open Sans"/>
-                <a:ea typeface="Open Sans"/>
-                <a:cs typeface="Open Sans"/>
-                <a:sym typeface="Open Sans"/>
-              </a:defRPr>
-            </a:pPr>
-            <a:r>
-              <a:t>Innovation:</a:t>
-            </a:r>
-            <a:r>
-              <a:rPr b="0"/>
-              <a:t> Translating large-scale "Big Data" into actionable engineering insights.</a:t>
+              <a:t>moushengxu@gmail.com</a:t>
             </a:r>
           </a:p>
         </p:txBody>
@@ -5536,256 +4960,6 @@
       </p:grpSpPr>
       <p:pic>
         <p:nvPicPr>
-          <p:cNvPr id="255" name="Google Shape;258;p23" descr="Google Shape;258;p23"/>
-          <p:cNvPicPr>
-            <a:picLocks noChangeAspect="1"/>
-          </p:cNvPicPr>
-          <p:nvPr/>
-        </p:nvPicPr>
-        <p:blipFill>
-          <a:blip r:embed="rId2"/>
-          <a:stretch>
-            <a:fillRect/>
-          </a:stretch>
-        </p:blipFill>
-        <p:spPr>
-          <a:xfrm>
-            <a:off x="0" y="0"/>
-            <a:ext cx="12192000" cy="6858000"/>
-          </a:xfrm>
-          <a:prstGeom prst="rect">
-            <a:avLst/>
-          </a:prstGeom>
-          <a:ln w="12700">
-            <a:miter lim="400000"/>
-          </a:ln>
-        </p:spPr>
-      </p:pic>
-      <p:sp>
-        <p:nvSpPr>
-          <p:cNvPr id="256" name="Google Shape;259;p23"/>
-          <p:cNvSpPr txBox="1"/>
-          <p:nvPr/>
-        </p:nvSpPr>
-        <p:spPr>
-          <a:xfrm>
-            <a:off x="4081462" y="1888776"/>
-            <a:ext cx="4230528" cy="914401"/>
-          </a:xfrm>
-          <a:prstGeom prst="rect">
-            <a:avLst/>
-          </a:prstGeom>
-          <a:ln w="12700">
-            <a:miter lim="400000"/>
-          </a:ln>
-          <a:extLst>
-            <a:ext uri="{C572A759-6A51-4108-AA02-DFA0A04FC94B}">
-              <ma14:wrappingTextBoxFlag xmlns:ma14="http://schemas.microsoft.com/office/mac/drawingml/2011/main" xmlns:a14="http://schemas.microsoft.com/office/drawing/2010/main" xmlns:m="http://schemas.openxmlformats.org/officeDocument/2006/math" xmlns="" val="1"/>
-            </a:ext>
-          </a:extLst>
-        </p:spPr>
-        <p:txBody>
-          <a:bodyPr lIns="0" tIns="0" rIns="0" bIns="0">
-            <a:spAutoFit/>
-          </a:bodyPr>
-          <a:lstStyle>
-            <a:lvl1pPr>
-              <a:defRPr sz="6000" b="1">
-                <a:solidFill>
-                  <a:srgbClr val="1E3A8A"/>
-                </a:solidFill>
-                <a:latin typeface="Roboto Slab"/>
-                <a:ea typeface="Roboto Slab"/>
-                <a:cs typeface="Roboto Slab"/>
-                <a:sym typeface="Roboto Slab"/>
-              </a:defRPr>
-            </a:lvl1pPr>
-          </a:lstStyle>
-          <a:p>
-            <a:r>
-              <a:t>Thank You</a:t>
-            </a:r>
-          </a:p>
-        </p:txBody>
-      </p:sp>
-      <p:sp>
-        <p:nvSpPr>
-          <p:cNvPr id="257" name="Google Shape;260;p23"/>
-          <p:cNvSpPr txBox="1"/>
-          <p:nvPr/>
-        </p:nvSpPr>
-        <p:spPr>
-          <a:xfrm>
-            <a:off x="4857750" y="3184176"/>
-            <a:ext cx="2476500" cy="279401"/>
-          </a:xfrm>
-          <a:prstGeom prst="rect">
-            <a:avLst/>
-          </a:prstGeom>
-          <a:ln w="12700">
-            <a:miter lim="400000"/>
-          </a:ln>
-          <a:extLst>
-            <a:ext uri="{C572A759-6A51-4108-AA02-DFA0A04FC94B}">
-              <ma14:wrappingTextBoxFlag xmlns:ma14="http://schemas.microsoft.com/office/mac/drawingml/2011/main" xmlns:a14="http://schemas.microsoft.com/office/drawing/2010/main" xmlns:m="http://schemas.openxmlformats.org/officeDocument/2006/math" xmlns="" val="1"/>
-            </a:ext>
-          </a:extLst>
-        </p:spPr>
-        <p:txBody>
-          <a:bodyPr lIns="0" tIns="0" rIns="0" bIns="0">
-            <a:spAutoFit/>
-          </a:bodyPr>
-          <a:lstStyle>
-            <a:lvl1pPr>
-              <a:lnSpc>
-                <a:spcPct val="159944"/>
-              </a:lnSpc>
-              <a:defRPr sz="1800">
-                <a:solidFill>
-                  <a:srgbClr val="64748B"/>
-                </a:solidFill>
-                <a:latin typeface="Open Sans"/>
-                <a:ea typeface="Open Sans"/>
-                <a:cs typeface="Open Sans"/>
-                <a:sym typeface="Open Sans"/>
-              </a:defRPr>
-            </a:lvl1pPr>
-          </a:lstStyle>
-          <a:p>
-            <a:r>
-              <a:t>Questions &amp; Discussion</a:t>
-            </a:r>
-          </a:p>
-        </p:txBody>
-      </p:sp>
-      <p:sp>
-        <p:nvSpPr>
-          <p:cNvPr id="258" name="Google Shape;261;p23"/>
-          <p:cNvSpPr txBox="1"/>
-          <p:nvPr/>
-        </p:nvSpPr>
-        <p:spPr>
-          <a:xfrm>
-            <a:off x="4972050" y="4073723"/>
-            <a:ext cx="2247900" cy="228601"/>
-          </a:xfrm>
-          <a:prstGeom prst="rect">
-            <a:avLst/>
-          </a:prstGeom>
-          <a:ln w="12700">
-            <a:miter lim="400000"/>
-          </a:ln>
-          <a:extLst>
-            <a:ext uri="{C572A759-6A51-4108-AA02-DFA0A04FC94B}">
-              <ma14:wrappingTextBoxFlag xmlns:ma14="http://schemas.microsoft.com/office/mac/drawingml/2011/main" xmlns:a14="http://schemas.microsoft.com/office/drawing/2010/main" xmlns:m="http://schemas.openxmlformats.org/officeDocument/2006/math" xmlns="" val="1"/>
-            </a:ext>
-          </a:extLst>
-        </p:spPr>
-        <p:txBody>
-          <a:bodyPr lIns="0" tIns="0" rIns="0" bIns="0">
-            <a:spAutoFit/>
-          </a:bodyPr>
-          <a:lstStyle>
-            <a:lvl1pPr algn="ctr">
-              <a:lnSpc>
-                <a:spcPct val="160000"/>
-              </a:lnSpc>
-              <a:defRPr sz="1500" b="1">
-                <a:solidFill>
-                  <a:srgbClr val="334155"/>
-                </a:solidFill>
-                <a:latin typeface="Open Sans"/>
-                <a:ea typeface="Open Sans"/>
-                <a:cs typeface="Open Sans"/>
-                <a:sym typeface="Open Sans"/>
-              </a:defRPr>
-            </a:lvl1pPr>
-          </a:lstStyle>
-          <a:p>
-            <a:r>
-              <a:t>Mousheng Xu, PhD</a:t>
-            </a:r>
-          </a:p>
-        </p:txBody>
-      </p:sp>
-      <p:sp>
-        <p:nvSpPr>
-          <p:cNvPr id="259" name="Google Shape;262;p23"/>
-          <p:cNvSpPr txBox="1"/>
-          <p:nvPr/>
-        </p:nvSpPr>
-        <p:spPr>
-          <a:xfrm>
-            <a:off x="4972050" y="4521398"/>
-            <a:ext cx="2247900" cy="228601"/>
-          </a:xfrm>
-          <a:prstGeom prst="rect">
-            <a:avLst/>
-          </a:prstGeom>
-          <a:ln w="12700">
-            <a:miter lim="400000"/>
-          </a:ln>
-          <a:extLst>
-            <a:ext uri="{C572A759-6A51-4108-AA02-DFA0A04FC94B}">
-              <ma14:wrappingTextBoxFlag xmlns:ma14="http://schemas.microsoft.com/office/mac/drawingml/2011/main" xmlns:a14="http://schemas.microsoft.com/office/drawing/2010/main" xmlns:m="http://schemas.openxmlformats.org/officeDocument/2006/math" xmlns="" val="1"/>
-            </a:ext>
-          </a:extLst>
-        </p:spPr>
-        <p:txBody>
-          <a:bodyPr lIns="0" tIns="0" rIns="0" bIns="0">
-            <a:spAutoFit/>
-          </a:bodyPr>
-          <a:lstStyle>
-            <a:lvl1pPr algn="ctr">
-              <a:lnSpc>
-                <a:spcPct val="160000"/>
-              </a:lnSpc>
-              <a:defRPr sz="1500">
-                <a:solidFill>
-                  <a:srgbClr val="334155"/>
-                </a:solidFill>
-                <a:latin typeface="Open Sans"/>
-                <a:ea typeface="Open Sans"/>
-                <a:cs typeface="Open Sans"/>
-                <a:sym typeface="Open Sans"/>
-              </a:defRPr>
-            </a:lvl1pPr>
-          </a:lstStyle>
-          <a:p>
-            <a:r>
-              <a:t>moushengxu@gmail.com</a:t>
-            </a:r>
-          </a:p>
-        </p:txBody>
-      </p:sp>
-    </p:spTree>
-  </p:cSld>
-  <p:clrMapOvr>
-    <a:masterClrMapping/>
-  </p:clrMapOvr>
-  <p:transition spd="med"/>
-</p:sld>
-</file>
-
-<file path=ppt/slides/slide13.xml><?xml version="1.0" encoding="utf-8"?>
-<p:sld xmlns:a="http://schemas.openxmlformats.org/drawingml/2006/main" xmlns:r="http://schemas.openxmlformats.org/officeDocument/2006/relationships" xmlns:p="http://schemas.openxmlformats.org/presentationml/2006/main">
-  <p:cSld>
-    <p:spTree>
-      <p:nvGrpSpPr>
-        <p:cNvPr id="1" name=""/>
-        <p:cNvGrpSpPr/>
-        <p:nvPr/>
-      </p:nvGrpSpPr>
-      <p:grpSpPr>
-        <a:xfrm>
-          <a:off x="0" y="0"/>
-          <a:ext cx="0" cy="0"/>
-          <a:chOff x="0" y="0"/>
-          <a:chExt cx="0" cy="0"/>
-        </a:xfrm>
-      </p:grpSpPr>
-      <p:pic>
-        <p:nvPicPr>
           <p:cNvPr id="263" name="Google Shape;267;p24" descr="Google Shape;267;p24"/>
           <p:cNvPicPr>
             <a:picLocks noChangeAspect="1"/>
@@ -5968,7 +5142,7 @@
           </a:ln>
           <a:extLst>
             <a:ext uri="{C572A759-6A51-4108-AA02-DFA0A04FC94B}">
-              <ma14:wrappingTextBoxFlag xmlns:ma14="http://schemas.microsoft.com/office/mac/drawingml/2011/main" xmlns:a14="http://schemas.microsoft.com/office/drawing/2010/main" xmlns:m="http://schemas.openxmlformats.org/officeDocument/2006/math" xmlns="" val="1"/>
+              <ma14:wrappingTextBoxFlag xmlns="" xmlns:m="http://schemas.openxmlformats.org/officeDocument/2006/math" xmlns:a14="http://schemas.microsoft.com/office/drawing/2010/main" xmlns:ma14="http://schemas.microsoft.com/office/mac/drawingml/2011/main" val="1"/>
             </a:ext>
           </a:extLst>
         </p:spPr>
@@ -6018,7 +5192,7 @@
           </a:ln>
           <a:extLst>
             <a:ext uri="{C572A759-6A51-4108-AA02-DFA0A04FC94B}">
-              <ma14:wrappingTextBoxFlag xmlns:ma14="http://schemas.microsoft.com/office/mac/drawingml/2011/main" xmlns:a14="http://schemas.microsoft.com/office/drawing/2010/main" xmlns:m="http://schemas.openxmlformats.org/officeDocument/2006/math" xmlns="" val="1"/>
+              <ma14:wrappingTextBoxFlag xmlns="" xmlns:m="http://schemas.openxmlformats.org/officeDocument/2006/math" xmlns:a14="http://schemas.microsoft.com/office/drawing/2010/main" xmlns:ma14="http://schemas.microsoft.com/office/mac/drawingml/2011/main" val="1"/>
             </a:ext>
           </a:extLst>
         </p:spPr>
@@ -6102,7 +5276,7 @@
           </a:ln>
           <a:extLst>
             <a:ext uri="{C572A759-6A51-4108-AA02-DFA0A04FC94B}">
-              <ma14:wrappingTextBoxFlag xmlns:ma14="http://schemas.microsoft.com/office/mac/drawingml/2011/main" xmlns:a14="http://schemas.microsoft.com/office/drawing/2010/main" xmlns:m="http://schemas.openxmlformats.org/officeDocument/2006/math" xmlns="" val="1"/>
+              <ma14:wrappingTextBoxFlag xmlns="" xmlns:m="http://schemas.openxmlformats.org/officeDocument/2006/math" xmlns:a14="http://schemas.microsoft.com/office/drawing/2010/main" xmlns:ma14="http://schemas.microsoft.com/office/mac/drawingml/2011/main" val="1"/>
             </a:ext>
           </a:extLst>
         </p:spPr>
@@ -6152,7 +5326,7 @@
           </a:ln>
           <a:extLst>
             <a:ext uri="{C572A759-6A51-4108-AA02-DFA0A04FC94B}">
-              <ma14:wrappingTextBoxFlag xmlns:ma14="http://schemas.microsoft.com/office/mac/drawingml/2011/main" xmlns:a14="http://schemas.microsoft.com/office/drawing/2010/main" xmlns:m="http://schemas.openxmlformats.org/officeDocument/2006/math" xmlns="" val="1"/>
+              <ma14:wrappingTextBoxFlag xmlns="" xmlns:m="http://schemas.openxmlformats.org/officeDocument/2006/math" xmlns:a14="http://schemas.microsoft.com/office/drawing/2010/main" xmlns:ma14="http://schemas.microsoft.com/office/mac/drawingml/2011/main" val="1"/>
             </a:ext>
           </a:extLst>
         </p:spPr>
@@ -6236,7 +5410,7 @@
           </a:ln>
           <a:extLst>
             <a:ext uri="{C572A759-6A51-4108-AA02-DFA0A04FC94B}">
-              <ma14:wrappingTextBoxFlag xmlns:ma14="http://schemas.microsoft.com/office/mac/drawingml/2011/main" xmlns:a14="http://schemas.microsoft.com/office/drawing/2010/main" xmlns:m="http://schemas.openxmlformats.org/officeDocument/2006/math" xmlns="" val="1"/>
+              <ma14:wrappingTextBoxFlag xmlns="" xmlns:m="http://schemas.openxmlformats.org/officeDocument/2006/math" xmlns:a14="http://schemas.microsoft.com/office/drawing/2010/main" xmlns:ma14="http://schemas.microsoft.com/office/mac/drawingml/2011/main" val="1"/>
             </a:ext>
           </a:extLst>
         </p:spPr>
@@ -6286,7 +5460,7 @@
           </a:ln>
           <a:extLst>
             <a:ext uri="{C572A759-6A51-4108-AA02-DFA0A04FC94B}">
-              <ma14:wrappingTextBoxFlag xmlns:ma14="http://schemas.microsoft.com/office/mac/drawingml/2011/main" xmlns:a14="http://schemas.microsoft.com/office/drawing/2010/main" xmlns:m="http://schemas.openxmlformats.org/officeDocument/2006/math" xmlns="" val="1"/>
+              <ma14:wrappingTextBoxFlag xmlns="" xmlns:m="http://schemas.openxmlformats.org/officeDocument/2006/math" xmlns:a14="http://schemas.microsoft.com/office/drawing/2010/main" xmlns:ma14="http://schemas.microsoft.com/office/mac/drawingml/2011/main" val="1"/>
             </a:ext>
           </a:extLst>
         </p:spPr>
@@ -6370,7 +5544,7 @@
           </a:ln>
           <a:extLst>
             <a:ext uri="{C572A759-6A51-4108-AA02-DFA0A04FC94B}">
-              <ma14:wrappingTextBoxFlag xmlns:ma14="http://schemas.microsoft.com/office/mac/drawingml/2011/main" xmlns:a14="http://schemas.microsoft.com/office/drawing/2010/main" xmlns:m="http://schemas.openxmlformats.org/officeDocument/2006/math" xmlns="" val="1"/>
+              <ma14:wrappingTextBoxFlag xmlns="" xmlns:m="http://schemas.openxmlformats.org/officeDocument/2006/math" xmlns:a14="http://schemas.microsoft.com/office/drawing/2010/main" xmlns:ma14="http://schemas.microsoft.com/office/mac/drawingml/2011/main" val="1"/>
             </a:ext>
           </a:extLst>
         </p:spPr>
@@ -6420,7 +5594,7 @@
           </a:ln>
           <a:extLst>
             <a:ext uri="{C572A759-6A51-4108-AA02-DFA0A04FC94B}">
-              <ma14:wrappingTextBoxFlag xmlns:ma14="http://schemas.microsoft.com/office/mac/drawingml/2011/main" xmlns:a14="http://schemas.microsoft.com/office/drawing/2010/main" xmlns:m="http://schemas.openxmlformats.org/officeDocument/2006/math" xmlns="" val="1"/>
+              <ma14:wrappingTextBoxFlag xmlns="" xmlns:m="http://schemas.openxmlformats.org/officeDocument/2006/math" xmlns:a14="http://schemas.microsoft.com/office/drawing/2010/main" xmlns:ma14="http://schemas.microsoft.com/office/mac/drawingml/2011/main" val="1"/>
             </a:ext>
           </a:extLst>
         </p:spPr>
@@ -6477,7 +5651,7 @@
           </a:ln>
           <a:extLst>
             <a:ext uri="{C572A759-6A51-4108-AA02-DFA0A04FC94B}">
-              <ma14:wrappingTextBoxFlag xmlns:ma14="http://schemas.microsoft.com/office/mac/drawingml/2011/main" xmlns:a14="http://schemas.microsoft.com/office/drawing/2010/main" xmlns:m="http://schemas.openxmlformats.org/officeDocument/2006/math" xmlns="" val="1"/>
+              <ma14:wrappingTextBoxFlag xmlns="" xmlns:m="http://schemas.openxmlformats.org/officeDocument/2006/math" xmlns:a14="http://schemas.microsoft.com/office/drawing/2010/main" xmlns:ma14="http://schemas.microsoft.com/office/mac/drawingml/2011/main" val="1"/>
             </a:ext>
           </a:extLst>
         </p:spPr>
@@ -6614,7 +5788,7 @@
           </a:ln>
           <a:extLst>
             <a:ext uri="{C572A759-6A51-4108-AA02-DFA0A04FC94B}">
-              <ma14:wrappingTextBoxFlag xmlns:ma14="http://schemas.microsoft.com/office/mac/drawingml/2011/main" xmlns:a14="http://schemas.microsoft.com/office/drawing/2010/main" xmlns:m="http://schemas.openxmlformats.org/officeDocument/2006/math" xmlns="" val="1"/>
+              <ma14:wrappingTextBoxFlag xmlns="" xmlns:m="http://schemas.openxmlformats.org/officeDocument/2006/math" xmlns:a14="http://schemas.microsoft.com/office/drawing/2010/main" xmlns:ma14="http://schemas.microsoft.com/office/mac/drawingml/2011/main" val="1"/>
             </a:ext>
           </a:extLst>
         </p:spPr>
@@ -6661,7 +5835,7 @@
           </a:ln>
           <a:extLst>
             <a:ext uri="{C572A759-6A51-4108-AA02-DFA0A04FC94B}">
-              <ma14:wrappingTextBoxFlag xmlns:ma14="http://schemas.microsoft.com/office/mac/drawingml/2011/main" xmlns:a14="http://schemas.microsoft.com/office/drawing/2010/main" xmlns:m="http://schemas.openxmlformats.org/officeDocument/2006/math" xmlns="" val="1"/>
+              <ma14:wrappingTextBoxFlag xmlns="" xmlns:m="http://schemas.openxmlformats.org/officeDocument/2006/math" xmlns:a14="http://schemas.microsoft.com/office/drawing/2010/main" xmlns:ma14="http://schemas.microsoft.com/office/mac/drawingml/2011/main" val="1"/>
             </a:ext>
           </a:extLst>
         </p:spPr>
@@ -6698,7 +5872,7 @@
         <p:spPr>
           <a:xfrm>
             <a:off x="838200" y="2468561"/>
-            <a:ext cx="8566606" cy="228601"/>
+            <a:ext cx="9971762" cy="326628"/>
           </a:xfrm>
           <a:prstGeom prst="rect">
             <a:avLst/>
@@ -6708,12 +5882,12 @@
           </a:ln>
           <a:extLst>
             <a:ext uri="{C572A759-6A51-4108-AA02-DFA0A04FC94B}">
-              <ma14:wrappingTextBoxFlag xmlns:ma14="http://schemas.microsoft.com/office/mac/drawingml/2011/main" xmlns:a14="http://schemas.microsoft.com/office/drawing/2010/main" xmlns:m="http://schemas.openxmlformats.org/officeDocument/2006/math" xmlns="" val="1"/>
+              <ma14:wrappingTextBoxFlag xmlns="" xmlns:m="http://schemas.openxmlformats.org/officeDocument/2006/math" xmlns:a14="http://schemas.microsoft.com/office/drawing/2010/main" xmlns:ma14="http://schemas.microsoft.com/office/mac/drawingml/2011/main" val="1"/>
             </a:ext>
           </a:extLst>
         </p:spPr>
         <p:txBody>
-          <a:bodyPr lIns="0" tIns="0" rIns="0" bIns="0">
+          <a:bodyPr wrap="square" lIns="0" tIns="0" rIns="0" bIns="0">
             <a:spAutoFit/>
           </a:bodyPr>
           <a:lstStyle/>
@@ -6733,10 +5907,11 @@
               </a:defRPr>
             </a:pPr>
             <a:r>
+              <a:rPr dirty="0"/>
               <a:t>20+ Years Experience:</a:t>
             </a:r>
             <a:r>
-              <a:rPr b="0"/>
+              <a:rPr b="0" dirty="0"/>
               <a:t> Bridging computational biology, statistical genetics, and machine learning.</a:t>
             </a:r>
           </a:p>
@@ -6761,7 +5936,7 @@
           </a:ln>
           <a:extLst>
             <a:ext uri="{C572A759-6A51-4108-AA02-DFA0A04FC94B}">
-              <ma14:wrappingTextBoxFlag xmlns:ma14="http://schemas.microsoft.com/office/mac/drawingml/2011/main" xmlns:a14="http://schemas.microsoft.com/office/drawing/2010/main" xmlns:m="http://schemas.openxmlformats.org/officeDocument/2006/math" xmlns="" val="1"/>
+              <ma14:wrappingTextBoxFlag xmlns="" xmlns:m="http://schemas.openxmlformats.org/officeDocument/2006/math" xmlns:a14="http://schemas.microsoft.com/office/drawing/2010/main" xmlns:ma14="http://schemas.microsoft.com/office/mac/drawingml/2011/main" val="1"/>
             </a:ext>
           </a:extLst>
         </p:spPr>
@@ -6808,7 +5983,7 @@
           </a:ln>
           <a:extLst>
             <a:ext uri="{C572A759-6A51-4108-AA02-DFA0A04FC94B}">
-              <ma14:wrappingTextBoxFlag xmlns:ma14="http://schemas.microsoft.com/office/mac/drawingml/2011/main" xmlns:a14="http://schemas.microsoft.com/office/drawing/2010/main" xmlns:m="http://schemas.openxmlformats.org/officeDocument/2006/math" xmlns="" val="1"/>
+              <ma14:wrappingTextBoxFlag xmlns="" xmlns:m="http://schemas.openxmlformats.org/officeDocument/2006/math" xmlns:a14="http://schemas.microsoft.com/office/drawing/2010/main" xmlns:ma14="http://schemas.microsoft.com/office/mac/drawingml/2011/main" val="1"/>
             </a:ext>
           </a:extLst>
         </p:spPr>
@@ -6833,10 +6008,11 @@
               </a:defRPr>
             </a:pPr>
             <a:r>
+              <a:rPr dirty="0"/>
               <a:t>Academic Foundation:</a:t>
             </a:r>
             <a:r>
-              <a:rPr b="0"/>
+              <a:rPr b="0" dirty="0"/>
               <a:t> </a:t>
             </a:r>
           </a:p>
@@ -6858,7 +6034,7 @@
               </a:defRPr>
             </a:pPr>
             <a:r>
-              <a:rPr b="0"/>
+              <a:rPr b="0" dirty="0"/>
               <a:t>  B.S. in Genetics (Wuhan University)</a:t>
             </a:r>
           </a:p>
@@ -6880,7 +6056,7 @@
               </a:defRPr>
             </a:pPr>
             <a:r>
-              <a:rPr b="0"/>
+              <a:rPr b="0" dirty="0"/>
               <a:t>  M.S. in Biochemistry &amp; Molecular Biology, M.S. in Computer Science (University of Kansas)</a:t>
             </a:r>
           </a:p>
@@ -6902,7 +6078,7 @@
               </a:defRPr>
             </a:pPr>
             <a:r>
-              <a:rPr b="0"/>
+              <a:rPr b="0" dirty="0"/>
               <a:t>  PhD in Bioinformatics (Boston University; Harvard Medical School)</a:t>
             </a:r>
           </a:p>
@@ -6924,7 +6100,7 @@
               </a:defRPr>
             </a:pPr>
             <a:r>
-              <a:rPr b="0"/>
+              <a:rPr b="0" dirty="0"/>
               <a:t>  Postdoc in Cancer Genetic Epidemiology (Harvard T.H. Chan School of Public Health).</a:t>
             </a:r>
           </a:p>
@@ -6949,7 +6125,7 @@
           </a:ln>
           <a:extLst>
             <a:ext uri="{C572A759-6A51-4108-AA02-DFA0A04FC94B}">
-              <ma14:wrappingTextBoxFlag xmlns:ma14="http://schemas.microsoft.com/office/mac/drawingml/2011/main" xmlns:a14="http://schemas.microsoft.com/office/drawing/2010/main" xmlns:m="http://schemas.openxmlformats.org/officeDocument/2006/math" xmlns="" val="1"/>
+              <ma14:wrappingTextBoxFlag xmlns="" xmlns:m="http://schemas.openxmlformats.org/officeDocument/2006/math" xmlns:a14="http://schemas.microsoft.com/office/drawing/2010/main" xmlns:ma14="http://schemas.microsoft.com/office/mac/drawingml/2011/main" val="1"/>
             </a:ext>
           </a:extLst>
         </p:spPr>
@@ -6996,7 +6172,7 @@
           </a:ln>
           <a:extLst>
             <a:ext uri="{C572A759-6A51-4108-AA02-DFA0A04FC94B}">
-              <ma14:wrappingTextBoxFlag xmlns:ma14="http://schemas.microsoft.com/office/mac/drawingml/2011/main" xmlns:a14="http://schemas.microsoft.com/office/drawing/2010/main" xmlns:m="http://schemas.openxmlformats.org/officeDocument/2006/math" xmlns="" val="1"/>
+              <ma14:wrappingTextBoxFlag xmlns="" xmlns:m="http://schemas.openxmlformats.org/officeDocument/2006/math" xmlns:a14="http://schemas.microsoft.com/office/drawing/2010/main" xmlns:ma14="http://schemas.microsoft.com/office/mac/drawingml/2011/main" val="1"/>
             </a:ext>
           </a:extLst>
         </p:spPr>
@@ -7046,7 +6222,7 @@
           </a:ln>
           <a:extLst>
             <a:ext uri="{C572A759-6A51-4108-AA02-DFA0A04FC94B}">
-              <ma14:wrappingTextBoxFlag xmlns:ma14="http://schemas.microsoft.com/office/mac/drawingml/2011/main" xmlns:a14="http://schemas.microsoft.com/office/drawing/2010/main" xmlns:m="http://schemas.openxmlformats.org/officeDocument/2006/math" xmlns="" val="1"/>
+              <ma14:wrappingTextBoxFlag xmlns="" xmlns:m="http://schemas.openxmlformats.org/officeDocument/2006/math" xmlns:a14="http://schemas.microsoft.com/office/drawing/2010/main" xmlns:ma14="http://schemas.microsoft.com/office/mac/drawingml/2011/main" val="1"/>
             </a:ext>
           </a:extLst>
         </p:spPr>
@@ -7093,7 +6269,7 @@
           </a:ln>
           <a:extLst>
             <a:ext uri="{C572A759-6A51-4108-AA02-DFA0A04FC94B}">
-              <ma14:wrappingTextBoxFlag xmlns:ma14="http://schemas.microsoft.com/office/mac/drawingml/2011/main" xmlns:a14="http://schemas.microsoft.com/office/drawing/2010/main" xmlns:m="http://schemas.openxmlformats.org/officeDocument/2006/math" xmlns="" val="1"/>
+              <ma14:wrappingTextBoxFlag xmlns="" xmlns:m="http://schemas.openxmlformats.org/officeDocument/2006/math" xmlns:a14="http://schemas.microsoft.com/office/drawing/2010/main" xmlns:ma14="http://schemas.microsoft.com/office/mac/drawingml/2011/main" val="1"/>
             </a:ext>
           </a:extLst>
         </p:spPr>
@@ -7143,7 +6319,7 @@
           </a:ln>
           <a:extLst>
             <a:ext uri="{C572A759-6A51-4108-AA02-DFA0A04FC94B}">
-              <ma14:wrappingTextBoxFlag xmlns:ma14="http://schemas.microsoft.com/office/mac/drawingml/2011/main" xmlns:a14="http://schemas.microsoft.com/office/drawing/2010/main" xmlns:m="http://schemas.openxmlformats.org/officeDocument/2006/math" xmlns="" val="1"/>
+              <ma14:wrappingTextBoxFlag xmlns="" xmlns:m="http://schemas.openxmlformats.org/officeDocument/2006/math" xmlns:a14="http://schemas.microsoft.com/office/drawing/2010/main" xmlns:ma14="http://schemas.microsoft.com/office/mac/drawingml/2011/main" val="1"/>
             </a:ext>
           </a:extLst>
         </p:spPr>
@@ -7190,7 +6366,7 @@
           </a:ln>
           <a:extLst>
             <a:ext uri="{C572A759-6A51-4108-AA02-DFA0A04FC94B}">
-              <ma14:wrappingTextBoxFlag xmlns:ma14="http://schemas.microsoft.com/office/mac/drawingml/2011/main" xmlns:a14="http://schemas.microsoft.com/office/drawing/2010/main" xmlns:m="http://schemas.openxmlformats.org/officeDocument/2006/math" xmlns="" val="1"/>
+              <ma14:wrappingTextBoxFlag xmlns="" xmlns:m="http://schemas.openxmlformats.org/officeDocument/2006/math" xmlns:a14="http://schemas.microsoft.com/office/drawing/2010/main" xmlns:ma14="http://schemas.microsoft.com/office/mac/drawingml/2011/main" val="1"/>
             </a:ext>
           </a:extLst>
         </p:spPr>
@@ -7240,7 +6416,7 @@
           </a:ln>
           <a:extLst>
             <a:ext uri="{C572A759-6A51-4108-AA02-DFA0A04FC94B}">
-              <ma14:wrappingTextBoxFlag xmlns:ma14="http://schemas.microsoft.com/office/mac/drawingml/2011/main" xmlns:a14="http://schemas.microsoft.com/office/drawing/2010/main" xmlns:m="http://schemas.openxmlformats.org/officeDocument/2006/math" xmlns="" val="1"/>
+              <ma14:wrappingTextBoxFlag xmlns="" xmlns:m="http://schemas.openxmlformats.org/officeDocument/2006/math" xmlns:a14="http://schemas.microsoft.com/office/drawing/2010/main" xmlns:ma14="http://schemas.microsoft.com/office/mac/drawingml/2011/main" val="1"/>
             </a:ext>
           </a:extLst>
         </p:spPr>
@@ -7287,7 +6463,7 @@
           </a:ln>
           <a:extLst>
             <a:ext uri="{C572A759-6A51-4108-AA02-DFA0A04FC94B}">
-              <ma14:wrappingTextBoxFlag xmlns:ma14="http://schemas.microsoft.com/office/mac/drawingml/2011/main" xmlns:a14="http://schemas.microsoft.com/office/drawing/2010/main" xmlns:m="http://schemas.openxmlformats.org/officeDocument/2006/math" xmlns="" val="1"/>
+              <ma14:wrappingTextBoxFlag xmlns="" xmlns:m="http://schemas.openxmlformats.org/officeDocument/2006/math" xmlns:a14="http://schemas.microsoft.com/office/drawing/2010/main" xmlns:ma14="http://schemas.microsoft.com/office/mac/drawingml/2011/main" val="1"/>
             </a:ext>
           </a:extLst>
         </p:spPr>
@@ -7337,7 +6513,7 @@
           </a:ln>
           <a:extLst>
             <a:ext uri="{C572A759-6A51-4108-AA02-DFA0A04FC94B}">
-              <ma14:wrappingTextBoxFlag xmlns:ma14="http://schemas.microsoft.com/office/mac/drawingml/2011/main" xmlns:a14="http://schemas.microsoft.com/office/drawing/2010/main" xmlns:m="http://schemas.openxmlformats.org/officeDocument/2006/math" xmlns="" val="1"/>
+              <ma14:wrappingTextBoxFlag xmlns="" xmlns:m="http://schemas.openxmlformats.org/officeDocument/2006/math" xmlns:a14="http://schemas.microsoft.com/office/drawing/2010/main" xmlns:ma14="http://schemas.microsoft.com/office/mac/drawingml/2011/main" val="1"/>
             </a:ext>
           </a:extLst>
         </p:spPr>
@@ -7421,7 +6597,7 @@
           </a:ln>
           <a:extLst>
             <a:ext uri="{C572A759-6A51-4108-AA02-DFA0A04FC94B}">
-              <ma14:wrappingTextBoxFlag xmlns:ma14="http://schemas.microsoft.com/office/mac/drawingml/2011/main" xmlns:a14="http://schemas.microsoft.com/office/drawing/2010/main" xmlns:m="http://schemas.openxmlformats.org/officeDocument/2006/math" xmlns="" val="1"/>
+              <ma14:wrappingTextBoxFlag xmlns="" xmlns:m="http://schemas.openxmlformats.org/officeDocument/2006/math" xmlns:a14="http://schemas.microsoft.com/office/drawing/2010/main" xmlns:ma14="http://schemas.microsoft.com/office/mac/drawingml/2011/main" val="1"/>
             </a:ext>
           </a:extLst>
         </p:spPr>
@@ -7541,7 +6717,7 @@
         <p:spPr>
           <a:xfrm>
             <a:off x="571500" y="571500"/>
-            <a:ext cx="11601450" cy="469900"/>
+            <a:ext cx="11601450" cy="477054"/>
           </a:xfrm>
           <a:prstGeom prst="rect">
             <a:avLst/>
@@ -7551,7 +6727,7 @@
           </a:ln>
           <a:extLst>
             <a:ext uri="{C572A759-6A51-4108-AA02-DFA0A04FC94B}">
-              <ma14:wrappingTextBoxFlag xmlns:ma14="http://schemas.microsoft.com/office/mac/drawingml/2011/main" xmlns:a14="http://schemas.microsoft.com/office/drawing/2010/main" xmlns:m="http://schemas.openxmlformats.org/officeDocument/2006/math" xmlns="" val="1"/>
+              <ma14:wrappingTextBoxFlag xmlns="" xmlns:m="http://schemas.openxmlformats.org/officeDocument/2006/math" xmlns:a14="http://schemas.microsoft.com/office/drawing/2010/main" xmlns:ma14="http://schemas.microsoft.com/office/mac/drawingml/2011/main" val="1"/>
             </a:ext>
           </a:extLst>
         </p:spPr>
@@ -7574,8 +6750,34 @@
           </a:lstStyle>
           <a:p>
             <a:r>
+              <a:rPr dirty="0"/>
               <a:t>The Clinical Challenge</a:t>
             </a:r>
+            <a:r>
+              <a:rPr lang="zh-CN" altLang="en-US" dirty="0"/>
+              <a:t>：</a:t>
+            </a:r>
+            <a:r>
+              <a:rPr lang="en-US" altLang="zh-CN" dirty="0"/>
+              <a:t>Severe</a:t>
+            </a:r>
+            <a:r>
+              <a:rPr lang="zh-CN" altLang="en-US" dirty="0"/>
+              <a:t> </a:t>
+            </a:r>
+            <a:r>
+              <a:rPr lang="en-US" altLang="zh-CN" dirty="0"/>
+              <a:t>Asthma</a:t>
+            </a:r>
+            <a:r>
+              <a:rPr lang="zh-CN" altLang="en-US" dirty="0"/>
+              <a:t> </a:t>
+            </a:r>
+            <a:r>
+              <a:rPr lang="en-US" altLang="zh-CN" dirty="0"/>
+              <a:t>Exacerbations</a:t>
+            </a:r>
+            <a:endParaRPr dirty="0"/>
           </a:p>
         </p:txBody>
       </p:sp>
@@ -7716,7 +6918,7 @@
           </a:ln>
           <a:extLst>
             <a:ext uri="{C572A759-6A51-4108-AA02-DFA0A04FC94B}">
-              <ma14:wrappingTextBoxFlag xmlns:ma14="http://schemas.microsoft.com/office/mac/drawingml/2011/main" xmlns:a14="http://schemas.microsoft.com/office/drawing/2010/main" xmlns:m="http://schemas.openxmlformats.org/officeDocument/2006/math" xmlns="" val="1"/>
+              <ma14:wrappingTextBoxFlag xmlns="" xmlns:m="http://schemas.openxmlformats.org/officeDocument/2006/math" xmlns:a14="http://schemas.microsoft.com/office/drawing/2010/main" xmlns:ma14="http://schemas.microsoft.com/office/mac/drawingml/2011/main" val="1"/>
             </a:ext>
           </a:extLst>
         </p:spPr>
@@ -7763,7 +6965,7 @@
           </a:ln>
           <a:extLst>
             <a:ext uri="{C572A759-6A51-4108-AA02-DFA0A04FC94B}">
-              <ma14:wrappingTextBoxFlag xmlns:ma14="http://schemas.microsoft.com/office/mac/drawingml/2011/main" xmlns:a14="http://schemas.microsoft.com/office/drawing/2010/main" xmlns:m="http://schemas.openxmlformats.org/officeDocument/2006/math" xmlns="" val="1"/>
+              <ma14:wrappingTextBoxFlag xmlns="" xmlns:m="http://schemas.openxmlformats.org/officeDocument/2006/math" xmlns:a14="http://schemas.microsoft.com/office/drawing/2010/main" xmlns:ma14="http://schemas.microsoft.com/office/mac/drawingml/2011/main" val="1"/>
             </a:ext>
           </a:extLst>
         </p:spPr>
@@ -7810,7 +7012,7 @@
           </a:ln>
           <a:extLst>
             <a:ext uri="{C572A759-6A51-4108-AA02-DFA0A04FC94B}">
-              <ma14:wrappingTextBoxFlag xmlns:ma14="http://schemas.microsoft.com/office/mac/drawingml/2011/main" xmlns:a14="http://schemas.microsoft.com/office/drawing/2010/main" xmlns:m="http://schemas.openxmlformats.org/officeDocument/2006/math" xmlns="" val="1"/>
+              <ma14:wrappingTextBoxFlag xmlns="" xmlns:m="http://schemas.openxmlformats.org/officeDocument/2006/math" xmlns:a14="http://schemas.microsoft.com/office/drawing/2010/main" xmlns:ma14="http://schemas.microsoft.com/office/mac/drawingml/2011/main" val="1"/>
             </a:ext>
           </a:extLst>
         </p:spPr>
@@ -7870,7 +7072,7 @@
           </a:ln>
           <a:extLst>
             <a:ext uri="{C572A759-6A51-4108-AA02-DFA0A04FC94B}">
-              <ma14:wrappingTextBoxFlag xmlns:ma14="http://schemas.microsoft.com/office/mac/drawingml/2011/main" xmlns:a14="http://schemas.microsoft.com/office/drawing/2010/main" xmlns:m="http://schemas.openxmlformats.org/officeDocument/2006/math" xmlns="" val="1"/>
+              <ma14:wrappingTextBoxFlag xmlns="" xmlns:m="http://schemas.openxmlformats.org/officeDocument/2006/math" xmlns:a14="http://schemas.microsoft.com/office/drawing/2010/main" xmlns:ma14="http://schemas.microsoft.com/office/mac/drawingml/2011/main" val="1"/>
             </a:ext>
           </a:extLst>
         </p:spPr>
@@ -8075,7 +7277,7 @@
           </a:ln>
           <a:extLst>
             <a:ext uri="{C572A759-6A51-4108-AA02-DFA0A04FC94B}">
-              <ma14:wrappingTextBoxFlag xmlns:ma14="http://schemas.microsoft.com/office/mac/drawingml/2011/main" xmlns:a14="http://schemas.microsoft.com/office/drawing/2010/main" xmlns:m="http://schemas.openxmlformats.org/officeDocument/2006/math" xmlns="" val="1"/>
+              <ma14:wrappingTextBoxFlag xmlns="" xmlns:m="http://schemas.openxmlformats.org/officeDocument/2006/math" xmlns:a14="http://schemas.microsoft.com/office/drawing/2010/main" xmlns:ma14="http://schemas.microsoft.com/office/mac/drawingml/2011/main" val="1"/>
             </a:ext>
           </a:extLst>
         </p:spPr>
@@ -8122,7 +7324,7 @@
           </a:ln>
           <a:extLst>
             <a:ext uri="{C572A759-6A51-4108-AA02-DFA0A04FC94B}">
-              <ma14:wrappingTextBoxFlag xmlns:ma14="http://schemas.microsoft.com/office/mac/drawingml/2011/main" xmlns:a14="http://schemas.microsoft.com/office/drawing/2010/main" xmlns:m="http://schemas.openxmlformats.org/officeDocument/2006/math" xmlns="" val="1"/>
+              <ma14:wrappingTextBoxFlag xmlns="" xmlns:m="http://schemas.openxmlformats.org/officeDocument/2006/math" xmlns:a14="http://schemas.microsoft.com/office/drawing/2010/main" xmlns:ma14="http://schemas.microsoft.com/office/mac/drawingml/2011/main" val="1"/>
             </a:ext>
           </a:extLst>
         </p:spPr>
@@ -8172,7 +7374,7 @@
           </a:ln>
           <a:extLst>
             <a:ext uri="{C572A759-6A51-4108-AA02-DFA0A04FC94B}">
-              <ma14:wrappingTextBoxFlag xmlns:ma14="http://schemas.microsoft.com/office/mac/drawingml/2011/main" xmlns:a14="http://schemas.microsoft.com/office/drawing/2010/main" xmlns:m="http://schemas.openxmlformats.org/officeDocument/2006/math" xmlns="" val="1"/>
+              <ma14:wrappingTextBoxFlag xmlns="" xmlns:m="http://schemas.openxmlformats.org/officeDocument/2006/math" xmlns:a14="http://schemas.microsoft.com/office/drawing/2010/main" xmlns:ma14="http://schemas.microsoft.com/office/mac/drawingml/2011/main" val="1"/>
             </a:ext>
           </a:extLst>
         </p:spPr>
@@ -8225,7 +7427,7 @@
           </a:ln>
           <a:extLst>
             <a:ext uri="{C572A759-6A51-4108-AA02-DFA0A04FC94B}">
-              <ma14:wrappingTextBoxFlag xmlns:ma14="http://schemas.microsoft.com/office/mac/drawingml/2011/main" xmlns:a14="http://schemas.microsoft.com/office/drawing/2010/main" xmlns:m="http://schemas.openxmlformats.org/officeDocument/2006/math" xmlns="" val="1"/>
+              <ma14:wrappingTextBoxFlag xmlns="" xmlns:m="http://schemas.openxmlformats.org/officeDocument/2006/math" xmlns:a14="http://schemas.microsoft.com/office/drawing/2010/main" xmlns:ma14="http://schemas.microsoft.com/office/mac/drawingml/2011/main" val="1"/>
             </a:ext>
           </a:extLst>
         </p:spPr>
@@ -8272,7 +7474,7 @@
           </a:ln>
           <a:extLst>
             <a:ext uri="{C572A759-6A51-4108-AA02-DFA0A04FC94B}">
-              <ma14:wrappingTextBoxFlag xmlns:ma14="http://schemas.microsoft.com/office/mac/drawingml/2011/main" xmlns:a14="http://schemas.microsoft.com/office/drawing/2010/main" xmlns:m="http://schemas.openxmlformats.org/officeDocument/2006/math" xmlns="" val="1"/>
+              <ma14:wrappingTextBoxFlag xmlns="" xmlns:m="http://schemas.openxmlformats.org/officeDocument/2006/math" xmlns:a14="http://schemas.microsoft.com/office/drawing/2010/main" xmlns:ma14="http://schemas.microsoft.com/office/mac/drawingml/2011/main" val="1"/>
             </a:ext>
           </a:extLst>
         </p:spPr>
@@ -8322,7 +7524,7 @@
           </a:ln>
           <a:extLst>
             <a:ext uri="{C572A759-6A51-4108-AA02-DFA0A04FC94B}">
-              <ma14:wrappingTextBoxFlag xmlns:ma14="http://schemas.microsoft.com/office/mac/drawingml/2011/main" xmlns:a14="http://schemas.microsoft.com/office/drawing/2010/main" xmlns:m="http://schemas.openxmlformats.org/officeDocument/2006/math" xmlns="" val="1"/>
+              <ma14:wrappingTextBoxFlag xmlns="" xmlns:m="http://schemas.openxmlformats.org/officeDocument/2006/math" xmlns:a14="http://schemas.microsoft.com/office/drawing/2010/main" xmlns:ma14="http://schemas.microsoft.com/office/mac/drawingml/2011/main" val="1"/>
             </a:ext>
           </a:extLst>
         </p:spPr>
@@ -8372,7 +7574,7 @@
           </a:ln>
           <a:extLst>
             <a:ext uri="{C572A759-6A51-4108-AA02-DFA0A04FC94B}">
-              <ma14:wrappingTextBoxFlag xmlns:ma14="http://schemas.microsoft.com/office/mac/drawingml/2011/main" xmlns:a14="http://schemas.microsoft.com/office/drawing/2010/main" xmlns:m="http://schemas.openxmlformats.org/officeDocument/2006/math" xmlns="" val="1"/>
+              <ma14:wrappingTextBoxFlag xmlns="" xmlns:m="http://schemas.openxmlformats.org/officeDocument/2006/math" xmlns:a14="http://schemas.microsoft.com/office/drawing/2010/main" xmlns:ma14="http://schemas.microsoft.com/office/mac/drawingml/2011/main" val="1"/>
             </a:ext>
           </a:extLst>
         </p:spPr>
@@ -8409,7 +7611,7 @@
         <p:spPr>
           <a:xfrm>
             <a:off x="8907512" y="3677542"/>
-            <a:ext cx="1933576" cy="546101"/>
+            <a:ext cx="2417862" cy="783933"/>
           </a:xfrm>
           <a:prstGeom prst="rect">
             <a:avLst/>
@@ -8419,12 +7621,12 @@
           </a:ln>
           <a:extLst>
             <a:ext uri="{C572A759-6A51-4108-AA02-DFA0A04FC94B}">
-              <ma14:wrappingTextBoxFlag xmlns:ma14="http://schemas.microsoft.com/office/mac/drawingml/2011/main" xmlns:a14="http://schemas.microsoft.com/office/drawing/2010/main" xmlns:m="http://schemas.openxmlformats.org/officeDocument/2006/math" xmlns="" val="1"/>
+              <ma14:wrappingTextBoxFlag xmlns="" xmlns:m="http://schemas.openxmlformats.org/officeDocument/2006/math" xmlns:a14="http://schemas.microsoft.com/office/drawing/2010/main" xmlns:ma14="http://schemas.microsoft.com/office/mac/drawingml/2011/main" val="1"/>
             </a:ext>
           </a:extLst>
         </p:spPr>
         <p:txBody>
-          <a:bodyPr lIns="0" tIns="0" rIns="0" bIns="0">
+          <a:bodyPr wrap="square" lIns="0" tIns="0" rIns="0" bIns="0">
             <a:spAutoFit/>
           </a:bodyPr>
           <a:lstStyle>
@@ -8445,6 +7647,7 @@
           </a:lstStyle>
           <a:p>
             <a:r>
+              <a:rPr dirty="0"/>
               <a:t>&gt;550,000</a:t>
             </a:r>
           </a:p>
@@ -8469,7 +7672,7 @@
           </a:ln>
           <a:extLst>
             <a:ext uri="{C572A759-6A51-4108-AA02-DFA0A04FC94B}">
-              <ma14:wrappingTextBoxFlag xmlns:ma14="http://schemas.microsoft.com/office/mac/drawingml/2011/main" xmlns:a14="http://schemas.microsoft.com/office/drawing/2010/main" xmlns:m="http://schemas.openxmlformats.org/officeDocument/2006/math" xmlns="" val="1"/>
+              <ma14:wrappingTextBoxFlag xmlns="" xmlns:m="http://schemas.openxmlformats.org/officeDocument/2006/math" xmlns:a14="http://schemas.microsoft.com/office/drawing/2010/main" xmlns:ma14="http://schemas.microsoft.com/office/mac/drawingml/2011/main" val="1"/>
             </a:ext>
           </a:extLst>
         </p:spPr>
@@ -8495,6 +7698,7 @@
           </a:lstStyle>
           <a:p>
             <a:r>
+              <a:rPr dirty="0"/>
               <a:t>Single Nucleotide Polymorphisms (SNPs) + Clinical Traits</a:t>
             </a:r>
           </a:p>
@@ -8600,7 +7804,7 @@
           </a:ln>
           <a:extLst>
             <a:ext uri="{C572A759-6A51-4108-AA02-DFA0A04FC94B}">
-              <ma14:wrappingTextBoxFlag xmlns:ma14="http://schemas.microsoft.com/office/mac/drawingml/2011/main" xmlns:a14="http://schemas.microsoft.com/office/drawing/2010/main" xmlns:m="http://schemas.openxmlformats.org/officeDocument/2006/math" xmlns="" val="1"/>
+              <ma14:wrappingTextBoxFlag xmlns="" xmlns:m="http://schemas.openxmlformats.org/officeDocument/2006/math" xmlns:a14="http://schemas.microsoft.com/office/drawing/2010/main" xmlns:ma14="http://schemas.microsoft.com/office/mac/drawingml/2011/main" val="1"/>
             </a:ext>
           </a:extLst>
         </p:spPr>
@@ -9162,6 +8366,56 @@
         <p:spPr>
           <a:xfrm>
             <a:off x="6495019" y="3918273"/>
+            <a:ext cx="4953000" cy="1034129"/>
+          </a:xfrm>
+          <a:prstGeom prst="rect">
+            <a:avLst/>
+          </a:prstGeom>
+          <a:noFill/>
+          <a:ln>
+            <a:noFill/>
+          </a:ln>
+        </p:spPr>
+        <p:txBody>
+          <a:bodyPr spcFirstLastPara="1" wrap="square" lIns="0" tIns="0" rIns="0" bIns="0" anchor="t" anchorCtr="0">
+            <a:spAutoFit/>
+          </a:bodyPr>
+          <a:lstStyle/>
+          <a:p>
+            <a:pPr lvl="0">
+              <a:lnSpc>
+                <a:spcPct val="160000"/>
+              </a:lnSpc>
+            </a:pPr>
+            <a:r>
+              <a:rPr lang="en-US" b="1" dirty="0"/>
+              <a:t>Voting Mechanism:</a:t>
+            </a:r>
+            <a:r>
+              <a:rPr lang="en-US" dirty="0"/>
+              <a:t> The model aggregates predictions by taking the </a:t>
+            </a:r>
+            <a:r>
+              <a:rPr lang="en-US" b="1" dirty="0"/>
+              <a:t>votes from each decision tree</a:t>
+            </a:r>
+            <a:r>
+              <a:rPr lang="en-US" dirty="0"/>
+              <a:t> to determine the final outcome.</a:t>
+            </a:r>
+            <a:endParaRPr dirty="0"/>
+          </a:p>
+        </p:txBody>
+      </p:sp>
+      <p:sp>
+        <p:nvSpPr>
+          <p:cNvPr id="98" name="Google Shape;98;p13"/>
+          <p:cNvSpPr txBox="1"/>
+          <p:nvPr/>
+        </p:nvSpPr>
+        <p:spPr>
+          <a:xfrm>
+            <a:off x="6495019" y="5037239"/>
             <a:ext cx="4953000" cy="548580"/>
           </a:xfrm>
           <a:prstGeom prst="rect">
@@ -9191,7 +8445,7 @@
               <a:buNone/>
             </a:pPr>
             <a:r>
-              <a:rPr lang="en-US" sz="1350" b="0" i="0" u="none" strike="noStrike" cap="none">
+              <a:rPr lang="en-US" sz="1350" b="0" i="0" u="none" strike="noStrike" cap="none" dirty="0">
                 <a:solidFill>
                   <a:srgbClr val="334155"/>
                 </a:solidFill>
@@ -9200,10 +8454,10 @@
                 <a:cs typeface="DM Sans"/>
                 <a:sym typeface="DM Sans"/>
               </a:rPr>
-              <a:t>This randomization significantly </a:t>
-            </a:r>
-            <a:r>
-              <a:rPr lang="en-US" sz="1350" b="1" i="0" u="none" strike="noStrike" cap="none">
+              <a:t>Handles </a:t>
+            </a:r>
+            <a:r>
+              <a:rPr lang="en-US" sz="1350" b="1" i="0" u="none" strike="noStrike" cap="none" dirty="0">
                 <a:solidFill>
                   <a:srgbClr val="0EA5E9"/>
                 </a:solidFill>
@@ -9212,10 +8466,10 @@
                 <a:cs typeface="DM Sans"/>
                 <a:sym typeface="DM Sans"/>
               </a:rPr>
-              <a:t>reduces overfitting</a:t>
-            </a:r>
-            <a:r>
-              <a:rPr lang="en-US" sz="1350" b="0" i="0" u="none" strike="noStrike" cap="none">
+              <a:t>nonlinear, high-dimensional data</a:t>
+            </a:r>
+            <a:r>
+              <a:rPr lang="en-US" sz="1350" b="0" i="0" u="none" strike="noStrike" cap="none" dirty="0">
                 <a:solidFill>
                   <a:srgbClr val="334155"/>
                 </a:solidFill>
@@ -9224,21 +8478,21 @@
                 <a:cs typeface="DM Sans"/>
                 <a:sym typeface="DM Sans"/>
               </a:rPr>
-              <a:t> and improves generalization.</a:t>
-            </a:r>
-            <a:endParaRPr/>
-          </a:p>
-        </p:txBody>
-      </p:sp>
-      <p:sp>
-        <p:nvSpPr>
-          <p:cNvPr id="98" name="Google Shape;98;p13"/>
+              <a:t> effectively, crucial for complex datasets.</a:t>
+            </a:r>
+            <a:endParaRPr dirty="0"/>
+          </a:p>
+        </p:txBody>
+      </p:sp>
+      <p:sp>
+        <p:nvSpPr>
+          <p:cNvPr id="99" name="Google Shape;99;p13"/>
           <p:cNvSpPr txBox="1"/>
           <p:nvPr/>
         </p:nvSpPr>
         <p:spPr>
           <a:xfrm>
-            <a:off x="6495019" y="4609728"/>
+            <a:off x="6495019" y="5728695"/>
             <a:ext cx="4953000" cy="548580"/>
           </a:xfrm>
           <a:prstGeom prst="rect">
@@ -9277,83 +8531,6 @@
                 <a:cs typeface="DM Sans"/>
                 <a:sym typeface="DM Sans"/>
               </a:rPr>
-              <a:t>Handles </a:t>
-            </a:r>
-            <a:r>
-              <a:rPr lang="en-US" sz="1350" b="1" i="0" u="none" strike="noStrike" cap="none" dirty="0">
-                <a:solidFill>
-                  <a:srgbClr val="0EA5E9"/>
-                </a:solidFill>
-                <a:latin typeface="DM Sans"/>
-                <a:ea typeface="DM Sans"/>
-                <a:cs typeface="DM Sans"/>
-                <a:sym typeface="DM Sans"/>
-              </a:rPr>
-              <a:t>nonlinear, high-dimensional data</a:t>
-            </a:r>
-            <a:r>
-              <a:rPr lang="en-US" sz="1350" b="0" i="0" u="none" strike="noStrike" cap="none" dirty="0">
-                <a:solidFill>
-                  <a:srgbClr val="334155"/>
-                </a:solidFill>
-                <a:latin typeface="DM Sans"/>
-                <a:ea typeface="DM Sans"/>
-                <a:cs typeface="DM Sans"/>
-                <a:sym typeface="DM Sans"/>
-              </a:rPr>
-              <a:t> effectively, crucial for complex datasets.</a:t>
-            </a:r>
-            <a:endParaRPr dirty="0"/>
-          </a:p>
-        </p:txBody>
-      </p:sp>
-      <p:sp>
-        <p:nvSpPr>
-          <p:cNvPr id="99" name="Google Shape;99;p13"/>
-          <p:cNvSpPr txBox="1"/>
-          <p:nvPr/>
-        </p:nvSpPr>
-        <p:spPr>
-          <a:xfrm>
-            <a:off x="6495019" y="5301184"/>
-            <a:ext cx="4953000" cy="548580"/>
-          </a:xfrm>
-          <a:prstGeom prst="rect">
-            <a:avLst/>
-          </a:prstGeom>
-          <a:noFill/>
-          <a:ln>
-            <a:noFill/>
-          </a:ln>
-        </p:spPr>
-        <p:txBody>
-          <a:bodyPr spcFirstLastPara="1" wrap="square" lIns="0" tIns="0" rIns="0" bIns="0" anchor="t" anchorCtr="0">
-            <a:spAutoFit/>
-          </a:bodyPr>
-          <a:lstStyle/>
-          <a:p>
-            <a:pPr marL="0" marR="0" lvl="0" indent="0" algn="l" rtl="0">
-              <a:lnSpc>
-                <a:spcPct val="160000"/>
-              </a:lnSpc>
-              <a:spcBef>
-                <a:spcPts val="0"/>
-              </a:spcBef>
-              <a:spcAft>
-                <a:spcPts val="0"/>
-              </a:spcAft>
-              <a:buNone/>
-            </a:pPr>
-            <a:r>
-              <a:rPr lang="en-US" sz="1350" b="0" i="0" u="none" strike="noStrike" cap="none" dirty="0">
-                <a:solidFill>
-                  <a:srgbClr val="334155"/>
-                </a:solidFill>
-                <a:latin typeface="DM Sans"/>
-                <a:ea typeface="DM Sans"/>
-                <a:cs typeface="DM Sans"/>
-                <a:sym typeface="DM Sans"/>
-              </a:rPr>
               <a:t>Provides valuable </a:t>
             </a:r>
             <a:r>
@@ -9507,7 +8684,7 @@
         </p:blipFill>
         <p:spPr>
           <a:xfrm>
-            <a:off x="6209269" y="4628778"/>
+            <a:off x="6209269" y="5056289"/>
             <a:ext cx="190500" cy="200025"/>
           </a:xfrm>
           <a:prstGeom prst="rect">
@@ -9534,7 +8711,7 @@
         </p:blipFill>
         <p:spPr>
           <a:xfrm>
-            <a:off x="6209269" y="5320234"/>
+            <a:off x="6209269" y="5747745"/>
             <a:ext cx="190500" cy="200025"/>
           </a:xfrm>
           <a:prstGeom prst="rect">
@@ -9747,7 +8924,7 @@
       </p:grpSpPr>
       <p:pic>
         <p:nvPicPr>
-          <p:cNvPr id="172" name="Google Shape;157;p17" descr="Google Shape;157;p17"/>
+          <p:cNvPr id="187" name="Google Shape;175;p18" descr="Google Shape;175;p18"/>
           <p:cNvPicPr>
             <a:picLocks noChangeAspect="1"/>
           </p:cNvPicPr>
@@ -9772,16 +8949,97 @@
           </a:ln>
         </p:spPr>
       </p:pic>
-      <p:sp>
-        <p:nvSpPr>
-          <p:cNvPr id="173" name="Google Shape;158;p17"/>
+      <p:pic>
+        <p:nvPicPr>
+          <p:cNvPr id="188" name="Google Shape;176;p18" descr="Google Shape;176;p18"/>
+          <p:cNvPicPr>
+            <a:picLocks noChangeAspect="1"/>
+          </p:cNvPicPr>
+          <p:nvPr/>
+        </p:nvPicPr>
+        <p:blipFill>
+          <a:blip r:embed="rId3"/>
+          <a:stretch>
+            <a:fillRect/>
+          </a:stretch>
+        </p:blipFill>
+        <p:spPr>
+          <a:xfrm>
+            <a:off x="571500" y="1873597"/>
+            <a:ext cx="2755851" cy="3514726"/>
+          </a:xfrm>
+          <a:prstGeom prst="rect">
+            <a:avLst/>
+          </a:prstGeom>
+          <a:ln w="12700">
+            <a:miter lim="400000"/>
+          </a:ln>
+        </p:spPr>
+      </p:pic>
+      <p:pic>
+        <p:nvPicPr>
+          <p:cNvPr id="189" name="Google Shape;177;p18" descr="Google Shape;177;p18"/>
+          <p:cNvPicPr>
+            <a:picLocks noChangeAspect="1"/>
+          </p:cNvPicPr>
+          <p:nvPr/>
+        </p:nvPicPr>
+        <p:blipFill>
+          <a:blip r:embed="rId4"/>
+          <a:stretch>
+            <a:fillRect/>
+          </a:stretch>
+        </p:blipFill>
+        <p:spPr>
+          <a:xfrm>
+            <a:off x="4718000" y="1873597"/>
+            <a:ext cx="2755851" cy="3514726"/>
+          </a:xfrm>
+          <a:prstGeom prst="rect">
+            <a:avLst/>
+          </a:prstGeom>
+          <a:ln w="12700">
+            <a:miter lim="400000"/>
+          </a:ln>
+        </p:spPr>
+      </p:pic>
+      <p:pic>
+        <p:nvPicPr>
+          <p:cNvPr id="190" name="Google Shape;178;p18" descr="Google Shape;178;p18"/>
+          <p:cNvPicPr>
+            <a:picLocks noChangeAspect="1"/>
+          </p:cNvPicPr>
+          <p:nvPr/>
+        </p:nvPicPr>
+        <p:blipFill>
+          <a:blip r:embed="rId5"/>
+          <a:stretch>
+            <a:fillRect/>
+          </a:stretch>
+        </p:blipFill>
+        <p:spPr>
+          <a:xfrm>
+            <a:off x="8864500" y="1873597"/>
+            <a:ext cx="2755851" cy="3514726"/>
+          </a:xfrm>
+          <a:prstGeom prst="rect">
+            <a:avLst/>
+          </a:prstGeom>
+          <a:ln w="12700">
+            <a:miter lim="400000"/>
+          </a:ln>
+        </p:spPr>
+      </p:pic>
+      <p:sp>
+        <p:nvSpPr>
+          <p:cNvPr id="191" name="Google Shape;179;p18"/>
           <p:cNvSpPr txBox="1"/>
           <p:nvPr/>
         </p:nvSpPr>
         <p:spPr>
           <a:xfrm>
-            <a:off x="571499" y="1719261"/>
-            <a:ext cx="5500689" cy="317501"/>
+            <a:off x="3514725" y="5674071"/>
+            <a:ext cx="5162550" cy="177801"/>
           </a:xfrm>
           <a:prstGeom prst="rect">
             <a:avLst/>
@@ -9791,7 +9049,60 @@
           </a:ln>
           <a:extLst>
             <a:ext uri="{C572A759-6A51-4108-AA02-DFA0A04FC94B}">
-              <ma14:wrappingTextBoxFlag xmlns:ma14="http://schemas.microsoft.com/office/mac/drawingml/2011/main" xmlns:a14="http://schemas.microsoft.com/office/drawing/2010/main" xmlns:m="http://schemas.openxmlformats.org/officeDocument/2006/math" xmlns="" val="1"/>
+              <ma14:wrappingTextBoxFlag xmlns="" xmlns:m="http://schemas.openxmlformats.org/officeDocument/2006/math" xmlns:a14="http://schemas.microsoft.com/office/drawing/2010/main" xmlns:ma14="http://schemas.microsoft.com/office/mac/drawingml/2011/main" val="1"/>
+            </a:ext>
+          </a:extLst>
+        </p:spPr>
+        <p:txBody>
+          <a:bodyPr lIns="0" tIns="0" rIns="0" bIns="0">
+            <a:spAutoFit/>
+          </a:bodyPr>
+          <a:lstStyle/>
+          <a:p>
+            <a:pPr>
+              <a:lnSpc>
+                <a:spcPct val="160000"/>
+              </a:lnSpc>
+              <a:defRPr sz="1200" b="1">
+                <a:solidFill>
+                  <a:srgbClr val="64748B"/>
+                </a:solidFill>
+                <a:latin typeface="Open Sans"/>
+                <a:ea typeface="Open Sans"/>
+                <a:cs typeface="Open Sans"/>
+                <a:sym typeface="Open Sans"/>
+              </a:defRPr>
+            </a:pPr>
+            <a:r>
+              <a:t>Clinical Traits Used:</a:t>
+            </a:r>
+            <a:r>
+              <a:rPr b="0"/>
+              <a:t> Age, Sex, FEV1% (Lung Function), Treatment Group</a:t>
+            </a:r>
+          </a:p>
+        </p:txBody>
+      </p:sp>
+      <p:sp>
+        <p:nvSpPr>
+          <p:cNvPr id="192" name="Google Shape;180;p18"/>
+          <p:cNvSpPr txBox="1"/>
+          <p:nvPr/>
+        </p:nvSpPr>
+        <p:spPr>
+          <a:xfrm>
+            <a:off x="812642" y="2883247"/>
+            <a:ext cx="2273565" cy="635001"/>
+          </a:xfrm>
+          <a:prstGeom prst="rect">
+            <a:avLst/>
+          </a:prstGeom>
+          <a:ln w="12700">
+            <a:miter lim="400000"/>
+          </a:ln>
+          <a:extLst>
+            <a:ext uri="{C572A759-6A51-4108-AA02-DFA0A04FC94B}">
+              <ma14:wrappingTextBoxFlag xmlns="" xmlns:m="http://schemas.openxmlformats.org/officeDocument/2006/math" xmlns:a14="http://schemas.microsoft.com/office/drawing/2010/main" xmlns:ma14="http://schemas.microsoft.com/office/mac/drawingml/2011/main" val="1"/>
             </a:ext>
           </a:extLst>
         </p:spPr>
@@ -9800,7 +9111,7 @@
             <a:spAutoFit/>
           </a:bodyPr>
           <a:lstStyle>
-            <a:lvl1pPr>
+            <a:lvl1pPr algn="ctr">
               <a:defRPr sz="2100" b="1">
                 <a:solidFill>
                   <a:srgbClr val="0F766E"/>
@@ -9814,21 +9125,21 @@
           </a:lstStyle>
           <a:p>
             <a:r>
-              <a:t>Why Random Forests?</a:t>
-            </a:r>
-          </a:p>
-        </p:txBody>
-      </p:sp>
-      <p:sp>
-        <p:nvSpPr>
-          <p:cNvPr id="174" name="Google Shape;159;p17"/>
+              <a:t>Step 1: Initial Screen</a:t>
+            </a:r>
+          </a:p>
+        </p:txBody>
+      </p:sp>
+      <p:sp>
+        <p:nvSpPr>
+          <p:cNvPr id="193" name="Google Shape;181;p18"/>
           <p:cNvSpPr txBox="1"/>
           <p:nvPr/>
         </p:nvSpPr>
         <p:spPr>
           <a:xfrm>
-            <a:off x="571500" y="2214561"/>
-            <a:ext cx="5238750" cy="594361"/>
+            <a:off x="866775" y="3730971"/>
+            <a:ext cx="2165301" cy="1325881"/>
           </a:xfrm>
           <a:prstGeom prst="rect">
             <a:avLst/>
@@ -9838,7 +9149,7 @@
           </a:ln>
           <a:extLst>
             <a:ext uri="{C572A759-6A51-4108-AA02-DFA0A04FC94B}">
-              <ma14:wrappingTextBoxFlag xmlns:ma14="http://schemas.microsoft.com/office/mac/drawingml/2011/main" xmlns:a14="http://schemas.microsoft.com/office/drawing/2010/main" xmlns:m="http://schemas.openxmlformats.org/officeDocument/2006/math" xmlns="" val="1"/>
+              <ma14:wrappingTextBoxFlag xmlns="" xmlns:m="http://schemas.openxmlformats.org/officeDocument/2006/math" xmlns:a14="http://schemas.microsoft.com/office/drawing/2010/main" xmlns:ma14="http://schemas.microsoft.com/office/mac/drawingml/2011/main" val="1"/>
             </a:ext>
           </a:extLst>
         </p:spPr>
@@ -9847,7 +9158,7 @@
             <a:spAutoFit/>
           </a:bodyPr>
           <a:lstStyle>
-            <a:lvl1pPr>
+            <a:lvl1pPr algn="ctr">
               <a:lnSpc>
                 <a:spcPct val="160000"/>
               </a:lnSpc>
@@ -9864,21 +9175,48 @@
           </a:lstStyle>
           <a:p>
             <a:r>
-              <a:t>We chose Random Forests (RF) to integrate genetics and clinical data because:</a:t>
-            </a:r>
-          </a:p>
-        </p:txBody>
-      </p:sp>
-      <p:sp>
-        <p:nvSpPr>
-          <p:cNvPr id="175" name="Google Shape;160;p17"/>
+              <a:t>Compute RF importance scores for all 550,000 SNPs in batches (chromosomal order).</a:t>
+            </a:r>
+          </a:p>
+        </p:txBody>
+      </p:sp>
+      <p:pic>
+        <p:nvPicPr>
+          <p:cNvPr id="194" name="Google Shape;182;p18" descr="Google Shape;182;p18"/>
+          <p:cNvPicPr>
+            <a:picLocks noChangeAspect="1"/>
+          </p:cNvPicPr>
+          <p:nvPr/>
+        </p:nvPicPr>
+        <p:blipFill>
+          <a:blip r:embed="rId6"/>
+          <a:stretch>
+            <a:fillRect/>
+          </a:stretch>
+        </p:blipFill>
+        <p:spPr>
+          <a:xfrm>
+            <a:off x="3898850" y="3488083"/>
+            <a:ext cx="247651" cy="285751"/>
+          </a:xfrm>
+          <a:prstGeom prst="rect">
+            <a:avLst/>
+          </a:prstGeom>
+          <a:ln w="12700">
+            <a:miter lim="400000"/>
+          </a:ln>
+        </p:spPr>
+      </p:pic>
+      <p:sp>
+        <p:nvSpPr>
+          <p:cNvPr id="195" name="Google Shape;183;p18"/>
           <p:cNvSpPr txBox="1"/>
           <p:nvPr/>
         </p:nvSpPr>
         <p:spPr>
           <a:xfrm>
-            <a:off x="685800" y="2976561"/>
-            <a:ext cx="76200" cy="228601"/>
+            <a:off x="5050720" y="2883247"/>
+            <a:ext cx="2090261" cy="317501"/>
           </a:xfrm>
           <a:prstGeom prst="rect">
             <a:avLst/>
@@ -9888,7 +9226,7 @@
           </a:ln>
           <a:extLst>
             <a:ext uri="{C572A759-6A51-4108-AA02-DFA0A04FC94B}">
-              <ma14:wrappingTextBoxFlag xmlns:ma14="http://schemas.microsoft.com/office/mac/drawingml/2011/main" xmlns:a14="http://schemas.microsoft.com/office/drawing/2010/main" xmlns:m="http://schemas.openxmlformats.org/officeDocument/2006/math" xmlns="" val="1"/>
+              <ma14:wrappingTextBoxFlag xmlns="" xmlns:m="http://schemas.openxmlformats.org/officeDocument/2006/math" xmlns:a14="http://schemas.microsoft.com/office/drawing/2010/main" xmlns:ma14="http://schemas.microsoft.com/office/mac/drawingml/2011/main" val="1"/>
             </a:ext>
           </a:extLst>
         </p:spPr>
@@ -9897,7 +9235,57 @@
             <a:spAutoFit/>
           </a:bodyPr>
           <a:lstStyle>
-            <a:lvl1pPr>
+            <a:lvl1pPr algn="ctr">
+              <a:defRPr sz="2100" b="1">
+                <a:solidFill>
+                  <a:srgbClr val="0F766E"/>
+                </a:solidFill>
+                <a:latin typeface="Roboto Slab"/>
+                <a:ea typeface="Roboto Slab"/>
+                <a:cs typeface="Roboto Slab"/>
+                <a:sym typeface="Roboto Slab"/>
+              </a:defRPr>
+            </a:lvl1pPr>
+          </a:lstStyle>
+          <a:p>
+            <a:r>
+              <a:t>Step 2: Ranking</a:t>
+            </a:r>
+          </a:p>
+        </p:txBody>
+      </p:sp>
+      <p:sp>
+        <p:nvSpPr>
+          <p:cNvPr id="196" name="Google Shape;184;p18"/>
+          <p:cNvSpPr txBox="1"/>
+          <p:nvPr/>
+        </p:nvSpPr>
+        <p:spPr>
+          <a:xfrm>
+            <a:off x="5013275" y="3378546"/>
+            <a:ext cx="2165301" cy="1325881"/>
+          </a:xfrm>
+          <a:prstGeom prst="rect">
+            <a:avLst/>
+          </a:prstGeom>
+          <a:ln w="12700">
+            <a:miter lim="400000"/>
+          </a:ln>
+          <a:extLst>
+            <a:ext uri="{C572A759-6A51-4108-AA02-DFA0A04FC94B}">
+              <ma14:wrappingTextBoxFlag xmlns="" xmlns:m="http://schemas.openxmlformats.org/officeDocument/2006/math" xmlns:a14="http://schemas.microsoft.com/office/drawing/2010/main" xmlns:ma14="http://schemas.microsoft.com/office/mac/drawingml/2011/main" val="1"/>
+            </a:ext>
+          </a:extLst>
+        </p:spPr>
+        <p:txBody>
+          <a:bodyPr lIns="0" tIns="0" rIns="0" bIns="0">
+            <a:spAutoFit/>
+          </a:bodyPr>
+          <a:lstStyle>
+            <a:lvl1pPr algn="ctr">
+              <a:lnSpc>
+                <a:spcPct val="160000"/>
+              </a:lnSpc>
               <a:defRPr sz="1500">
                 <a:solidFill>
                   <a:srgbClr val="334155"/>
@@ -9911,21 +9299,48 @@
           </a:lstStyle>
           <a:p>
             <a:r>
-              <a:t>•</a:t>
-            </a:r>
-          </a:p>
-        </p:txBody>
-      </p:sp>
-      <p:sp>
-        <p:nvSpPr>
-          <p:cNvPr id="176" name="Google Shape;161;p17"/>
+              <a:t>Select the top 4,000 SNPs based on initial scores. Re-run RF to refine the ranking.</a:t>
+            </a:r>
+          </a:p>
+        </p:txBody>
+      </p:sp>
+      <p:pic>
+        <p:nvPicPr>
+          <p:cNvPr id="197" name="Google Shape;185;p18" descr="Google Shape;185;p18"/>
+          <p:cNvPicPr>
+            <a:picLocks noChangeAspect="1"/>
+          </p:cNvPicPr>
+          <p:nvPr/>
+        </p:nvPicPr>
+        <p:blipFill>
+          <a:blip r:embed="rId7"/>
+          <a:stretch>
+            <a:fillRect/>
+          </a:stretch>
+        </p:blipFill>
+        <p:spPr>
+          <a:xfrm>
+            <a:off x="8045350" y="3488083"/>
+            <a:ext cx="247651" cy="285751"/>
+          </a:xfrm>
+          <a:prstGeom prst="rect">
+            <a:avLst/>
+          </a:prstGeom>
+          <a:ln w="12700">
+            <a:miter lim="400000"/>
+          </a:ln>
+        </p:spPr>
+      </p:pic>
+      <p:sp>
+        <p:nvSpPr>
+          <p:cNvPr id="198" name="Google Shape;186;p18"/>
           <p:cNvSpPr txBox="1"/>
           <p:nvPr/>
         </p:nvSpPr>
         <p:spPr>
           <a:xfrm>
-            <a:off x="838200" y="2976561"/>
-            <a:ext cx="4972050" cy="594361"/>
+            <a:off x="9105642" y="2883247"/>
+            <a:ext cx="2273566" cy="317501"/>
           </a:xfrm>
           <a:prstGeom prst="rect">
             <a:avLst/>
@@ -9935,60 +9350,7 @@
           </a:ln>
           <a:extLst>
             <a:ext uri="{C572A759-6A51-4108-AA02-DFA0A04FC94B}">
-              <ma14:wrappingTextBoxFlag xmlns:ma14="http://schemas.microsoft.com/office/mac/drawingml/2011/main" xmlns:a14="http://schemas.microsoft.com/office/drawing/2010/main" xmlns:m="http://schemas.openxmlformats.org/officeDocument/2006/math" xmlns="" val="1"/>
-            </a:ext>
-          </a:extLst>
-        </p:spPr>
-        <p:txBody>
-          <a:bodyPr lIns="0" tIns="0" rIns="0" bIns="0">
-            <a:spAutoFit/>
-          </a:bodyPr>
-          <a:lstStyle/>
-          <a:p>
-            <a:pPr>
-              <a:lnSpc>
-                <a:spcPct val="160000"/>
-              </a:lnSpc>
-              <a:defRPr sz="1500" b="1">
-                <a:solidFill>
-                  <a:srgbClr val="334155"/>
-                </a:solidFill>
-                <a:latin typeface="Open Sans"/>
-                <a:ea typeface="Open Sans"/>
-                <a:cs typeface="Open Sans"/>
-                <a:sym typeface="Open Sans"/>
-              </a:defRPr>
-            </a:pPr>
-            <a:r>
-              <a:t>High Dimensionality:</a:t>
-            </a:r>
-            <a:r>
-              <a:rPr b="0"/>
-              <a:t> RF effectively handles P &gt;&gt; N (550k SNPs vs 417 subjects).</a:t>
-            </a:r>
-          </a:p>
-        </p:txBody>
-      </p:sp>
-      <p:sp>
-        <p:nvSpPr>
-          <p:cNvPr id="177" name="Google Shape;162;p17"/>
-          <p:cNvSpPr txBox="1"/>
-          <p:nvPr/>
-        </p:nvSpPr>
-        <p:spPr>
-          <a:xfrm>
-            <a:off x="685800" y="3700462"/>
-            <a:ext cx="76200" cy="228601"/>
-          </a:xfrm>
-          <a:prstGeom prst="rect">
-            <a:avLst/>
-          </a:prstGeom>
-          <a:ln w="12700">
-            <a:miter lim="400000"/>
-          </a:ln>
-          <a:extLst>
-            <a:ext uri="{C572A759-6A51-4108-AA02-DFA0A04FC94B}">
-              <ma14:wrappingTextBoxFlag xmlns:ma14="http://schemas.microsoft.com/office/mac/drawingml/2011/main" xmlns:a14="http://schemas.microsoft.com/office/drawing/2010/main" xmlns:m="http://schemas.openxmlformats.org/officeDocument/2006/math" xmlns="" val="1"/>
+              <ma14:wrappingTextBoxFlag xmlns="" xmlns:m="http://schemas.openxmlformats.org/officeDocument/2006/math" xmlns:a14="http://schemas.microsoft.com/office/drawing/2010/main" xmlns:ma14="http://schemas.microsoft.com/office/mac/drawingml/2011/main" val="1"/>
             </a:ext>
           </a:extLst>
         </p:spPr>
@@ -9997,7 +9359,57 @@
             <a:spAutoFit/>
           </a:bodyPr>
           <a:lstStyle>
-            <a:lvl1pPr>
+            <a:lvl1pPr algn="ctr">
+              <a:defRPr sz="2100" b="1">
+                <a:solidFill>
+                  <a:srgbClr val="0F766E"/>
+                </a:solidFill>
+                <a:latin typeface="Roboto Slab"/>
+                <a:ea typeface="Roboto Slab"/>
+                <a:cs typeface="Roboto Slab"/>
+                <a:sym typeface="Roboto Slab"/>
+              </a:defRPr>
+            </a:lvl1pPr>
+          </a:lstStyle>
+          <a:p>
+            <a:r>
+              <a:t>Step 3: Prediction</a:t>
+            </a:r>
+          </a:p>
+        </p:txBody>
+      </p:sp>
+      <p:sp>
+        <p:nvSpPr>
+          <p:cNvPr id="199" name="Google Shape;187;p18"/>
+          <p:cNvSpPr txBox="1"/>
+          <p:nvPr/>
+        </p:nvSpPr>
+        <p:spPr>
+          <a:xfrm>
+            <a:off x="9159775" y="3730971"/>
+            <a:ext cx="2165301" cy="960121"/>
+          </a:xfrm>
+          <a:prstGeom prst="rect">
+            <a:avLst/>
+          </a:prstGeom>
+          <a:ln w="12700">
+            <a:miter lim="400000"/>
+          </a:ln>
+          <a:extLst>
+            <a:ext uri="{C572A759-6A51-4108-AA02-DFA0A04FC94B}">
+              <ma14:wrappingTextBoxFlag xmlns="" xmlns:m="http://schemas.openxmlformats.org/officeDocument/2006/math" xmlns:a14="http://schemas.microsoft.com/office/drawing/2010/main" xmlns:ma14="http://schemas.microsoft.com/office/mac/drawingml/2011/main" val="1"/>
+            </a:ext>
+          </a:extLst>
+        </p:spPr>
+        <p:txBody>
+          <a:bodyPr lIns="0" tIns="0" rIns="0" bIns="0">
+            <a:spAutoFit/>
+          </a:bodyPr>
+          <a:lstStyle>
+            <a:lvl1pPr algn="ctr">
+              <a:lnSpc>
+                <a:spcPct val="160000"/>
+              </a:lnSpc>
               <a:defRPr sz="1500">
                 <a:solidFill>
                   <a:srgbClr val="334155"/>
@@ -10011,282 +9423,29 @@
           </a:lstStyle>
           <a:p>
             <a:r>
-              <a:t>•</a:t>
-            </a:r>
-          </a:p>
-        </p:txBody>
-      </p:sp>
-      <p:sp>
-        <p:nvSpPr>
-          <p:cNvPr id="178" name="Google Shape;163;p17"/>
-          <p:cNvSpPr txBox="1"/>
-          <p:nvPr/>
-        </p:nvSpPr>
-        <p:spPr>
-          <a:xfrm>
-            <a:off x="838200" y="3700462"/>
-            <a:ext cx="4972050" cy="594361"/>
-          </a:xfrm>
-          <a:prstGeom prst="rect">
-            <a:avLst/>
-          </a:prstGeom>
-          <a:ln w="12700">
-            <a:miter lim="400000"/>
-          </a:ln>
-          <a:extLst>
-            <a:ext uri="{C572A759-6A51-4108-AA02-DFA0A04FC94B}">
-              <ma14:wrappingTextBoxFlag xmlns:ma14="http://schemas.microsoft.com/office/mac/drawingml/2011/main" xmlns:a14="http://schemas.microsoft.com/office/drawing/2010/main" xmlns:m="http://schemas.openxmlformats.org/officeDocument/2006/math" xmlns="" val="1"/>
-            </a:ext>
-          </a:extLst>
-        </p:spPr>
-        <p:txBody>
-          <a:bodyPr lIns="0" tIns="0" rIns="0" bIns="0">
-            <a:spAutoFit/>
-          </a:bodyPr>
-          <a:lstStyle/>
-          <a:p>
-            <a:pPr>
-              <a:lnSpc>
-                <a:spcPct val="160000"/>
-              </a:lnSpc>
-              <a:defRPr sz="1500" b="1">
-                <a:solidFill>
-                  <a:srgbClr val="334155"/>
-                </a:solidFill>
-                <a:latin typeface="Open Sans"/>
-                <a:ea typeface="Open Sans"/>
-                <a:cs typeface="Open Sans"/>
-                <a:sym typeface="Open Sans"/>
-              </a:defRPr>
-            </a:pPr>
-            <a:r>
-              <a:t>No Overfitting:</a:t>
-            </a:r>
-            <a:r>
-              <a:rPr b="0"/>
-              <a:t> The "ensemble" method of averaging thousands of decision trees reduces the risk of overfitting.</a:t>
-            </a:r>
-          </a:p>
-        </p:txBody>
-      </p:sp>
-      <p:sp>
-        <p:nvSpPr>
-          <p:cNvPr id="179" name="Google Shape;164;p17"/>
-          <p:cNvSpPr txBox="1"/>
-          <p:nvPr/>
-        </p:nvSpPr>
-        <p:spPr>
-          <a:xfrm>
-            <a:off x="685800" y="4729162"/>
-            <a:ext cx="76200" cy="228601"/>
-          </a:xfrm>
-          <a:prstGeom prst="rect">
-            <a:avLst/>
-          </a:prstGeom>
-          <a:ln w="12700">
-            <a:miter lim="400000"/>
-          </a:ln>
-          <a:extLst>
-            <a:ext uri="{C572A759-6A51-4108-AA02-DFA0A04FC94B}">
-              <ma14:wrappingTextBoxFlag xmlns:ma14="http://schemas.microsoft.com/office/mac/drawingml/2011/main" xmlns:a14="http://schemas.microsoft.com/office/drawing/2010/main" xmlns:m="http://schemas.openxmlformats.org/officeDocument/2006/math" xmlns="" val="1"/>
-            </a:ext>
-          </a:extLst>
-        </p:spPr>
-        <p:txBody>
-          <a:bodyPr lIns="0" tIns="0" rIns="0" bIns="0">
-            <a:spAutoFit/>
-          </a:bodyPr>
-          <a:lstStyle>
-            <a:lvl1pPr>
-              <a:defRPr sz="1500">
-                <a:solidFill>
-                  <a:srgbClr val="334155"/>
-                </a:solidFill>
-                <a:latin typeface="Open Sans"/>
-                <a:ea typeface="Open Sans"/>
-                <a:cs typeface="Open Sans"/>
-                <a:sym typeface="Open Sans"/>
-              </a:defRPr>
-            </a:lvl1pPr>
-          </a:lstStyle>
-          <a:p>
-            <a:r>
-              <a:t>•</a:t>
-            </a:r>
-          </a:p>
-        </p:txBody>
-      </p:sp>
-      <p:sp>
-        <p:nvSpPr>
-          <p:cNvPr id="180" name="Google Shape;165;p17"/>
-          <p:cNvSpPr txBox="1"/>
-          <p:nvPr/>
-        </p:nvSpPr>
-        <p:spPr>
-          <a:xfrm>
-            <a:off x="838200" y="4729162"/>
-            <a:ext cx="4972050" cy="594361"/>
-          </a:xfrm>
-          <a:prstGeom prst="rect">
-            <a:avLst/>
-          </a:prstGeom>
-          <a:ln w="12700">
-            <a:miter lim="400000"/>
-          </a:ln>
-          <a:extLst>
-            <a:ext uri="{C572A759-6A51-4108-AA02-DFA0A04FC94B}">
-              <ma14:wrappingTextBoxFlag xmlns:ma14="http://schemas.microsoft.com/office/mac/drawingml/2011/main" xmlns:a14="http://schemas.microsoft.com/office/drawing/2010/main" xmlns:m="http://schemas.openxmlformats.org/officeDocument/2006/math" xmlns="" val="1"/>
-            </a:ext>
-          </a:extLst>
-        </p:spPr>
-        <p:txBody>
-          <a:bodyPr lIns="0" tIns="0" rIns="0" bIns="0">
-            <a:spAutoFit/>
-          </a:bodyPr>
-          <a:lstStyle/>
-          <a:p>
-            <a:pPr>
-              <a:lnSpc>
-                <a:spcPct val="160000"/>
-              </a:lnSpc>
-              <a:defRPr sz="1500" b="1">
-                <a:solidFill>
-                  <a:srgbClr val="334155"/>
-                </a:solidFill>
-                <a:latin typeface="Open Sans"/>
-                <a:ea typeface="Open Sans"/>
-                <a:cs typeface="Open Sans"/>
-                <a:sym typeface="Open Sans"/>
-              </a:defRPr>
-            </a:pPr>
-            <a:r>
-              <a:t>Feature Importance:</a:t>
-            </a:r>
-            <a:r>
-              <a:rPr b="0"/>
-              <a:t> It naturally ranks predictors (SNPs) by how much they improve the model's accuracy.</a:t>
-            </a:r>
-          </a:p>
-        </p:txBody>
-      </p:sp>
-      <p:sp>
-        <p:nvSpPr>
-          <p:cNvPr id="181" name="Google Shape;166;p17"/>
-          <p:cNvSpPr txBox="1"/>
-          <p:nvPr/>
-        </p:nvSpPr>
-        <p:spPr>
-          <a:xfrm>
-            <a:off x="685800" y="5453062"/>
-            <a:ext cx="76200" cy="228601"/>
-          </a:xfrm>
-          <a:prstGeom prst="rect">
-            <a:avLst/>
-          </a:prstGeom>
-          <a:ln w="12700">
-            <a:miter lim="400000"/>
-          </a:ln>
-          <a:extLst>
-            <a:ext uri="{C572A759-6A51-4108-AA02-DFA0A04FC94B}">
-              <ma14:wrappingTextBoxFlag xmlns:ma14="http://schemas.microsoft.com/office/mac/drawingml/2011/main" xmlns:a14="http://schemas.microsoft.com/office/drawing/2010/main" xmlns:m="http://schemas.openxmlformats.org/officeDocument/2006/math" xmlns="" val="1"/>
-            </a:ext>
-          </a:extLst>
-        </p:spPr>
-        <p:txBody>
-          <a:bodyPr lIns="0" tIns="0" rIns="0" bIns="0">
-            <a:spAutoFit/>
-          </a:bodyPr>
-          <a:lstStyle>
-            <a:lvl1pPr>
-              <a:defRPr sz="1500">
-                <a:solidFill>
-                  <a:srgbClr val="334155"/>
-                </a:solidFill>
-                <a:latin typeface="Open Sans"/>
-                <a:ea typeface="Open Sans"/>
-                <a:cs typeface="Open Sans"/>
-                <a:sym typeface="Open Sans"/>
-              </a:defRPr>
-            </a:lvl1pPr>
-          </a:lstStyle>
-          <a:p>
-            <a:r>
-              <a:t>•</a:t>
-            </a:r>
-          </a:p>
-        </p:txBody>
-      </p:sp>
-      <p:sp>
-        <p:nvSpPr>
-          <p:cNvPr id="182" name="Google Shape;167;p17"/>
-          <p:cNvSpPr txBox="1"/>
-          <p:nvPr/>
-        </p:nvSpPr>
-        <p:spPr>
-          <a:xfrm>
-            <a:off x="838200" y="5453062"/>
-            <a:ext cx="4972050" cy="594361"/>
-          </a:xfrm>
-          <a:prstGeom prst="rect">
-            <a:avLst/>
-          </a:prstGeom>
-          <a:ln w="12700">
-            <a:miter lim="400000"/>
-          </a:ln>
-          <a:extLst>
-            <a:ext uri="{C572A759-6A51-4108-AA02-DFA0A04FC94B}">
-              <ma14:wrappingTextBoxFlag xmlns:ma14="http://schemas.microsoft.com/office/mac/drawingml/2011/main" xmlns:a14="http://schemas.microsoft.com/office/drawing/2010/main" xmlns:m="http://schemas.openxmlformats.org/officeDocument/2006/math" xmlns="" val="1"/>
-            </a:ext>
-          </a:extLst>
-        </p:spPr>
-        <p:txBody>
-          <a:bodyPr lIns="0" tIns="0" rIns="0" bIns="0">
-            <a:spAutoFit/>
-          </a:bodyPr>
-          <a:lstStyle/>
-          <a:p>
-            <a:pPr>
-              <a:lnSpc>
-                <a:spcPct val="160000"/>
-              </a:lnSpc>
-              <a:defRPr sz="1500" b="1">
-                <a:solidFill>
-                  <a:srgbClr val="334155"/>
-                </a:solidFill>
-                <a:latin typeface="Open Sans"/>
-                <a:ea typeface="Open Sans"/>
-                <a:cs typeface="Open Sans"/>
-                <a:sym typeface="Open Sans"/>
-              </a:defRPr>
-            </a:pPr>
-            <a:r>
-              <a:t>Interactions:</a:t>
-            </a:r>
-            <a:r>
-              <a:rPr b="0"/>
-              <a:t> Captures non-linear gene-gene and gene-environment interactions.</a:t>
+              <a:t>Build final models using Top N SNPs (10, 40, 160, 320) + 4 Clinical Traits.</a:t>
             </a:r>
           </a:p>
         </p:txBody>
       </p:sp>
       <p:pic>
         <p:nvPicPr>
-          <p:cNvPr id="183" name="Google Shape;168;p17" descr="Google Shape;168;p17"/>
+          <p:cNvPr id="200" name="Google Shape;188;p18" descr="Google Shape;188;p18"/>
           <p:cNvPicPr>
             <a:picLocks noChangeAspect="1"/>
           </p:cNvPicPr>
           <p:nvPr/>
         </p:nvPicPr>
         <p:blipFill>
-          <a:blip r:embed="rId3"/>
+          <a:blip r:embed="rId8"/>
           <a:stretch>
             <a:fillRect/>
           </a:stretch>
         </p:blipFill>
         <p:spPr>
           <a:xfrm>
-            <a:off x="6381750" y="2062161"/>
-            <a:ext cx="5238750" cy="3810001"/>
+            <a:off x="1720750" y="2187922"/>
+            <a:ext cx="457201" cy="457201"/>
           </a:xfrm>
           <a:prstGeom prst="rect">
             <a:avLst/>
@@ -10296,9 +9455,36 @@
           </a:ln>
         </p:spPr>
       </p:pic>
-      <p:sp>
-        <p:nvSpPr>
-          <p:cNvPr id="184" name="Google Shape;169;p17"/>
+      <p:pic>
+        <p:nvPicPr>
+          <p:cNvPr id="201" name="Google Shape;189;p18" descr="Google Shape;189;p18"/>
+          <p:cNvPicPr>
+            <a:picLocks noChangeAspect="1"/>
+          </p:cNvPicPr>
+          <p:nvPr/>
+        </p:nvPicPr>
+        <p:blipFill>
+          <a:blip r:embed="rId9"/>
+          <a:stretch>
+            <a:fillRect/>
+          </a:stretch>
+        </p:blipFill>
+        <p:spPr>
+          <a:xfrm>
+            <a:off x="5867251" y="2187922"/>
+            <a:ext cx="457201" cy="457201"/>
+          </a:xfrm>
+          <a:prstGeom prst="rect">
+            <a:avLst/>
+          </a:prstGeom>
+          <a:ln w="12700">
+            <a:miter lim="400000"/>
+          </a:ln>
+        </p:spPr>
+      </p:pic>
+      <p:sp>
+        <p:nvSpPr>
+          <p:cNvPr id="202" name="Google Shape;190;p18"/>
           <p:cNvSpPr txBox="1"/>
           <p:nvPr/>
         </p:nvSpPr>
@@ -10315,7 +9501,7 @@
           </a:ln>
           <a:extLst>
             <a:ext uri="{C572A759-6A51-4108-AA02-DFA0A04FC94B}">
-              <ma14:wrappingTextBoxFlag xmlns:ma14="http://schemas.microsoft.com/office/mac/drawingml/2011/main" xmlns:a14="http://schemas.microsoft.com/office/drawing/2010/main" xmlns:m="http://schemas.openxmlformats.org/officeDocument/2006/math" xmlns="" val="1"/>
+              <ma14:wrappingTextBoxFlag xmlns="" xmlns:m="http://schemas.openxmlformats.org/officeDocument/2006/math" xmlns:a14="http://schemas.microsoft.com/office/drawing/2010/main" xmlns:ma14="http://schemas.microsoft.com/office/mac/drawingml/2011/main" val="1"/>
             </a:ext>
           </a:extLst>
         </p:spPr>
@@ -10338,14 +9524,14 @@
           </a:lstStyle>
           <a:p>
             <a:r>
-              <a:t>Solution: Random Forests Classifiers</a:t>
-            </a:r>
-          </a:p>
-        </p:txBody>
-      </p:sp>
-      <p:sp>
-        <p:nvSpPr>
-          <p:cNvPr id="185" name="Google Shape;170;p17"/>
+              <a:t>Methodology: Feature Selection</a:t>
+            </a:r>
+          </a:p>
+        </p:txBody>
+      </p:sp>
+      <p:sp>
+        <p:nvSpPr>
+          <p:cNvPr id="203" name="Google Shape;191;p18"/>
           <p:cNvSpPr/>
           <p:nvPr/>
         </p:nvSpPr>
@@ -10408,7 +9594,7 @@
       </p:grpSpPr>
       <p:pic>
         <p:nvPicPr>
-          <p:cNvPr id="187" name="Google Shape;175;p18" descr="Google Shape;175;p18"/>
+          <p:cNvPr id="205" name="Google Shape;196;p19" descr="Google Shape;196;p19"/>
           <p:cNvPicPr>
             <a:picLocks noChangeAspect="1"/>
           </p:cNvPicPr>
@@ -10433,97 +9619,16 @@
           </a:ln>
         </p:spPr>
       </p:pic>
-      <p:pic>
-        <p:nvPicPr>
-          <p:cNvPr id="188" name="Google Shape;176;p18" descr="Google Shape;176;p18"/>
-          <p:cNvPicPr>
-            <a:picLocks noChangeAspect="1"/>
-          </p:cNvPicPr>
-          <p:nvPr/>
-        </p:nvPicPr>
-        <p:blipFill>
-          <a:blip r:embed="rId3"/>
-          <a:stretch>
-            <a:fillRect/>
-          </a:stretch>
-        </p:blipFill>
-        <p:spPr>
-          <a:xfrm>
-            <a:off x="571500" y="1873597"/>
-            <a:ext cx="2755851" cy="3514726"/>
-          </a:xfrm>
-          <a:prstGeom prst="rect">
-            <a:avLst/>
-          </a:prstGeom>
-          <a:ln w="12700">
-            <a:miter lim="400000"/>
-          </a:ln>
-        </p:spPr>
-      </p:pic>
-      <p:pic>
-        <p:nvPicPr>
-          <p:cNvPr id="189" name="Google Shape;177;p18" descr="Google Shape;177;p18"/>
-          <p:cNvPicPr>
-            <a:picLocks noChangeAspect="1"/>
-          </p:cNvPicPr>
-          <p:nvPr/>
-        </p:nvPicPr>
-        <p:blipFill>
-          <a:blip r:embed="rId4"/>
-          <a:stretch>
-            <a:fillRect/>
-          </a:stretch>
-        </p:blipFill>
-        <p:spPr>
-          <a:xfrm>
-            <a:off x="4718000" y="1873597"/>
-            <a:ext cx="2755851" cy="3514726"/>
-          </a:xfrm>
-          <a:prstGeom prst="rect">
-            <a:avLst/>
-          </a:prstGeom>
-          <a:ln w="12700">
-            <a:miter lim="400000"/>
-          </a:ln>
-        </p:spPr>
-      </p:pic>
-      <p:pic>
-        <p:nvPicPr>
-          <p:cNvPr id="190" name="Google Shape;178;p18" descr="Google Shape;178;p18"/>
-          <p:cNvPicPr>
-            <a:picLocks noChangeAspect="1"/>
-          </p:cNvPicPr>
-          <p:nvPr/>
-        </p:nvPicPr>
-        <p:blipFill>
-          <a:blip r:embed="rId5"/>
-          <a:stretch>
-            <a:fillRect/>
-          </a:stretch>
-        </p:blipFill>
-        <p:spPr>
-          <a:xfrm>
-            <a:off x="8864500" y="1873597"/>
-            <a:ext cx="2755851" cy="3514726"/>
-          </a:xfrm>
-          <a:prstGeom prst="rect">
-            <a:avLst/>
-          </a:prstGeom>
-          <a:ln w="12700">
-            <a:miter lim="400000"/>
-          </a:ln>
-        </p:spPr>
-      </p:pic>
-      <p:sp>
-        <p:nvSpPr>
-          <p:cNvPr id="191" name="Google Shape;179;p18"/>
+      <p:sp>
+        <p:nvSpPr>
+          <p:cNvPr id="206" name="Google Shape;197;p19"/>
           <p:cNvSpPr txBox="1"/>
           <p:nvPr/>
         </p:nvSpPr>
         <p:spPr>
           <a:xfrm>
-            <a:off x="3514725" y="5674071"/>
-            <a:ext cx="5162550" cy="177801"/>
+            <a:off x="571500" y="762000"/>
+            <a:ext cx="5200650" cy="469900"/>
           </a:xfrm>
           <a:prstGeom prst="rect">
             <a:avLst/>
@@ -10533,459 +9638,7 @@
           </a:ln>
           <a:extLst>
             <a:ext uri="{C572A759-6A51-4108-AA02-DFA0A04FC94B}">
-              <ma14:wrappingTextBoxFlag xmlns:ma14="http://schemas.microsoft.com/office/mac/drawingml/2011/main" xmlns:a14="http://schemas.microsoft.com/office/drawing/2010/main" xmlns:m="http://schemas.openxmlformats.org/officeDocument/2006/math" xmlns="" val="1"/>
-            </a:ext>
-          </a:extLst>
-        </p:spPr>
-        <p:txBody>
-          <a:bodyPr lIns="0" tIns="0" rIns="0" bIns="0">
-            <a:spAutoFit/>
-          </a:bodyPr>
-          <a:lstStyle/>
-          <a:p>
-            <a:pPr>
-              <a:lnSpc>
-                <a:spcPct val="160000"/>
-              </a:lnSpc>
-              <a:defRPr sz="1200" b="1">
-                <a:solidFill>
-                  <a:srgbClr val="64748B"/>
-                </a:solidFill>
-                <a:latin typeface="Open Sans"/>
-                <a:ea typeface="Open Sans"/>
-                <a:cs typeface="Open Sans"/>
-                <a:sym typeface="Open Sans"/>
-              </a:defRPr>
-            </a:pPr>
-            <a:r>
-              <a:t>Clinical Traits Used:</a:t>
-            </a:r>
-            <a:r>
-              <a:rPr b="0"/>
-              <a:t> Age, Sex, FEV1% (Lung Function), Treatment Group</a:t>
-            </a:r>
-          </a:p>
-        </p:txBody>
-      </p:sp>
-      <p:sp>
-        <p:nvSpPr>
-          <p:cNvPr id="192" name="Google Shape;180;p18"/>
-          <p:cNvSpPr txBox="1"/>
-          <p:nvPr/>
-        </p:nvSpPr>
-        <p:spPr>
-          <a:xfrm>
-            <a:off x="812642" y="2883247"/>
-            <a:ext cx="2273565" cy="635001"/>
-          </a:xfrm>
-          <a:prstGeom prst="rect">
-            <a:avLst/>
-          </a:prstGeom>
-          <a:ln w="12700">
-            <a:miter lim="400000"/>
-          </a:ln>
-          <a:extLst>
-            <a:ext uri="{C572A759-6A51-4108-AA02-DFA0A04FC94B}">
-              <ma14:wrappingTextBoxFlag xmlns:ma14="http://schemas.microsoft.com/office/mac/drawingml/2011/main" xmlns:a14="http://schemas.microsoft.com/office/drawing/2010/main" xmlns:m="http://schemas.openxmlformats.org/officeDocument/2006/math" xmlns="" val="1"/>
-            </a:ext>
-          </a:extLst>
-        </p:spPr>
-        <p:txBody>
-          <a:bodyPr lIns="0" tIns="0" rIns="0" bIns="0">
-            <a:spAutoFit/>
-          </a:bodyPr>
-          <a:lstStyle>
-            <a:lvl1pPr algn="ctr">
-              <a:defRPr sz="2100" b="1">
-                <a:solidFill>
-                  <a:srgbClr val="0F766E"/>
-                </a:solidFill>
-                <a:latin typeface="Roboto Slab"/>
-                <a:ea typeface="Roboto Slab"/>
-                <a:cs typeface="Roboto Slab"/>
-                <a:sym typeface="Roboto Slab"/>
-              </a:defRPr>
-            </a:lvl1pPr>
-          </a:lstStyle>
-          <a:p>
-            <a:r>
-              <a:t>Step 1: Initial Screen</a:t>
-            </a:r>
-          </a:p>
-        </p:txBody>
-      </p:sp>
-      <p:sp>
-        <p:nvSpPr>
-          <p:cNvPr id="193" name="Google Shape;181;p18"/>
-          <p:cNvSpPr txBox="1"/>
-          <p:nvPr/>
-        </p:nvSpPr>
-        <p:spPr>
-          <a:xfrm>
-            <a:off x="866775" y="3730971"/>
-            <a:ext cx="2165301" cy="1325881"/>
-          </a:xfrm>
-          <a:prstGeom prst="rect">
-            <a:avLst/>
-          </a:prstGeom>
-          <a:ln w="12700">
-            <a:miter lim="400000"/>
-          </a:ln>
-          <a:extLst>
-            <a:ext uri="{C572A759-6A51-4108-AA02-DFA0A04FC94B}">
-              <ma14:wrappingTextBoxFlag xmlns:ma14="http://schemas.microsoft.com/office/mac/drawingml/2011/main" xmlns:a14="http://schemas.microsoft.com/office/drawing/2010/main" xmlns:m="http://schemas.openxmlformats.org/officeDocument/2006/math" xmlns="" val="1"/>
-            </a:ext>
-          </a:extLst>
-        </p:spPr>
-        <p:txBody>
-          <a:bodyPr lIns="0" tIns="0" rIns="0" bIns="0">
-            <a:spAutoFit/>
-          </a:bodyPr>
-          <a:lstStyle>
-            <a:lvl1pPr algn="ctr">
-              <a:lnSpc>
-                <a:spcPct val="160000"/>
-              </a:lnSpc>
-              <a:defRPr sz="1500">
-                <a:solidFill>
-                  <a:srgbClr val="334155"/>
-                </a:solidFill>
-                <a:latin typeface="Open Sans"/>
-                <a:ea typeface="Open Sans"/>
-                <a:cs typeface="Open Sans"/>
-                <a:sym typeface="Open Sans"/>
-              </a:defRPr>
-            </a:lvl1pPr>
-          </a:lstStyle>
-          <a:p>
-            <a:r>
-              <a:t>Compute RF importance scores for all 550,000 SNPs in batches (chromosomal order).</a:t>
-            </a:r>
-          </a:p>
-        </p:txBody>
-      </p:sp>
-      <p:pic>
-        <p:nvPicPr>
-          <p:cNvPr id="194" name="Google Shape;182;p18" descr="Google Shape;182;p18"/>
-          <p:cNvPicPr>
-            <a:picLocks noChangeAspect="1"/>
-          </p:cNvPicPr>
-          <p:nvPr/>
-        </p:nvPicPr>
-        <p:blipFill>
-          <a:blip r:embed="rId6"/>
-          <a:stretch>
-            <a:fillRect/>
-          </a:stretch>
-        </p:blipFill>
-        <p:spPr>
-          <a:xfrm>
-            <a:off x="3898850" y="3488083"/>
-            <a:ext cx="247651" cy="285751"/>
-          </a:xfrm>
-          <a:prstGeom prst="rect">
-            <a:avLst/>
-          </a:prstGeom>
-          <a:ln w="12700">
-            <a:miter lim="400000"/>
-          </a:ln>
-        </p:spPr>
-      </p:pic>
-      <p:sp>
-        <p:nvSpPr>
-          <p:cNvPr id="195" name="Google Shape;183;p18"/>
-          <p:cNvSpPr txBox="1"/>
-          <p:nvPr/>
-        </p:nvSpPr>
-        <p:spPr>
-          <a:xfrm>
-            <a:off x="5050720" y="2883247"/>
-            <a:ext cx="2090261" cy="317501"/>
-          </a:xfrm>
-          <a:prstGeom prst="rect">
-            <a:avLst/>
-          </a:prstGeom>
-          <a:ln w="12700">
-            <a:miter lim="400000"/>
-          </a:ln>
-          <a:extLst>
-            <a:ext uri="{C572A759-6A51-4108-AA02-DFA0A04FC94B}">
-              <ma14:wrappingTextBoxFlag xmlns:ma14="http://schemas.microsoft.com/office/mac/drawingml/2011/main" xmlns:a14="http://schemas.microsoft.com/office/drawing/2010/main" xmlns:m="http://schemas.openxmlformats.org/officeDocument/2006/math" xmlns="" val="1"/>
-            </a:ext>
-          </a:extLst>
-        </p:spPr>
-        <p:txBody>
-          <a:bodyPr lIns="0" tIns="0" rIns="0" bIns="0">
-            <a:spAutoFit/>
-          </a:bodyPr>
-          <a:lstStyle>
-            <a:lvl1pPr algn="ctr">
-              <a:defRPr sz="2100" b="1">
-                <a:solidFill>
-                  <a:srgbClr val="0F766E"/>
-                </a:solidFill>
-                <a:latin typeface="Roboto Slab"/>
-                <a:ea typeface="Roboto Slab"/>
-                <a:cs typeface="Roboto Slab"/>
-                <a:sym typeface="Roboto Slab"/>
-              </a:defRPr>
-            </a:lvl1pPr>
-          </a:lstStyle>
-          <a:p>
-            <a:r>
-              <a:t>Step 2: Ranking</a:t>
-            </a:r>
-          </a:p>
-        </p:txBody>
-      </p:sp>
-      <p:sp>
-        <p:nvSpPr>
-          <p:cNvPr id="196" name="Google Shape;184;p18"/>
-          <p:cNvSpPr txBox="1"/>
-          <p:nvPr/>
-        </p:nvSpPr>
-        <p:spPr>
-          <a:xfrm>
-            <a:off x="5013275" y="3378546"/>
-            <a:ext cx="2165301" cy="1325881"/>
-          </a:xfrm>
-          <a:prstGeom prst="rect">
-            <a:avLst/>
-          </a:prstGeom>
-          <a:ln w="12700">
-            <a:miter lim="400000"/>
-          </a:ln>
-          <a:extLst>
-            <a:ext uri="{C572A759-6A51-4108-AA02-DFA0A04FC94B}">
-              <ma14:wrappingTextBoxFlag xmlns:ma14="http://schemas.microsoft.com/office/mac/drawingml/2011/main" xmlns:a14="http://schemas.microsoft.com/office/drawing/2010/main" xmlns:m="http://schemas.openxmlformats.org/officeDocument/2006/math" xmlns="" val="1"/>
-            </a:ext>
-          </a:extLst>
-        </p:spPr>
-        <p:txBody>
-          <a:bodyPr lIns="0" tIns="0" rIns="0" bIns="0">
-            <a:spAutoFit/>
-          </a:bodyPr>
-          <a:lstStyle>
-            <a:lvl1pPr algn="ctr">
-              <a:lnSpc>
-                <a:spcPct val="160000"/>
-              </a:lnSpc>
-              <a:defRPr sz="1500">
-                <a:solidFill>
-                  <a:srgbClr val="334155"/>
-                </a:solidFill>
-                <a:latin typeface="Open Sans"/>
-                <a:ea typeface="Open Sans"/>
-                <a:cs typeface="Open Sans"/>
-                <a:sym typeface="Open Sans"/>
-              </a:defRPr>
-            </a:lvl1pPr>
-          </a:lstStyle>
-          <a:p>
-            <a:r>
-              <a:t>Select the top 4,000 SNPs based on initial scores. Re-run RF to refine the ranking.</a:t>
-            </a:r>
-          </a:p>
-        </p:txBody>
-      </p:sp>
-      <p:pic>
-        <p:nvPicPr>
-          <p:cNvPr id="197" name="Google Shape;185;p18" descr="Google Shape;185;p18"/>
-          <p:cNvPicPr>
-            <a:picLocks noChangeAspect="1"/>
-          </p:cNvPicPr>
-          <p:nvPr/>
-        </p:nvPicPr>
-        <p:blipFill>
-          <a:blip r:embed="rId7"/>
-          <a:stretch>
-            <a:fillRect/>
-          </a:stretch>
-        </p:blipFill>
-        <p:spPr>
-          <a:xfrm>
-            <a:off x="8045350" y="3488083"/>
-            <a:ext cx="247651" cy="285751"/>
-          </a:xfrm>
-          <a:prstGeom prst="rect">
-            <a:avLst/>
-          </a:prstGeom>
-          <a:ln w="12700">
-            <a:miter lim="400000"/>
-          </a:ln>
-        </p:spPr>
-      </p:pic>
-      <p:sp>
-        <p:nvSpPr>
-          <p:cNvPr id="198" name="Google Shape;186;p18"/>
-          <p:cNvSpPr txBox="1"/>
-          <p:nvPr/>
-        </p:nvSpPr>
-        <p:spPr>
-          <a:xfrm>
-            <a:off x="9105642" y="2883247"/>
-            <a:ext cx="2273566" cy="317501"/>
-          </a:xfrm>
-          <a:prstGeom prst="rect">
-            <a:avLst/>
-          </a:prstGeom>
-          <a:ln w="12700">
-            <a:miter lim="400000"/>
-          </a:ln>
-          <a:extLst>
-            <a:ext uri="{C572A759-6A51-4108-AA02-DFA0A04FC94B}">
-              <ma14:wrappingTextBoxFlag xmlns:ma14="http://schemas.microsoft.com/office/mac/drawingml/2011/main" xmlns:a14="http://schemas.microsoft.com/office/drawing/2010/main" xmlns:m="http://schemas.openxmlformats.org/officeDocument/2006/math" xmlns="" val="1"/>
-            </a:ext>
-          </a:extLst>
-        </p:spPr>
-        <p:txBody>
-          <a:bodyPr lIns="0" tIns="0" rIns="0" bIns="0">
-            <a:spAutoFit/>
-          </a:bodyPr>
-          <a:lstStyle>
-            <a:lvl1pPr algn="ctr">
-              <a:defRPr sz="2100" b="1">
-                <a:solidFill>
-                  <a:srgbClr val="0F766E"/>
-                </a:solidFill>
-                <a:latin typeface="Roboto Slab"/>
-                <a:ea typeface="Roboto Slab"/>
-                <a:cs typeface="Roboto Slab"/>
-                <a:sym typeface="Roboto Slab"/>
-              </a:defRPr>
-            </a:lvl1pPr>
-          </a:lstStyle>
-          <a:p>
-            <a:r>
-              <a:t>Step 3: Prediction</a:t>
-            </a:r>
-          </a:p>
-        </p:txBody>
-      </p:sp>
-      <p:sp>
-        <p:nvSpPr>
-          <p:cNvPr id="199" name="Google Shape;187;p18"/>
-          <p:cNvSpPr txBox="1"/>
-          <p:nvPr/>
-        </p:nvSpPr>
-        <p:spPr>
-          <a:xfrm>
-            <a:off x="9159775" y="3730971"/>
-            <a:ext cx="2165301" cy="960121"/>
-          </a:xfrm>
-          <a:prstGeom prst="rect">
-            <a:avLst/>
-          </a:prstGeom>
-          <a:ln w="12700">
-            <a:miter lim="400000"/>
-          </a:ln>
-          <a:extLst>
-            <a:ext uri="{C572A759-6A51-4108-AA02-DFA0A04FC94B}">
-              <ma14:wrappingTextBoxFlag xmlns:ma14="http://schemas.microsoft.com/office/mac/drawingml/2011/main" xmlns:a14="http://schemas.microsoft.com/office/drawing/2010/main" xmlns:m="http://schemas.openxmlformats.org/officeDocument/2006/math" xmlns="" val="1"/>
-            </a:ext>
-          </a:extLst>
-        </p:spPr>
-        <p:txBody>
-          <a:bodyPr lIns="0" tIns="0" rIns="0" bIns="0">
-            <a:spAutoFit/>
-          </a:bodyPr>
-          <a:lstStyle>
-            <a:lvl1pPr algn="ctr">
-              <a:lnSpc>
-                <a:spcPct val="160000"/>
-              </a:lnSpc>
-              <a:defRPr sz="1500">
-                <a:solidFill>
-                  <a:srgbClr val="334155"/>
-                </a:solidFill>
-                <a:latin typeface="Open Sans"/>
-                <a:ea typeface="Open Sans"/>
-                <a:cs typeface="Open Sans"/>
-                <a:sym typeface="Open Sans"/>
-              </a:defRPr>
-            </a:lvl1pPr>
-          </a:lstStyle>
-          <a:p>
-            <a:r>
-              <a:t>Build final models using Top N SNPs (10, 40, 160, 320) + 4 Clinical Traits.</a:t>
-            </a:r>
-          </a:p>
-        </p:txBody>
-      </p:sp>
-      <p:pic>
-        <p:nvPicPr>
-          <p:cNvPr id="200" name="Google Shape;188;p18" descr="Google Shape;188;p18"/>
-          <p:cNvPicPr>
-            <a:picLocks noChangeAspect="1"/>
-          </p:cNvPicPr>
-          <p:nvPr/>
-        </p:nvPicPr>
-        <p:blipFill>
-          <a:blip r:embed="rId8"/>
-          <a:stretch>
-            <a:fillRect/>
-          </a:stretch>
-        </p:blipFill>
-        <p:spPr>
-          <a:xfrm>
-            <a:off x="1720750" y="2187922"/>
-            <a:ext cx="457201" cy="457201"/>
-          </a:xfrm>
-          <a:prstGeom prst="rect">
-            <a:avLst/>
-          </a:prstGeom>
-          <a:ln w="12700">
-            <a:miter lim="400000"/>
-          </a:ln>
-        </p:spPr>
-      </p:pic>
-      <p:pic>
-        <p:nvPicPr>
-          <p:cNvPr id="201" name="Google Shape;189;p18" descr="Google Shape;189;p18"/>
-          <p:cNvPicPr>
-            <a:picLocks noChangeAspect="1"/>
-          </p:cNvPicPr>
-          <p:nvPr/>
-        </p:nvPicPr>
-        <p:blipFill>
-          <a:blip r:embed="rId9"/>
-          <a:stretch>
-            <a:fillRect/>
-          </a:stretch>
-        </p:blipFill>
-        <p:spPr>
-          <a:xfrm>
-            <a:off x="5867251" y="2187922"/>
-            <a:ext cx="457201" cy="457201"/>
-          </a:xfrm>
-          <a:prstGeom prst="rect">
-            <a:avLst/>
-          </a:prstGeom>
-          <a:ln w="12700">
-            <a:miter lim="400000"/>
-          </a:ln>
-        </p:spPr>
-      </p:pic>
-      <p:sp>
-        <p:nvSpPr>
-          <p:cNvPr id="202" name="Google Shape;190;p18"/>
-          <p:cNvSpPr txBox="1"/>
-          <p:nvPr/>
-        </p:nvSpPr>
-        <p:spPr>
-          <a:xfrm>
-            <a:off x="571500" y="571500"/>
-            <a:ext cx="11601450" cy="469900"/>
-          </a:xfrm>
-          <a:prstGeom prst="rect">
-            <a:avLst/>
-          </a:prstGeom>
-          <a:ln w="12700">
-            <a:miter lim="400000"/>
-          </a:ln>
-          <a:extLst>
-            <a:ext uri="{C572A759-6A51-4108-AA02-DFA0A04FC94B}">
-              <ma14:wrappingTextBoxFlag xmlns:ma14="http://schemas.microsoft.com/office/mac/drawingml/2011/main" xmlns:a14="http://schemas.microsoft.com/office/drawing/2010/main" xmlns:m="http://schemas.openxmlformats.org/officeDocument/2006/math" xmlns="" val="1"/>
+              <ma14:wrappingTextBoxFlag xmlns="" xmlns:m="http://schemas.openxmlformats.org/officeDocument/2006/math" xmlns:a14="http://schemas.microsoft.com/office/drawing/2010/main" xmlns:ma14="http://schemas.microsoft.com/office/mac/drawingml/2011/main" val="1"/>
             </a:ext>
           </a:extLst>
         </p:spPr>
@@ -11008,21 +9661,21 @@
           </a:lstStyle>
           <a:p>
             <a:r>
-              <a:t>Methodology: Feature Selection</a:t>
-            </a:r>
-          </a:p>
-        </p:txBody>
-      </p:sp>
-      <p:sp>
-        <p:nvSpPr>
-          <p:cNvPr id="203" name="Google Shape;191;p18"/>
+              <a:t>Visualizing the Signal</a:t>
+            </a:r>
+          </a:p>
+        </p:txBody>
+      </p:sp>
+      <p:sp>
+        <p:nvSpPr>
+          <p:cNvPr id="207" name="Google Shape;198;p19"/>
           <p:cNvSpPr/>
           <p:nvPr/>
         </p:nvSpPr>
         <p:spPr>
           <a:xfrm>
-            <a:off x="571500" y="1238250"/>
-            <a:ext cx="11049000" cy="28575"/>
+            <a:off x="571500" y="1428750"/>
+            <a:ext cx="4953000" cy="28575"/>
           </a:xfrm>
           <a:prstGeom prst="rect">
             <a:avLst/>
@@ -11047,6 +9700,236 @@
               </a:defRPr>
             </a:pPr>
             <a:endParaRPr/>
+          </a:p>
+        </p:txBody>
+      </p:sp>
+      <p:pic>
+        <p:nvPicPr>
+          <p:cNvPr id="208" name="Google Shape;199;p19" descr="Google Shape;199;p19"/>
+          <p:cNvPicPr>
+            <a:picLocks noChangeAspect="1"/>
+          </p:cNvPicPr>
+          <p:nvPr/>
+        </p:nvPicPr>
+        <p:blipFill>
+          <a:blip r:embed="rId3"/>
+          <a:stretch>
+            <a:fillRect/>
+          </a:stretch>
+        </p:blipFill>
+        <p:spPr>
+          <a:xfrm>
+            <a:off x="6096000" y="0"/>
+            <a:ext cx="6096000" cy="6858000"/>
+          </a:xfrm>
+          <a:prstGeom prst="rect">
+            <a:avLst/>
+          </a:prstGeom>
+          <a:ln w="12700">
+            <a:miter lim="400000"/>
+          </a:ln>
+        </p:spPr>
+      </p:pic>
+      <p:sp>
+        <p:nvSpPr>
+          <p:cNvPr id="209" name="Google Shape;200;p19"/>
+          <p:cNvSpPr txBox="1"/>
+          <p:nvPr/>
+        </p:nvSpPr>
+        <p:spPr>
+          <a:xfrm>
+            <a:off x="571499" y="2305050"/>
+            <a:ext cx="4080511" cy="317500"/>
+          </a:xfrm>
+          <a:prstGeom prst="rect">
+            <a:avLst/>
+          </a:prstGeom>
+          <a:ln w="12700">
+            <a:miter lim="400000"/>
+          </a:ln>
+          <a:extLst>
+            <a:ext uri="{C572A759-6A51-4108-AA02-DFA0A04FC94B}">
+              <ma14:wrappingTextBoxFlag xmlns="" xmlns:m="http://schemas.openxmlformats.org/officeDocument/2006/math" xmlns:a14="http://schemas.microsoft.com/office/drawing/2010/main" xmlns:ma14="http://schemas.microsoft.com/office/mac/drawingml/2011/main" val="1"/>
+            </a:ext>
+          </a:extLst>
+        </p:spPr>
+        <p:txBody>
+          <a:bodyPr lIns="0" tIns="0" rIns="0" bIns="0">
+            <a:spAutoFit/>
+          </a:bodyPr>
+          <a:lstStyle>
+            <a:lvl1pPr>
+              <a:defRPr sz="2100" b="1">
+                <a:solidFill>
+                  <a:srgbClr val="0F766E"/>
+                </a:solidFill>
+                <a:latin typeface="Roboto Slab"/>
+                <a:ea typeface="Roboto Slab"/>
+                <a:cs typeface="Roboto Slab"/>
+                <a:sym typeface="Roboto Slab"/>
+              </a:defRPr>
+            </a:lvl1pPr>
+          </a:lstStyle>
+          <a:p>
+            <a:r>
+              <a:t>The RF Importance Landscape</a:t>
+            </a:r>
+          </a:p>
+        </p:txBody>
+      </p:sp>
+      <p:sp>
+        <p:nvSpPr>
+          <p:cNvPr id="210" name="Google Shape;201;p19"/>
+          <p:cNvSpPr txBox="1"/>
+          <p:nvPr/>
+        </p:nvSpPr>
+        <p:spPr>
+          <a:xfrm>
+            <a:off x="571500" y="2800350"/>
+            <a:ext cx="4953000" cy="960121"/>
+          </a:xfrm>
+          <a:prstGeom prst="rect">
+            <a:avLst/>
+          </a:prstGeom>
+          <a:ln w="12700">
+            <a:miter lim="400000"/>
+          </a:ln>
+          <a:extLst>
+            <a:ext uri="{C572A759-6A51-4108-AA02-DFA0A04FC94B}">
+              <ma14:wrappingTextBoxFlag xmlns="" xmlns:m="http://schemas.openxmlformats.org/officeDocument/2006/math" xmlns:a14="http://schemas.microsoft.com/office/drawing/2010/main" xmlns:ma14="http://schemas.microsoft.com/office/mac/drawingml/2011/main" val="1"/>
+            </a:ext>
+          </a:extLst>
+        </p:spPr>
+        <p:txBody>
+          <a:bodyPr lIns="0" tIns="0" rIns="0" bIns="0">
+            <a:spAutoFit/>
+          </a:bodyPr>
+          <a:lstStyle/>
+          <a:p>
+            <a:pPr>
+              <a:lnSpc>
+                <a:spcPct val="160000"/>
+              </a:lnSpc>
+              <a:defRPr sz="1500">
+                <a:solidFill>
+                  <a:srgbClr val="334155"/>
+                </a:solidFill>
+                <a:latin typeface="Open Sans"/>
+                <a:ea typeface="Open Sans"/>
+                <a:cs typeface="Open Sans"/>
+                <a:sym typeface="Open Sans"/>
+              </a:defRPr>
+            </a:pPr>
+            <a:r>
+              <a:t>Unlike a traditional GWAS Manhattan plot which shows -log(p-values), this plot visualizes </a:t>
+            </a:r>
+            <a:r>
+              <a:rPr b="1"/>
+              <a:t>Random Forest Importance Scores</a:t>
+            </a:r>
+            <a:r>
+              <a:t> across the genome.</a:t>
+            </a:r>
+          </a:p>
+        </p:txBody>
+      </p:sp>
+      <p:sp>
+        <p:nvSpPr>
+          <p:cNvPr id="211" name="Google Shape;202;p19"/>
+          <p:cNvSpPr txBox="1"/>
+          <p:nvPr/>
+        </p:nvSpPr>
+        <p:spPr>
+          <a:xfrm>
+            <a:off x="571500" y="3857625"/>
+            <a:ext cx="4953000" cy="960121"/>
+          </a:xfrm>
+          <a:prstGeom prst="rect">
+            <a:avLst/>
+          </a:prstGeom>
+          <a:ln w="12700">
+            <a:miter lim="400000"/>
+          </a:ln>
+          <a:extLst>
+            <a:ext uri="{C572A759-6A51-4108-AA02-DFA0A04FC94B}">
+              <ma14:wrappingTextBoxFlag xmlns="" xmlns:m="http://schemas.openxmlformats.org/officeDocument/2006/math" xmlns:a14="http://schemas.microsoft.com/office/drawing/2010/main" xmlns:ma14="http://schemas.microsoft.com/office/mac/drawingml/2011/main" val="1"/>
+            </a:ext>
+          </a:extLst>
+        </p:spPr>
+        <p:txBody>
+          <a:bodyPr lIns="0" tIns="0" rIns="0" bIns="0">
+            <a:spAutoFit/>
+          </a:bodyPr>
+          <a:lstStyle>
+            <a:lvl1pPr>
+              <a:lnSpc>
+                <a:spcPct val="160000"/>
+              </a:lnSpc>
+              <a:defRPr sz="1500">
+                <a:solidFill>
+                  <a:srgbClr val="334155"/>
+                </a:solidFill>
+                <a:latin typeface="Open Sans"/>
+                <a:ea typeface="Open Sans"/>
+                <a:cs typeface="Open Sans"/>
+                <a:sym typeface="Open Sans"/>
+              </a:defRPr>
+            </a:lvl1pPr>
+          </a:lstStyle>
+          <a:p>
+            <a:r>
+              <a:t>The "peaks" represent SNPs that contribute most significantly to classifying a patient as an "Exacerbator" vs. "Non-Exacerbator".</a:t>
+            </a:r>
+          </a:p>
+        </p:txBody>
+      </p:sp>
+      <p:sp>
+        <p:nvSpPr>
+          <p:cNvPr id="212" name="Google Shape;203;p19"/>
+          <p:cNvSpPr txBox="1"/>
+          <p:nvPr/>
+        </p:nvSpPr>
+        <p:spPr>
+          <a:xfrm>
+            <a:off x="571500" y="4914900"/>
+            <a:ext cx="4953000" cy="594361"/>
+          </a:xfrm>
+          <a:prstGeom prst="rect">
+            <a:avLst/>
+          </a:prstGeom>
+          <a:ln w="12700">
+            <a:miter lim="400000"/>
+          </a:ln>
+          <a:extLst>
+            <a:ext uri="{C572A759-6A51-4108-AA02-DFA0A04FC94B}">
+              <ma14:wrappingTextBoxFlag xmlns="" xmlns:m="http://schemas.openxmlformats.org/officeDocument/2006/math" xmlns:a14="http://schemas.microsoft.com/office/drawing/2010/main" xmlns:ma14="http://schemas.microsoft.com/office/mac/drawingml/2011/main" val="1"/>
+            </a:ext>
+          </a:extLst>
+        </p:spPr>
+        <p:txBody>
+          <a:bodyPr lIns="0" tIns="0" rIns="0" bIns="0">
+            <a:spAutoFit/>
+          </a:bodyPr>
+          <a:lstStyle>
+            <a:lvl1pPr>
+              <a:lnSpc>
+                <a:spcPct val="160000"/>
+              </a:lnSpc>
+              <a:defRPr sz="1500">
+                <a:solidFill>
+                  <a:srgbClr val="334155"/>
+                </a:solidFill>
+                <a:latin typeface="Open Sans"/>
+                <a:ea typeface="Open Sans"/>
+                <a:cs typeface="Open Sans"/>
+                <a:sym typeface="Open Sans"/>
+              </a:defRPr>
+            </a:lvl1pPr>
+          </a:lstStyle>
+          <a:p>
+            <a:r>
+              <a:t>We identified a clear signal distinguishing the top predictive SNPs from the genomic background noise.</a:t>
+            </a:r>
           </a:p>
         </p:txBody>
       </p:sp>
@@ -11078,7 +9961,7 @@
       </p:grpSpPr>
       <p:pic>
         <p:nvPicPr>
-          <p:cNvPr id="205" name="Google Shape;196;p19" descr="Google Shape;196;p19"/>
+          <p:cNvPr id="214" name="Google Shape;208;p20" descr="Google Shape;208;p20"/>
           <p:cNvPicPr>
             <a:picLocks noChangeAspect="1"/>
           </p:cNvPicPr>
@@ -11103,16 +9986,70 @@
           </a:ln>
         </p:spPr>
       </p:pic>
-      <p:sp>
-        <p:nvSpPr>
-          <p:cNvPr id="206" name="Google Shape;197;p19"/>
+      <p:pic>
+        <p:nvPicPr>
+          <p:cNvPr id="215" name="Google Shape;209;p20" descr="Google Shape;209;p20"/>
+          <p:cNvPicPr>
+            <a:picLocks noChangeAspect="1"/>
+          </p:cNvPicPr>
+          <p:nvPr/>
+        </p:nvPicPr>
+        <p:blipFill>
+          <a:blip r:embed="rId3"/>
+          <a:stretch>
+            <a:fillRect/>
+          </a:stretch>
+        </p:blipFill>
+        <p:spPr>
+          <a:xfrm>
+            <a:off x="571500" y="5154810"/>
+            <a:ext cx="11049000" cy="990601"/>
+          </a:xfrm>
+          <a:prstGeom prst="rect">
+            <a:avLst/>
+          </a:prstGeom>
+          <a:ln w="12700">
+            <a:miter lim="400000"/>
+          </a:ln>
+        </p:spPr>
+      </p:pic>
+      <p:pic>
+        <p:nvPicPr>
+          <p:cNvPr id="216" name="Google Shape;210;p20" descr="Google Shape;210;p20"/>
+          <p:cNvPicPr>
+            <a:picLocks noChangeAspect="1"/>
+          </p:cNvPicPr>
+          <p:nvPr/>
+        </p:nvPicPr>
+        <p:blipFill>
+          <a:blip r:embed="rId4"/>
+          <a:stretch>
+            <a:fillRect/>
+          </a:stretch>
+        </p:blipFill>
+        <p:spPr>
+          <a:xfrm>
+            <a:off x="571500" y="1647825"/>
+            <a:ext cx="11049000" cy="4638675"/>
+          </a:xfrm>
+          <a:prstGeom prst="rect">
+            <a:avLst/>
+          </a:prstGeom>
+          <a:ln w="12700">
+            <a:miter lim="400000"/>
+          </a:ln>
+        </p:spPr>
+      </p:pic>
+      <p:sp>
+        <p:nvSpPr>
+          <p:cNvPr id="217" name="Google Shape;211;p20"/>
           <p:cNvSpPr txBox="1"/>
           <p:nvPr/>
         </p:nvSpPr>
         <p:spPr>
           <a:xfrm>
-            <a:off x="571500" y="762000"/>
-            <a:ext cx="5200650" cy="469900"/>
+            <a:off x="2757486" y="1884015"/>
+            <a:ext cx="6677026" cy="279401"/>
           </a:xfrm>
           <a:prstGeom prst="rect">
             <a:avLst/>
@@ -11122,7 +10059,110 @@
           </a:ln>
           <a:extLst>
             <a:ext uri="{C572A759-6A51-4108-AA02-DFA0A04FC94B}">
-              <ma14:wrappingTextBoxFlag xmlns:ma14="http://schemas.microsoft.com/office/mac/drawingml/2011/main" xmlns:a14="http://schemas.microsoft.com/office/drawing/2010/main" xmlns:m="http://schemas.openxmlformats.org/officeDocument/2006/math" xmlns="" val="1"/>
+              <ma14:wrappingTextBoxFlag xmlns="" xmlns:m="http://schemas.openxmlformats.org/officeDocument/2006/math" xmlns:a14="http://schemas.microsoft.com/office/drawing/2010/main" xmlns:ma14="http://schemas.microsoft.com/office/mac/drawingml/2011/main" val="1"/>
+            </a:ext>
+          </a:extLst>
+        </p:spPr>
+        <p:txBody>
+          <a:bodyPr lIns="0" tIns="0" rIns="0" bIns="0">
+            <a:spAutoFit/>
+          </a:bodyPr>
+          <a:lstStyle>
+            <a:lvl1pPr>
+              <a:lnSpc>
+                <a:spcPct val="159944"/>
+              </a:lnSpc>
+              <a:defRPr sz="1800">
+                <a:solidFill>
+                  <a:srgbClr val="64748B"/>
+                </a:solidFill>
+                <a:latin typeface="Open Sans"/>
+                <a:ea typeface="Open Sans"/>
+                <a:cs typeface="Open Sans"/>
+                <a:sym typeface="Open Sans"/>
+              </a:defRPr>
+            </a:lvl1pPr>
+          </a:lstStyle>
+          <a:p>
+            <a:r>
+              <a:t>Area Under the Curve (AUC) in Independent Replication Cohort</a:t>
+            </a:r>
+          </a:p>
+        </p:txBody>
+      </p:sp>
+      <p:sp>
+        <p:nvSpPr>
+          <p:cNvPr id="218" name="Google Shape;212;p20"/>
+          <p:cNvSpPr txBox="1"/>
+          <p:nvPr/>
+        </p:nvSpPr>
+        <p:spPr>
+          <a:xfrm>
+            <a:off x="809625" y="5345310"/>
+            <a:ext cx="10620375" cy="594361"/>
+          </a:xfrm>
+          <a:prstGeom prst="rect">
+            <a:avLst/>
+          </a:prstGeom>
+          <a:ln w="12700">
+            <a:miter lim="400000"/>
+          </a:ln>
+          <a:extLst>
+            <a:ext uri="{C572A759-6A51-4108-AA02-DFA0A04FC94B}">
+              <ma14:wrappingTextBoxFlag xmlns="" xmlns:m="http://schemas.openxmlformats.org/officeDocument/2006/math" xmlns:a14="http://schemas.microsoft.com/office/drawing/2010/main" xmlns:ma14="http://schemas.microsoft.com/office/mac/drawingml/2011/main" val="1"/>
+            </a:ext>
+          </a:extLst>
+        </p:spPr>
+        <p:txBody>
+          <a:bodyPr lIns="0" tIns="0" rIns="0" bIns="0">
+            <a:spAutoFit/>
+          </a:bodyPr>
+          <a:lstStyle/>
+          <a:p>
+            <a:pPr>
+              <a:lnSpc>
+                <a:spcPct val="160000"/>
+              </a:lnSpc>
+              <a:defRPr sz="1500" b="1">
+                <a:solidFill>
+                  <a:srgbClr val="065F46"/>
+                </a:solidFill>
+                <a:latin typeface="Open Sans"/>
+                <a:ea typeface="Open Sans"/>
+                <a:cs typeface="Open Sans"/>
+                <a:sym typeface="Open Sans"/>
+              </a:defRPr>
+            </a:pPr>
+            <a:r>
+              <a:t>Key Finding:</a:t>
+            </a:r>
+            <a:r>
+              <a:rPr b="0"/>
+              <a:t> Adding genetic markers significantly improved prediction over clinical history alone. The model plateaued at 160 SNPs, suggesting a robust genetic signature for exacerbation risk.</a:t>
+            </a:r>
+          </a:p>
+        </p:txBody>
+      </p:sp>
+      <p:sp>
+        <p:nvSpPr>
+          <p:cNvPr id="219" name="Google Shape;213;p20"/>
+          <p:cNvSpPr txBox="1"/>
+          <p:nvPr/>
+        </p:nvSpPr>
+        <p:spPr>
+          <a:xfrm>
+            <a:off x="571500" y="571500"/>
+            <a:ext cx="11601450" cy="469900"/>
+          </a:xfrm>
+          <a:prstGeom prst="rect">
+            <a:avLst/>
+          </a:prstGeom>
+          <a:ln w="12700">
+            <a:miter lim="400000"/>
+          </a:ln>
+          <a:extLst>
+            <a:ext uri="{C572A759-6A51-4108-AA02-DFA0A04FC94B}">
+              <ma14:wrappingTextBoxFlag xmlns="" xmlns:m="http://schemas.openxmlformats.org/officeDocument/2006/math" xmlns:a14="http://schemas.microsoft.com/office/drawing/2010/main" xmlns:ma14="http://schemas.microsoft.com/office/mac/drawingml/2011/main" val="1"/>
             </a:ext>
           </a:extLst>
         </p:spPr>
@@ -11145,21 +10185,21 @@
           </a:lstStyle>
           <a:p>
             <a:r>
-              <a:t>Visualizing the Signal</a:t>
-            </a:r>
-          </a:p>
-        </p:txBody>
-      </p:sp>
-      <p:sp>
-        <p:nvSpPr>
-          <p:cNvPr id="207" name="Google Shape;198;p19"/>
+              <a:t>Genetics Improves Prediction</a:t>
+            </a:r>
+          </a:p>
+        </p:txBody>
+      </p:sp>
+      <p:sp>
+        <p:nvSpPr>
+          <p:cNvPr id="220" name="Google Shape;214;p20"/>
           <p:cNvSpPr/>
           <p:nvPr/>
         </p:nvSpPr>
         <p:spPr>
           <a:xfrm>
-            <a:off x="571500" y="1428750"/>
-            <a:ext cx="4953000" cy="28575"/>
+            <a:off x="571500" y="1238250"/>
+            <a:ext cx="11049000" cy="28575"/>
           </a:xfrm>
           <a:prstGeom prst="rect">
             <a:avLst/>
@@ -11184,236 +10224,6 @@
               </a:defRPr>
             </a:pPr>
             <a:endParaRPr/>
-          </a:p>
-        </p:txBody>
-      </p:sp>
-      <p:pic>
-        <p:nvPicPr>
-          <p:cNvPr id="208" name="Google Shape;199;p19" descr="Google Shape;199;p19"/>
-          <p:cNvPicPr>
-            <a:picLocks noChangeAspect="1"/>
-          </p:cNvPicPr>
-          <p:nvPr/>
-        </p:nvPicPr>
-        <p:blipFill>
-          <a:blip r:embed="rId3"/>
-          <a:stretch>
-            <a:fillRect/>
-          </a:stretch>
-        </p:blipFill>
-        <p:spPr>
-          <a:xfrm>
-            <a:off x="6096000" y="0"/>
-            <a:ext cx="6096000" cy="6858000"/>
-          </a:xfrm>
-          <a:prstGeom prst="rect">
-            <a:avLst/>
-          </a:prstGeom>
-          <a:ln w="12700">
-            <a:miter lim="400000"/>
-          </a:ln>
-        </p:spPr>
-      </p:pic>
-      <p:sp>
-        <p:nvSpPr>
-          <p:cNvPr id="209" name="Google Shape;200;p19"/>
-          <p:cNvSpPr txBox="1"/>
-          <p:nvPr/>
-        </p:nvSpPr>
-        <p:spPr>
-          <a:xfrm>
-            <a:off x="571499" y="2305050"/>
-            <a:ext cx="4080511" cy="317500"/>
-          </a:xfrm>
-          <a:prstGeom prst="rect">
-            <a:avLst/>
-          </a:prstGeom>
-          <a:ln w="12700">
-            <a:miter lim="400000"/>
-          </a:ln>
-          <a:extLst>
-            <a:ext uri="{C572A759-6A51-4108-AA02-DFA0A04FC94B}">
-              <ma14:wrappingTextBoxFlag xmlns:ma14="http://schemas.microsoft.com/office/mac/drawingml/2011/main" xmlns:a14="http://schemas.microsoft.com/office/drawing/2010/main" xmlns:m="http://schemas.openxmlformats.org/officeDocument/2006/math" xmlns="" val="1"/>
-            </a:ext>
-          </a:extLst>
-        </p:spPr>
-        <p:txBody>
-          <a:bodyPr lIns="0" tIns="0" rIns="0" bIns="0">
-            <a:spAutoFit/>
-          </a:bodyPr>
-          <a:lstStyle>
-            <a:lvl1pPr>
-              <a:defRPr sz="2100" b="1">
-                <a:solidFill>
-                  <a:srgbClr val="0F766E"/>
-                </a:solidFill>
-                <a:latin typeface="Roboto Slab"/>
-                <a:ea typeface="Roboto Slab"/>
-                <a:cs typeface="Roboto Slab"/>
-                <a:sym typeface="Roboto Slab"/>
-              </a:defRPr>
-            </a:lvl1pPr>
-          </a:lstStyle>
-          <a:p>
-            <a:r>
-              <a:t>The RF Importance Landscape</a:t>
-            </a:r>
-          </a:p>
-        </p:txBody>
-      </p:sp>
-      <p:sp>
-        <p:nvSpPr>
-          <p:cNvPr id="210" name="Google Shape;201;p19"/>
-          <p:cNvSpPr txBox="1"/>
-          <p:nvPr/>
-        </p:nvSpPr>
-        <p:spPr>
-          <a:xfrm>
-            <a:off x="571500" y="2800350"/>
-            <a:ext cx="4953000" cy="960121"/>
-          </a:xfrm>
-          <a:prstGeom prst="rect">
-            <a:avLst/>
-          </a:prstGeom>
-          <a:ln w="12700">
-            <a:miter lim="400000"/>
-          </a:ln>
-          <a:extLst>
-            <a:ext uri="{C572A759-6A51-4108-AA02-DFA0A04FC94B}">
-              <ma14:wrappingTextBoxFlag xmlns:ma14="http://schemas.microsoft.com/office/mac/drawingml/2011/main" xmlns:a14="http://schemas.microsoft.com/office/drawing/2010/main" xmlns:m="http://schemas.openxmlformats.org/officeDocument/2006/math" xmlns="" val="1"/>
-            </a:ext>
-          </a:extLst>
-        </p:spPr>
-        <p:txBody>
-          <a:bodyPr lIns="0" tIns="0" rIns="0" bIns="0">
-            <a:spAutoFit/>
-          </a:bodyPr>
-          <a:lstStyle/>
-          <a:p>
-            <a:pPr>
-              <a:lnSpc>
-                <a:spcPct val="160000"/>
-              </a:lnSpc>
-              <a:defRPr sz="1500">
-                <a:solidFill>
-                  <a:srgbClr val="334155"/>
-                </a:solidFill>
-                <a:latin typeface="Open Sans"/>
-                <a:ea typeface="Open Sans"/>
-                <a:cs typeface="Open Sans"/>
-                <a:sym typeface="Open Sans"/>
-              </a:defRPr>
-            </a:pPr>
-            <a:r>
-              <a:t>Unlike a traditional GWAS Manhattan plot which shows -log(p-values), this plot visualizes </a:t>
-            </a:r>
-            <a:r>
-              <a:rPr b="1"/>
-              <a:t>Random Forest Importance Scores</a:t>
-            </a:r>
-            <a:r>
-              <a:t> across the genome.</a:t>
-            </a:r>
-          </a:p>
-        </p:txBody>
-      </p:sp>
-      <p:sp>
-        <p:nvSpPr>
-          <p:cNvPr id="211" name="Google Shape;202;p19"/>
-          <p:cNvSpPr txBox="1"/>
-          <p:nvPr/>
-        </p:nvSpPr>
-        <p:spPr>
-          <a:xfrm>
-            <a:off x="571500" y="3857625"/>
-            <a:ext cx="4953000" cy="960121"/>
-          </a:xfrm>
-          <a:prstGeom prst="rect">
-            <a:avLst/>
-          </a:prstGeom>
-          <a:ln w="12700">
-            <a:miter lim="400000"/>
-          </a:ln>
-          <a:extLst>
-            <a:ext uri="{C572A759-6A51-4108-AA02-DFA0A04FC94B}">
-              <ma14:wrappingTextBoxFlag xmlns:ma14="http://schemas.microsoft.com/office/mac/drawingml/2011/main" xmlns:a14="http://schemas.microsoft.com/office/drawing/2010/main" xmlns:m="http://schemas.openxmlformats.org/officeDocument/2006/math" xmlns="" val="1"/>
-            </a:ext>
-          </a:extLst>
-        </p:spPr>
-        <p:txBody>
-          <a:bodyPr lIns="0" tIns="0" rIns="0" bIns="0">
-            <a:spAutoFit/>
-          </a:bodyPr>
-          <a:lstStyle>
-            <a:lvl1pPr>
-              <a:lnSpc>
-                <a:spcPct val="160000"/>
-              </a:lnSpc>
-              <a:defRPr sz="1500">
-                <a:solidFill>
-                  <a:srgbClr val="334155"/>
-                </a:solidFill>
-                <a:latin typeface="Open Sans"/>
-                <a:ea typeface="Open Sans"/>
-                <a:cs typeface="Open Sans"/>
-                <a:sym typeface="Open Sans"/>
-              </a:defRPr>
-            </a:lvl1pPr>
-          </a:lstStyle>
-          <a:p>
-            <a:r>
-              <a:t>The "peaks" represent SNPs that contribute most significantly to classifying a patient as an "Exacerbator" vs. "Non-Exacerbator".</a:t>
-            </a:r>
-          </a:p>
-        </p:txBody>
-      </p:sp>
-      <p:sp>
-        <p:nvSpPr>
-          <p:cNvPr id="212" name="Google Shape;203;p19"/>
-          <p:cNvSpPr txBox="1"/>
-          <p:nvPr/>
-        </p:nvSpPr>
-        <p:spPr>
-          <a:xfrm>
-            <a:off x="571500" y="4914900"/>
-            <a:ext cx="4953000" cy="594361"/>
-          </a:xfrm>
-          <a:prstGeom prst="rect">
-            <a:avLst/>
-          </a:prstGeom>
-          <a:ln w="12700">
-            <a:miter lim="400000"/>
-          </a:ln>
-          <a:extLst>
-            <a:ext uri="{C572A759-6A51-4108-AA02-DFA0A04FC94B}">
-              <ma14:wrappingTextBoxFlag xmlns:ma14="http://schemas.microsoft.com/office/mac/drawingml/2011/main" xmlns:a14="http://schemas.microsoft.com/office/drawing/2010/main" xmlns:m="http://schemas.openxmlformats.org/officeDocument/2006/math" xmlns="" val="1"/>
-            </a:ext>
-          </a:extLst>
-        </p:spPr>
-        <p:txBody>
-          <a:bodyPr lIns="0" tIns="0" rIns="0" bIns="0">
-            <a:spAutoFit/>
-          </a:bodyPr>
-          <a:lstStyle>
-            <a:lvl1pPr>
-              <a:lnSpc>
-                <a:spcPct val="160000"/>
-              </a:lnSpc>
-              <a:defRPr sz="1500">
-                <a:solidFill>
-                  <a:srgbClr val="334155"/>
-                </a:solidFill>
-                <a:latin typeface="Open Sans"/>
-                <a:ea typeface="Open Sans"/>
-                <a:cs typeface="Open Sans"/>
-                <a:sym typeface="Open Sans"/>
-              </a:defRPr>
-            </a:lvl1pPr>
-          </a:lstStyle>
-          <a:p>
-            <a:r>
-              <a:t>We identified a clear signal distinguishing the top predictive SNPs from the genomic background noise.</a:t>
-            </a:r>
           </a:p>
         </p:txBody>
       </p:sp>
@@ -11445,7 +10255,7 @@
       </p:grpSpPr>
       <p:pic>
         <p:nvPicPr>
-          <p:cNvPr id="214" name="Google Shape;208;p20" descr="Google Shape;208;p20"/>
+          <p:cNvPr id="222" name="Google Shape;219;p21" descr="Google Shape;219;p21"/>
           <p:cNvPicPr>
             <a:picLocks noChangeAspect="1"/>
           </p:cNvPicPr>
@@ -11472,7 +10282,7 @@
       </p:pic>
       <p:pic>
         <p:nvPicPr>
-          <p:cNvPr id="215" name="Google Shape;209;p20" descr="Google Shape;209;p20"/>
+          <p:cNvPr id="223" name="Google Shape;220;p21" descr="Google Shape;220;p21"/>
           <p:cNvPicPr>
             <a:picLocks noChangeAspect="1"/>
           </p:cNvPicPr>
@@ -11486,8 +10296,8 @@
         </p:blipFill>
         <p:spPr>
           <a:xfrm>
-            <a:off x="571500" y="5154810"/>
-            <a:ext cx="11049000" cy="990601"/>
+            <a:off x="571500" y="2014536"/>
+            <a:ext cx="5238750" cy="3905251"/>
           </a:xfrm>
           <a:prstGeom prst="rect">
             <a:avLst/>
@@ -11499,7 +10309,7 @@
       </p:pic>
       <p:pic>
         <p:nvPicPr>
-          <p:cNvPr id="216" name="Google Shape;210;p20" descr="Google Shape;210;p20"/>
+          <p:cNvPr id="224" name="Google Shape;221;p21" descr="Google Shape;221;p21"/>
           <p:cNvPicPr>
             <a:picLocks noChangeAspect="1"/>
           </p:cNvPicPr>
@@ -11513,8 +10323,8 @@
         </p:blipFill>
         <p:spPr>
           <a:xfrm>
-            <a:off x="571500" y="1647825"/>
-            <a:ext cx="11049000" cy="4638675"/>
+            <a:off x="6381750" y="1862136"/>
+            <a:ext cx="5238750" cy="4210051"/>
           </a:xfrm>
           <a:prstGeom prst="rect">
             <a:avLst/>
@@ -11526,14 +10336,14 @@
       </p:pic>
       <p:sp>
         <p:nvSpPr>
-          <p:cNvPr id="217" name="Google Shape;211;p20"/>
+          <p:cNvPr id="225" name="Google Shape;222;p21"/>
           <p:cNvSpPr txBox="1"/>
           <p:nvPr/>
         </p:nvSpPr>
         <p:spPr>
           <a:xfrm>
-            <a:off x="2757486" y="1884015"/>
-            <a:ext cx="6677026" cy="279401"/>
+            <a:off x="904874" y="2890836"/>
+            <a:ext cx="4850608" cy="317501"/>
           </a:xfrm>
           <a:prstGeom prst="rect">
             <a:avLst/>
@@ -11543,7 +10353,54 @@
           </a:ln>
           <a:extLst>
             <a:ext uri="{C572A759-6A51-4108-AA02-DFA0A04FC94B}">
-              <ma14:wrappingTextBoxFlag xmlns:ma14="http://schemas.microsoft.com/office/mac/drawingml/2011/main" xmlns:a14="http://schemas.microsoft.com/office/drawing/2010/main" xmlns:m="http://schemas.openxmlformats.org/officeDocument/2006/math" xmlns="" val="1"/>
+              <ma14:wrappingTextBoxFlag xmlns="" xmlns:m="http://schemas.openxmlformats.org/officeDocument/2006/math" xmlns:a14="http://schemas.microsoft.com/office/drawing/2010/main" xmlns:ma14="http://schemas.microsoft.com/office/mac/drawingml/2011/main" val="1"/>
+            </a:ext>
+          </a:extLst>
+        </p:spPr>
+        <p:txBody>
+          <a:bodyPr lIns="0" tIns="0" rIns="0" bIns="0">
+            <a:spAutoFit/>
+          </a:bodyPr>
+          <a:lstStyle>
+            <a:lvl1pPr>
+              <a:defRPr sz="2100" b="1">
+                <a:solidFill>
+                  <a:srgbClr val="0F766E"/>
+                </a:solidFill>
+                <a:latin typeface="Roboto Slab"/>
+                <a:ea typeface="Roboto Slab"/>
+                <a:cs typeface="Roboto Slab"/>
+                <a:sym typeface="Roboto Slab"/>
+              </a:defRPr>
+            </a:lvl1pPr>
+          </a:lstStyle>
+          <a:p>
+            <a:r>
+              <a:t>Rigorous Validation</a:t>
+            </a:r>
+          </a:p>
+        </p:txBody>
+      </p:sp>
+      <p:sp>
+        <p:nvSpPr>
+          <p:cNvPr id="226" name="Google Shape;223;p21"/>
+          <p:cNvSpPr txBox="1"/>
+          <p:nvPr/>
+        </p:nvSpPr>
+        <p:spPr>
+          <a:xfrm>
+            <a:off x="904875" y="3386137"/>
+            <a:ext cx="4619625" cy="228601"/>
+          </a:xfrm>
+          <a:prstGeom prst="rect">
+            <a:avLst/>
+          </a:prstGeom>
+          <a:ln w="12700">
+            <a:miter lim="400000"/>
+          </a:ln>
+          <a:extLst>
+            <a:ext uri="{C572A759-6A51-4108-AA02-DFA0A04FC94B}">
+              <ma14:wrappingTextBoxFlag xmlns="" xmlns:m="http://schemas.openxmlformats.org/officeDocument/2006/math" xmlns:a14="http://schemas.microsoft.com/office/drawing/2010/main" xmlns:ma14="http://schemas.microsoft.com/office/mac/drawingml/2011/main" val="1"/>
             </a:ext>
           </a:extLst>
         </p:spPr>
@@ -11554,11 +10411,11 @@
           <a:lstStyle>
             <a:lvl1pPr>
               <a:lnSpc>
-                <a:spcPct val="159944"/>
+                <a:spcPct val="160000"/>
               </a:lnSpc>
-              <a:defRPr sz="1800">
+              <a:defRPr sz="1500">
                 <a:solidFill>
-                  <a:srgbClr val="64748B"/>
+                  <a:srgbClr val="334155"/>
                 </a:solidFill>
                 <a:latin typeface="Open Sans"/>
                 <a:ea typeface="Open Sans"/>
@@ -11569,21 +10426,21 @@
           </a:lstStyle>
           <a:p>
             <a:r>
-              <a:t>Area Under the Curve (AUC) in Independent Replication Cohort</a:t>
-            </a:r>
-          </a:p>
-        </p:txBody>
-      </p:sp>
-      <p:sp>
-        <p:nvSpPr>
-          <p:cNvPr id="218" name="Google Shape;212;p20"/>
+              <a:t>We did not just test on the training data.</a:t>
+            </a:r>
+          </a:p>
+        </p:txBody>
+      </p:sp>
+      <p:sp>
+        <p:nvSpPr>
+          <p:cNvPr id="227" name="Google Shape;224;p21"/>
           <p:cNvSpPr txBox="1"/>
           <p:nvPr/>
         </p:nvSpPr>
         <p:spPr>
           <a:xfrm>
-            <a:off x="809625" y="5345310"/>
-            <a:ext cx="10620375" cy="594361"/>
+            <a:off x="6715125" y="2738436"/>
+            <a:ext cx="4850607" cy="317501"/>
           </a:xfrm>
           <a:prstGeom prst="rect">
             <a:avLst/>
@@ -11593,7 +10450,178 @@
           </a:ln>
           <a:extLst>
             <a:ext uri="{C572A759-6A51-4108-AA02-DFA0A04FC94B}">
-              <ma14:wrappingTextBoxFlag xmlns:ma14="http://schemas.microsoft.com/office/mac/drawingml/2011/main" xmlns:a14="http://schemas.microsoft.com/office/drawing/2010/main" xmlns:m="http://schemas.openxmlformats.org/officeDocument/2006/math" xmlns="" val="1"/>
+              <ma14:wrappingTextBoxFlag xmlns="" xmlns:m="http://schemas.openxmlformats.org/officeDocument/2006/math" xmlns:a14="http://schemas.microsoft.com/office/drawing/2010/main" xmlns:ma14="http://schemas.microsoft.com/office/mac/drawingml/2011/main" val="1"/>
+            </a:ext>
+          </a:extLst>
+        </p:spPr>
+        <p:txBody>
+          <a:bodyPr lIns="0" tIns="0" rIns="0" bIns="0">
+            <a:spAutoFit/>
+          </a:bodyPr>
+          <a:lstStyle>
+            <a:lvl1pPr>
+              <a:defRPr sz="2100" b="1">
+                <a:solidFill>
+                  <a:srgbClr val="0F766E"/>
+                </a:solidFill>
+                <a:latin typeface="Roboto Slab"/>
+                <a:ea typeface="Roboto Slab"/>
+                <a:cs typeface="Roboto Slab"/>
+                <a:sym typeface="Roboto Slab"/>
+              </a:defRPr>
+            </a:lvl1pPr>
+          </a:lstStyle>
+          <a:p>
+            <a:r>
+              <a:t>Recognition</a:t>
+            </a:r>
+          </a:p>
+        </p:txBody>
+      </p:sp>
+      <p:sp>
+        <p:nvSpPr>
+          <p:cNvPr id="228" name="Google Shape;225;p21"/>
+          <p:cNvSpPr txBox="1"/>
+          <p:nvPr/>
+        </p:nvSpPr>
+        <p:spPr>
+          <a:xfrm>
+            <a:off x="6715125" y="3233736"/>
+            <a:ext cx="4619625" cy="228601"/>
+          </a:xfrm>
+          <a:prstGeom prst="rect">
+            <a:avLst/>
+          </a:prstGeom>
+          <a:ln w="12700">
+            <a:miter lim="400000"/>
+          </a:ln>
+          <a:extLst>
+            <a:ext uri="{C572A759-6A51-4108-AA02-DFA0A04FC94B}">
+              <ma14:wrappingTextBoxFlag xmlns="" xmlns:m="http://schemas.openxmlformats.org/officeDocument/2006/math" xmlns:a14="http://schemas.microsoft.com/office/drawing/2010/main" xmlns:ma14="http://schemas.microsoft.com/office/mac/drawingml/2011/main" val="1"/>
+            </a:ext>
+          </a:extLst>
+        </p:spPr>
+        <p:txBody>
+          <a:bodyPr lIns="0" tIns="0" rIns="0" bIns="0">
+            <a:spAutoFit/>
+          </a:bodyPr>
+          <a:lstStyle>
+            <a:lvl1pPr>
+              <a:lnSpc>
+                <a:spcPct val="160000"/>
+              </a:lnSpc>
+              <a:defRPr sz="1500">
+                <a:solidFill>
+                  <a:srgbClr val="334155"/>
+                </a:solidFill>
+                <a:latin typeface="Open Sans"/>
+                <a:ea typeface="Open Sans"/>
+                <a:cs typeface="Open Sans"/>
+                <a:sym typeface="Open Sans"/>
+              </a:defRPr>
+            </a:lvl1pPr>
+          </a:lstStyle>
+          <a:p>
+            <a:r>
+              <a:t>This work was highlighted for its innovative approach:</a:t>
+            </a:r>
+          </a:p>
+        </p:txBody>
+      </p:sp>
+      <p:pic>
+        <p:nvPicPr>
+          <p:cNvPr id="229" name="Google Shape;226;p21" descr="Google Shape;226;p21"/>
+          <p:cNvPicPr>
+            <a:picLocks noChangeAspect="1"/>
+          </p:cNvPicPr>
+          <p:nvPr/>
+        </p:nvPicPr>
+        <p:blipFill>
+          <a:blip r:embed="rId5"/>
+          <a:stretch>
+            <a:fillRect/>
+          </a:stretch>
+        </p:blipFill>
+        <p:spPr>
+          <a:xfrm>
+            <a:off x="904875" y="2319336"/>
+            <a:ext cx="333375" cy="381001"/>
+          </a:xfrm>
+          <a:prstGeom prst="rect">
+            <a:avLst/>
+          </a:prstGeom>
+          <a:ln w="12700">
+            <a:miter lim="400000"/>
+          </a:ln>
+        </p:spPr>
+      </p:pic>
+      <p:sp>
+        <p:nvSpPr>
+          <p:cNvPr id="230" name="Google Shape;227;p21"/>
+          <p:cNvSpPr txBox="1"/>
+          <p:nvPr/>
+        </p:nvSpPr>
+        <p:spPr>
+          <a:xfrm>
+            <a:off x="1019175" y="3843337"/>
+            <a:ext cx="76200" cy="228601"/>
+          </a:xfrm>
+          <a:prstGeom prst="rect">
+            <a:avLst/>
+          </a:prstGeom>
+          <a:ln w="12700">
+            <a:miter lim="400000"/>
+          </a:ln>
+          <a:extLst>
+            <a:ext uri="{C572A759-6A51-4108-AA02-DFA0A04FC94B}">
+              <ma14:wrappingTextBoxFlag xmlns="" xmlns:m="http://schemas.openxmlformats.org/officeDocument/2006/math" xmlns:a14="http://schemas.microsoft.com/office/drawing/2010/main" xmlns:ma14="http://schemas.microsoft.com/office/mac/drawingml/2011/main" val="1"/>
+            </a:ext>
+          </a:extLst>
+        </p:spPr>
+        <p:txBody>
+          <a:bodyPr lIns="0" tIns="0" rIns="0" bIns="0">
+            <a:spAutoFit/>
+          </a:bodyPr>
+          <a:lstStyle>
+            <a:lvl1pPr>
+              <a:defRPr sz="1500">
+                <a:solidFill>
+                  <a:srgbClr val="334155"/>
+                </a:solidFill>
+                <a:latin typeface="Open Sans"/>
+                <a:ea typeface="Open Sans"/>
+                <a:cs typeface="Open Sans"/>
+                <a:sym typeface="Open Sans"/>
+              </a:defRPr>
+            </a:lvl1pPr>
+          </a:lstStyle>
+          <a:p>
+            <a:r>
+              <a:t>•</a:t>
+            </a:r>
+          </a:p>
+        </p:txBody>
+      </p:sp>
+      <p:sp>
+        <p:nvSpPr>
+          <p:cNvPr id="231" name="Google Shape;228;p21"/>
+          <p:cNvSpPr txBox="1"/>
+          <p:nvPr/>
+        </p:nvSpPr>
+        <p:spPr>
+          <a:xfrm>
+            <a:off x="1171575" y="3843337"/>
+            <a:ext cx="4352925" cy="594361"/>
+          </a:xfrm>
+          <a:prstGeom prst="rect">
+            <a:avLst/>
+          </a:prstGeom>
+          <a:ln w="12700">
+            <a:miter lim="400000"/>
+          </a:ln>
+          <a:extLst>
+            <a:ext uri="{C572A759-6A51-4108-AA02-DFA0A04FC94B}">
+              <ma14:wrappingTextBoxFlag xmlns="" xmlns:m="http://schemas.openxmlformats.org/officeDocument/2006/math" xmlns:a14="http://schemas.microsoft.com/office/drawing/2010/main" xmlns:ma14="http://schemas.microsoft.com/office/mac/drawingml/2011/main" val="1"/>
             </a:ext>
           </a:extLst>
         </p:spPr>
@@ -11609,7 +10637,7 @@
               </a:lnSpc>
               <a:defRPr sz="1500" b="1">
                 <a:solidFill>
-                  <a:srgbClr val="065F46"/>
+                  <a:srgbClr val="334155"/>
                 </a:solidFill>
                 <a:latin typeface="Open Sans"/>
                 <a:ea typeface="Open Sans"/>
@@ -11618,18 +10646,345 @@
               </a:defRPr>
             </a:pPr>
             <a:r>
-              <a:t>Key Finding:</a:t>
+              <a:t>Permutation Testing:</a:t>
             </a:r>
             <a:r>
               <a:rPr b="0"/>
-              <a:t> Adding genetic markers significantly improved prediction over clinical history alone. The model plateaued at 160 SNPs, suggesting a robust genetic signature for exacerbation risk.</a:t>
-            </a:r>
-          </a:p>
-        </p:txBody>
-      </p:sp>
-      <p:sp>
-        <p:nvSpPr>
-          <p:cNvPr id="219" name="Google Shape;213;p20"/>
+              <a:t> Confirmed results were not due to chance.</a:t>
+            </a:r>
+          </a:p>
+        </p:txBody>
+      </p:sp>
+      <p:sp>
+        <p:nvSpPr>
+          <p:cNvPr id="232" name="Google Shape;229;p21"/>
+          <p:cNvSpPr txBox="1"/>
+          <p:nvPr/>
+        </p:nvSpPr>
+        <p:spPr>
+          <a:xfrm>
+            <a:off x="1019175" y="4567237"/>
+            <a:ext cx="76200" cy="228601"/>
+          </a:xfrm>
+          <a:prstGeom prst="rect">
+            <a:avLst/>
+          </a:prstGeom>
+          <a:ln w="12700">
+            <a:miter lim="400000"/>
+          </a:ln>
+          <a:extLst>
+            <a:ext uri="{C572A759-6A51-4108-AA02-DFA0A04FC94B}">
+              <ma14:wrappingTextBoxFlag xmlns="" xmlns:m="http://schemas.openxmlformats.org/officeDocument/2006/math" xmlns:a14="http://schemas.microsoft.com/office/drawing/2010/main" xmlns:ma14="http://schemas.microsoft.com/office/mac/drawingml/2011/main" val="1"/>
+            </a:ext>
+          </a:extLst>
+        </p:spPr>
+        <p:txBody>
+          <a:bodyPr lIns="0" tIns="0" rIns="0" bIns="0">
+            <a:spAutoFit/>
+          </a:bodyPr>
+          <a:lstStyle>
+            <a:lvl1pPr>
+              <a:defRPr sz="1500">
+                <a:solidFill>
+                  <a:srgbClr val="334155"/>
+                </a:solidFill>
+                <a:latin typeface="Open Sans"/>
+                <a:ea typeface="Open Sans"/>
+                <a:cs typeface="Open Sans"/>
+                <a:sym typeface="Open Sans"/>
+              </a:defRPr>
+            </a:lvl1pPr>
+          </a:lstStyle>
+          <a:p>
+            <a:r>
+              <a:t>•</a:t>
+            </a:r>
+          </a:p>
+        </p:txBody>
+      </p:sp>
+      <p:sp>
+        <p:nvSpPr>
+          <p:cNvPr id="233" name="Google Shape;230;p21"/>
+          <p:cNvSpPr txBox="1"/>
+          <p:nvPr/>
+        </p:nvSpPr>
+        <p:spPr>
+          <a:xfrm>
+            <a:off x="1171575" y="4567237"/>
+            <a:ext cx="4352925" cy="960121"/>
+          </a:xfrm>
+          <a:prstGeom prst="rect">
+            <a:avLst/>
+          </a:prstGeom>
+          <a:ln w="12700">
+            <a:miter lim="400000"/>
+          </a:ln>
+          <a:extLst>
+            <a:ext uri="{C572A759-6A51-4108-AA02-DFA0A04FC94B}">
+              <ma14:wrappingTextBoxFlag xmlns="" xmlns:m="http://schemas.openxmlformats.org/officeDocument/2006/math" xmlns:a14="http://schemas.microsoft.com/office/drawing/2010/main" xmlns:ma14="http://schemas.microsoft.com/office/mac/drawingml/2011/main" val="1"/>
+            </a:ext>
+          </a:extLst>
+        </p:spPr>
+        <p:txBody>
+          <a:bodyPr lIns="0" tIns="0" rIns="0" bIns="0">
+            <a:spAutoFit/>
+          </a:bodyPr>
+          <a:lstStyle/>
+          <a:p>
+            <a:pPr>
+              <a:lnSpc>
+                <a:spcPct val="160000"/>
+              </a:lnSpc>
+              <a:defRPr sz="1500" b="1">
+                <a:solidFill>
+                  <a:srgbClr val="334155"/>
+                </a:solidFill>
+                <a:latin typeface="Open Sans"/>
+                <a:ea typeface="Open Sans"/>
+                <a:cs typeface="Open Sans"/>
+                <a:sym typeface="Open Sans"/>
+              </a:defRPr>
+            </a:pPr>
+            <a:r>
+              <a:t>Independent Replication:</a:t>
+            </a:r>
+            <a:r>
+              <a:rPr b="0"/>
+              <a:t> The model was tested on a separate cohort of 164 subjects, maintaining an AUC of 0.66.</a:t>
+            </a:r>
+          </a:p>
+        </p:txBody>
+      </p:sp>
+      <p:pic>
+        <p:nvPicPr>
+          <p:cNvPr id="234" name="Google Shape;231;p21" descr="Google Shape;231;p21"/>
+          <p:cNvPicPr>
+            <a:picLocks noChangeAspect="1"/>
+          </p:cNvPicPr>
+          <p:nvPr/>
+        </p:nvPicPr>
+        <p:blipFill>
+          <a:blip r:embed="rId6"/>
+          <a:stretch>
+            <a:fillRect/>
+          </a:stretch>
+        </p:blipFill>
+        <p:spPr>
+          <a:xfrm>
+            <a:off x="6715125" y="2166936"/>
+            <a:ext cx="428625" cy="381001"/>
+          </a:xfrm>
+          <a:prstGeom prst="rect">
+            <a:avLst/>
+          </a:prstGeom>
+          <a:ln w="12700">
+            <a:miter lim="400000"/>
+          </a:ln>
+        </p:spPr>
+      </p:pic>
+      <p:sp>
+        <p:nvSpPr>
+          <p:cNvPr id="235" name="Google Shape;232;p21"/>
+          <p:cNvSpPr txBox="1"/>
+          <p:nvPr/>
+        </p:nvSpPr>
+        <p:spPr>
+          <a:xfrm>
+            <a:off x="6829425" y="3995737"/>
+            <a:ext cx="76200" cy="228601"/>
+          </a:xfrm>
+          <a:prstGeom prst="rect">
+            <a:avLst/>
+          </a:prstGeom>
+          <a:ln w="12700">
+            <a:miter lim="400000"/>
+          </a:ln>
+          <a:extLst>
+            <a:ext uri="{C572A759-6A51-4108-AA02-DFA0A04FC94B}">
+              <ma14:wrappingTextBoxFlag xmlns="" xmlns:m="http://schemas.openxmlformats.org/officeDocument/2006/math" xmlns:a14="http://schemas.microsoft.com/office/drawing/2010/main" xmlns:ma14="http://schemas.microsoft.com/office/mac/drawingml/2011/main" val="1"/>
+            </a:ext>
+          </a:extLst>
+        </p:spPr>
+        <p:txBody>
+          <a:bodyPr lIns="0" tIns="0" rIns="0" bIns="0">
+            <a:spAutoFit/>
+          </a:bodyPr>
+          <a:lstStyle>
+            <a:lvl1pPr>
+              <a:defRPr sz="1500">
+                <a:solidFill>
+                  <a:srgbClr val="334155"/>
+                </a:solidFill>
+                <a:latin typeface="Open Sans"/>
+                <a:ea typeface="Open Sans"/>
+                <a:cs typeface="Open Sans"/>
+                <a:sym typeface="Open Sans"/>
+              </a:defRPr>
+            </a:lvl1pPr>
+          </a:lstStyle>
+          <a:p>
+            <a:r>
+              <a:t>•</a:t>
+            </a:r>
+          </a:p>
+        </p:txBody>
+      </p:sp>
+      <p:sp>
+        <p:nvSpPr>
+          <p:cNvPr id="236" name="Google Shape;233;p21"/>
+          <p:cNvSpPr txBox="1"/>
+          <p:nvPr/>
+        </p:nvSpPr>
+        <p:spPr>
+          <a:xfrm>
+            <a:off x="6981825" y="3995737"/>
+            <a:ext cx="4352925" cy="594361"/>
+          </a:xfrm>
+          <a:prstGeom prst="rect">
+            <a:avLst/>
+          </a:prstGeom>
+          <a:ln w="12700">
+            <a:miter lim="400000"/>
+          </a:ln>
+          <a:extLst>
+            <a:ext uri="{C572A759-6A51-4108-AA02-DFA0A04FC94B}">
+              <ma14:wrappingTextBoxFlag xmlns="" xmlns:m="http://schemas.openxmlformats.org/officeDocument/2006/math" xmlns:a14="http://schemas.microsoft.com/office/drawing/2010/main" xmlns:ma14="http://schemas.microsoft.com/office/mac/drawingml/2011/main" val="1"/>
+            </a:ext>
+          </a:extLst>
+        </p:spPr>
+        <p:txBody>
+          <a:bodyPr lIns="0" tIns="0" rIns="0" bIns="0">
+            <a:spAutoFit/>
+          </a:bodyPr>
+          <a:lstStyle/>
+          <a:p>
+            <a:pPr>
+              <a:lnSpc>
+                <a:spcPct val="160000"/>
+              </a:lnSpc>
+              <a:defRPr sz="1500" b="1">
+                <a:solidFill>
+                  <a:srgbClr val="334155"/>
+                </a:solidFill>
+                <a:latin typeface="Open Sans"/>
+                <a:ea typeface="Open Sans"/>
+                <a:cs typeface="Open Sans"/>
+                <a:sym typeface="Open Sans"/>
+              </a:defRPr>
+            </a:pPr>
+            <a:r>
+              <a:t>ATS 2009:</a:t>
+            </a:r>
+            <a:r>
+              <a:rPr b="0"/>
+              <a:t> Featured at the "Scientific Breakthroughs of the Year" symposium.</a:t>
+            </a:r>
+          </a:p>
+        </p:txBody>
+      </p:sp>
+      <p:sp>
+        <p:nvSpPr>
+          <p:cNvPr id="237" name="Google Shape;234;p21"/>
+          <p:cNvSpPr txBox="1"/>
+          <p:nvPr/>
+        </p:nvSpPr>
+        <p:spPr>
+          <a:xfrm>
+            <a:off x="6829425" y="4719637"/>
+            <a:ext cx="76200" cy="228601"/>
+          </a:xfrm>
+          <a:prstGeom prst="rect">
+            <a:avLst/>
+          </a:prstGeom>
+          <a:ln w="12700">
+            <a:miter lim="400000"/>
+          </a:ln>
+          <a:extLst>
+            <a:ext uri="{C572A759-6A51-4108-AA02-DFA0A04FC94B}">
+              <ma14:wrappingTextBoxFlag xmlns="" xmlns:m="http://schemas.openxmlformats.org/officeDocument/2006/math" xmlns:a14="http://schemas.microsoft.com/office/drawing/2010/main" xmlns:ma14="http://schemas.microsoft.com/office/mac/drawingml/2011/main" val="1"/>
+            </a:ext>
+          </a:extLst>
+        </p:spPr>
+        <p:txBody>
+          <a:bodyPr lIns="0" tIns="0" rIns="0" bIns="0">
+            <a:spAutoFit/>
+          </a:bodyPr>
+          <a:lstStyle>
+            <a:lvl1pPr>
+              <a:defRPr sz="1500">
+                <a:solidFill>
+                  <a:srgbClr val="334155"/>
+                </a:solidFill>
+                <a:latin typeface="Open Sans"/>
+                <a:ea typeface="Open Sans"/>
+                <a:cs typeface="Open Sans"/>
+                <a:sym typeface="Open Sans"/>
+              </a:defRPr>
+            </a:lvl1pPr>
+          </a:lstStyle>
+          <a:p>
+            <a:r>
+              <a:t>•</a:t>
+            </a:r>
+          </a:p>
+        </p:txBody>
+      </p:sp>
+      <p:sp>
+        <p:nvSpPr>
+          <p:cNvPr id="238" name="Google Shape;235;p21"/>
+          <p:cNvSpPr txBox="1"/>
+          <p:nvPr/>
+        </p:nvSpPr>
+        <p:spPr>
+          <a:xfrm>
+            <a:off x="6981825" y="4719637"/>
+            <a:ext cx="4352925" cy="960121"/>
+          </a:xfrm>
+          <a:prstGeom prst="rect">
+            <a:avLst/>
+          </a:prstGeom>
+          <a:ln w="12700">
+            <a:miter lim="400000"/>
+          </a:ln>
+          <a:extLst>
+            <a:ext uri="{C572A759-6A51-4108-AA02-DFA0A04FC94B}">
+              <ma14:wrappingTextBoxFlag xmlns="" xmlns:m="http://schemas.openxmlformats.org/officeDocument/2006/math" xmlns:a14="http://schemas.microsoft.com/office/drawing/2010/main" xmlns:ma14="http://schemas.microsoft.com/office/mac/drawingml/2011/main" val="1"/>
+            </a:ext>
+          </a:extLst>
+        </p:spPr>
+        <p:txBody>
+          <a:bodyPr lIns="0" tIns="0" rIns="0" bIns="0">
+            <a:spAutoFit/>
+          </a:bodyPr>
+          <a:lstStyle/>
+          <a:p>
+            <a:pPr>
+              <a:lnSpc>
+                <a:spcPct val="160000"/>
+              </a:lnSpc>
+              <a:defRPr sz="1500" b="1">
+                <a:solidFill>
+                  <a:srgbClr val="334155"/>
+                </a:solidFill>
+                <a:latin typeface="Open Sans"/>
+                <a:ea typeface="Open Sans"/>
+                <a:cs typeface="Open Sans"/>
+                <a:sym typeface="Open Sans"/>
+              </a:defRPr>
+            </a:pPr>
+            <a:r>
+              <a:t>Impact:</a:t>
+            </a:r>
+            <a:r>
+              <a:rPr b="0"/>
+              <a:t> Categorized as "Highly Accessed" by BMC Medical Genetics, influencing future ML-GWAS integration studies.</a:t>
+            </a:r>
+          </a:p>
+        </p:txBody>
+      </p:sp>
+      <p:sp>
+        <p:nvSpPr>
+          <p:cNvPr id="239" name="Google Shape;236;p21"/>
           <p:cNvSpPr txBox="1"/>
           <p:nvPr/>
         </p:nvSpPr>
@@ -11646,7 +11001,7 @@
           </a:ln>
           <a:extLst>
             <a:ext uri="{C572A759-6A51-4108-AA02-DFA0A04FC94B}">
-              <ma14:wrappingTextBoxFlag xmlns:ma14="http://schemas.microsoft.com/office/mac/drawingml/2011/main" xmlns:a14="http://schemas.microsoft.com/office/drawing/2010/main" xmlns:m="http://schemas.openxmlformats.org/officeDocument/2006/math" xmlns="" val="1"/>
+              <ma14:wrappingTextBoxFlag xmlns="" xmlns:m="http://schemas.openxmlformats.org/officeDocument/2006/math" xmlns:a14="http://schemas.microsoft.com/office/drawing/2010/main" xmlns:ma14="http://schemas.microsoft.com/office/mac/drawingml/2011/main" val="1"/>
             </a:ext>
           </a:extLst>
         </p:spPr>
@@ -11669,14 +11024,14 @@
           </a:lstStyle>
           <a:p>
             <a:r>
-              <a:t>Genetics Improves Prediction</a:t>
-            </a:r>
-          </a:p>
-        </p:txBody>
-      </p:sp>
-      <p:sp>
-        <p:nvSpPr>
-          <p:cNvPr id="220" name="Google Shape;214;p20"/>
+              <a:t>Validation &amp; Impact</a:t>
+            </a:r>
+          </a:p>
+        </p:txBody>
+      </p:sp>
+      <p:sp>
+        <p:nvSpPr>
+          <p:cNvPr id="240" name="Google Shape;237;p21"/>
           <p:cNvSpPr/>
           <p:nvPr/>
         </p:nvSpPr>
